--- a/docs/Mallard Study Design Process - leaders deck.pptx
+++ b/docs/Mallard Study Design Process - leaders deck.pptx
@@ -864,7 +864,7 @@
           <a:p>
             <a:r>
               <a:rPr lang="en-US" dirty="0"/>
-              <a:t>Two minutes. Walk the row left to right. Stress that the design decision is made first and separately, because a plan built on the wrong design is wrong throughout, and that the investigator approves it before a credit is spent. Steps 6 and 7 are on request so a power justification does not carry an unwanted abstract.</a:t>
+              <a:t>Two minutes. Walk the row left to right. Stress three things: the estimand and variables come before the design is recommended; the design is confirmed before a credit is spent; and execution, the write-up and code are drafted only when asked for. The seven generation steps of the pipeline still exist underneath, but the investigator sees these six phases.</a:t>
             </a:r>
             <a:endParaRPr lang="en-US" dirty="0"/>
           </a:p>
@@ -1392,7 +1392,7 @@
           <a:p>
             <a:r>
               <a:rPr lang="en-US" dirty="0"/>
-              <a:t>Two minutes. Do not read all eleven. Name D4, D6 and D9: the design approval that gates the credit, the optional statistician review that goes stale if anything changes, and the one revision that costs a credit. Appendix A of the document gives every option and its effect.</a:t>
+              <a:t>Two minutes. Do not read all eleven. Name D4, D8 and D9: the design approval that gates the credit, the save-or-update choice after an edit, and the explicit acceptance of anything regenerated. Appendix A of the document gives every option and its effect.</a:t>
             </a:r>
             <a:endParaRPr lang="en-US" dirty="0"/>
           </a:p>
@@ -3317,7 +3317,7 @@
                 <a:ea typeface="Cambria" pitchFamily="34" charset="-122"/>
                 <a:cs typeface="Cambria" pitchFamily="34" charset="-120"/>
               </a:rPr>
-              <a:t>7</a:t>
+              <a:t>6</a:t>
             </a:r>
             <a:endParaRPr lang="en-US" sz="6600" dirty="0"/>
           </a:p>
@@ -3356,7 +3356,7 @@
                 <a:ea typeface="Calibri" pitchFamily="34" charset="-122"/>
                 <a:cs typeface="Calibri" pitchFamily="34" charset="-120"/>
               </a:rPr>
-              <a:t>steps, built in the order a study develops, with the design settled first</a:t>
+              <a:t>workspace phases, each ending in a gate the investigator confirms, with the design settled in Phase 3</a:t>
             </a:r>
             <a:endParaRPr lang="en-US" sz="1300" dirty="0"/>
           </a:p>
@@ -3839,7 +3839,7 @@
                 <a:ea typeface="Cambria" pitchFamily="34" charset="-122"/>
                 <a:cs typeface="Cambria" pitchFamily="34" charset="-120"/>
               </a:rPr>
-              <a:t>The plan is built in the order a study develops</a:t>
+              <a:t>Six phases, each ending in a gate the investigator confirms</a:t>
             </a:r>
             <a:endParaRPr lang="en-US" sz="3400" dirty="0"/>
           </a:p>
@@ -3878,7 +3878,7 @@
                 <a:ea typeface="Calibri" pitchFamily="34" charset="-122"/>
                 <a:cs typeface="Calibri" pitchFamily="34" charset="-120"/>
               </a:rPr>
-              <a:t>A free design brief first, then six plan steps; one credit is spent at step 3</a:t>
+              <a:t>The workspace is the default entry; the design is settled in Phase 3 and the plan credit is spent in Phase 4</a:t>
             </a:r>
             <a:endParaRPr lang="en-US" sz="1500" dirty="0"/>
           </a:p>
@@ -3918,7 +3918,7 @@
         <p:spPr>
           <a:xfrm>
             <a:off x="749808" y="1490472"/>
-            <a:ext cx="2926080" cy="256032"/>
+            <a:ext cx="4206240" cy="256032"/>
           </a:xfrm>
           <a:prstGeom prst="rect">
             <a:avLst/>
@@ -3942,7 +3942,7 @@
                 <a:ea typeface="Calibri" pitchFamily="34" charset="-122"/>
                 <a:cs typeface="Calibri" pitchFamily="34" charset="-120"/>
               </a:rPr>
-              <a:t>Reviewed by two model labs</a:t>
+              <a:t>Models draft; two labs review the brief and the analyses</a:t>
             </a:r>
             <a:endParaRPr lang="en-US" sz="1150" dirty="0"/>
           </a:p>
@@ -3956,7 +3956,7 @@
         </p:nvSpPr>
         <p:spPr>
           <a:xfrm>
-            <a:off x="3291840" y="1554480"/>
+            <a:off x="4937760" y="1554480"/>
             <a:ext cx="118872" cy="118872"/>
           </a:xfrm>
           <a:prstGeom prst="rect">
@@ -3981,8 +3981,8 @@
         </p:nvSpPr>
         <p:spPr>
           <a:xfrm>
-            <a:off x="3474720" y="1490472"/>
-            <a:ext cx="3108960" cy="256032"/>
+            <a:off x="5120640" y="1490472"/>
+            <a:ext cx="2926080" cy="256032"/>
           </a:xfrm>
           <a:prstGeom prst="rect">
             <a:avLst/>
@@ -4006,7 +4006,7 @@
                 <a:ea typeface="Calibri" pitchFamily="34" charset="-122"/>
                 <a:cs typeface="Calibri" pitchFamily="34" charset="-120"/>
               </a:rPr>
-              <a:t>Deterministic checks only</a:t>
+              <a:t>Deterministic gates and checks</a:t>
             </a:r>
             <a:endParaRPr lang="en-US" sz="1150" dirty="0"/>
           </a:p>
@@ -4020,7 +4020,7 @@
         </p:nvSpPr>
         <p:spPr>
           <a:xfrm>
-            <a:off x="6126480" y="1554480"/>
+            <a:off x="8138160" y="1554480"/>
             <a:ext cx="118872" cy="118872"/>
           </a:xfrm>
           <a:prstGeom prst="rect">
@@ -4045,8 +4045,8 @@
         </p:nvSpPr>
         <p:spPr>
           <a:xfrm>
-            <a:off x="6309360" y="1490472"/>
-            <a:ext cx="3657600" cy="256032"/>
+            <a:off x="8321040" y="1490472"/>
+            <a:ext cx="3291840" cy="256032"/>
           </a:xfrm>
           <a:prstGeom prst="rect">
             <a:avLst/>
@@ -4070,7 +4070,7 @@
                 <a:ea typeface="Calibri" pitchFamily="34" charset="-122"/>
                 <a:cs typeface="Calibri" pitchFamily="34" charset="-120"/>
               </a:rPr>
-              <a:t>Investigator answers questions here</a:t>
+              <a:t>Generated on the investigator's press</a:t>
             </a:r>
             <a:endParaRPr lang="en-US" sz="1150" dirty="0"/>
           </a:p>
@@ -4085,7 +4085,7 @@
         <p:spPr>
           <a:xfrm>
             <a:off x="566928" y="2011680"/>
-            <a:ext cx="1481328" cy="1051560"/>
+            <a:ext cx="1737360" cy="1051560"/>
           </a:xfrm>
           <a:prstGeom prst="roundRect">
             <a:avLst>
@@ -4112,7 +4112,7 @@
         <p:spPr>
           <a:xfrm>
             <a:off x="566928" y="2953512"/>
-            <a:ext cx="1481328" cy="109728"/>
+            <a:ext cx="1737360" cy="109728"/>
           </a:xfrm>
           <a:prstGeom prst="rect">
             <a:avLst/>
@@ -4137,11 +4137,11 @@
         <p:spPr>
           <a:xfrm>
             <a:off x="566928" y="3063240"/>
-            <a:ext cx="1481328" cy="2148840"/>
+            <a:ext cx="1737360" cy="2148840"/>
           </a:xfrm>
           <a:prstGeom prst="roundRect">
             <a:avLst>
-              <a:gd name="adj" fmla="val 4938"/>
+              <a:gd name="adj" fmla="val 4211"/>
             </a:avLst>
           </a:prstGeom>
           <a:solidFill>
@@ -4164,7 +4164,7 @@
         <p:spPr>
           <a:xfrm>
             <a:off x="566928" y="3063240"/>
-            <a:ext cx="1481328" cy="91440"/>
+            <a:ext cx="1737360" cy="91440"/>
           </a:xfrm>
           <a:prstGeom prst="rect">
             <a:avLst/>
@@ -4189,7 +4189,7 @@
         <p:spPr>
           <a:xfrm>
             <a:off x="731520" y="2112264"/>
-            <a:ext cx="1152144" cy="201168"/>
+            <a:ext cx="1408176" cy="201168"/>
           </a:xfrm>
           <a:prstGeom prst="rect">
             <a:avLst/>
@@ -4213,7 +4213,7 @@
                 <a:ea typeface="Consolas" pitchFamily="34" charset="-122"/>
                 <a:cs typeface="Consolas" pitchFamily="34" charset="-120"/>
               </a:rPr>
-              <a:t>STEP 1</a:t>
+              <a:t>PHASE 1</a:t>
             </a:r>
             <a:endParaRPr lang="en-US" sz="950" dirty="0"/>
           </a:p>
@@ -4228,7 +4228,7 @@
         <p:spPr>
           <a:xfrm>
             <a:off x="731520" y="2304288"/>
-            <a:ext cx="1152144" cy="667512"/>
+            <a:ext cx="1408176" cy="667512"/>
           </a:xfrm>
           <a:prstGeom prst="rect">
             <a:avLst/>
@@ -4252,7 +4252,7 @@
                 <a:ea typeface="Cambria" pitchFamily="34" charset="-122"/>
                 <a:cs typeface="Cambria" pitchFamily="34" charset="-120"/>
               </a:rPr>
-              <a:t>Question and data</a:t>
+              <a:t>Question and aims</a:t>
             </a:r>
             <a:endParaRPr lang="en-US" sz="1400" dirty="0"/>
           </a:p>
@@ -4267,7 +4267,7 @@
         <p:spPr>
           <a:xfrm>
             <a:off x="713232" y="3191256"/>
-            <a:ext cx="1188720" cy="1892808"/>
+            <a:ext cx="1444752" cy="1892808"/>
           </a:xfrm>
           <a:prstGeom prst="rect">
             <a:avLst/>
@@ -4298,7 +4298,7 @@
         <p:spPr>
           <a:xfrm>
             <a:off x="694944" y="3200400"/>
-            <a:ext cx="1225296" cy="1463040"/>
+            <a:ext cx="1481328" cy="1600200"/>
           </a:xfrm>
           <a:prstGeom prst="rect">
             <a:avLst/>
@@ -4325,7 +4325,7 @@
                 <a:ea typeface="Calibri" pitchFamily="34" charset="-122"/>
                 <a:cs typeface="Calibri" pitchFamily="34" charset="-120"/>
               </a:rPr>
-              <a:t>What am I asking, has it been answered, what records do I have?</a:t>
+              <a:t>Aims suggested with placeholders; roles and claims set; the aims check; a PubMed literature scan.</a:t>
             </a:r>
             <a:endParaRPr lang="en-US" sz="950" dirty="0"/>
           </a:p>
@@ -4342,7 +4342,7 @@
                 <a:ea typeface="Calibri" pitchFamily="34" charset="-122"/>
                 <a:cs typeface="Calibri" pitchFamily="34" charset="-120"/>
               </a:rPr>
-              <a:t>Free. Nothing generated.</a:t>
+              <a:t>Free. Gate: 1 to 3 aims with roles.</a:t>
             </a:r>
             <a:endParaRPr lang="en-US" sz="950" dirty="0"/>
           </a:p>
@@ -4361,6 +4361,33 @@
           </a:xfrm>
           <a:prstGeom prst="rect">
             <a:avLst/>
+          </a:prstGeom>
+          <a:solidFill>
+            <a:srgbClr val="9A6B0F"/>
+          </a:solidFill>
+          <a:ln w="12700">
+            <a:solidFill>
+              <a:srgbClr val="9A6B0F"/>
+            </a:solidFill>
+            <a:prstDash val="solid"/>
+          </a:ln>
+        </p:spPr>
+      </p:sp>
+      <p:sp>
+        <p:nvSpPr>
+          <p:cNvPr id="19" name="Shape 17"/>
+          <p:cNvSpPr/>
+          <p:nvPr/>
+        </p:nvSpPr>
+        <p:spPr>
+          <a:xfrm>
+            <a:off x="2437790" y="2011680"/>
+            <a:ext cx="1737360" cy="1051560"/>
+          </a:xfrm>
+          <a:prstGeom prst="roundRect">
+            <a:avLst>
+              <a:gd name="adj" fmla="val 6957"/>
+            </a:avLst>
           </a:prstGeom>
           <a:solidFill>
             <a:srgbClr val="0F4C43"/>
@@ -4375,19 +4402,17 @@
       </p:sp>
       <p:sp>
         <p:nvSpPr>
-          <p:cNvPr id="19" name="Shape 17"/>
+          <p:cNvPr id="20" name="Shape 18"/>
           <p:cNvSpPr/>
           <p:nvPr/>
         </p:nvSpPr>
         <p:spPr>
           <a:xfrm>
-            <a:off x="2167128" y="2011680"/>
-            <a:ext cx="1481328" cy="1051560"/>
-          </a:xfrm>
-          <a:prstGeom prst="roundRect">
-            <a:avLst>
-              <a:gd name="adj" fmla="val 6957"/>
-            </a:avLst>
+            <a:off x="2437790" y="2953512"/>
+            <a:ext cx="1737360" cy="109728"/>
+          </a:xfrm>
+          <a:prstGeom prst="rect">
+            <a:avLst/>
           </a:prstGeom>
           <a:solidFill>
             <a:srgbClr val="0F4C43"/>
@@ -4402,14 +4427,234 @@
       </p:sp>
       <p:sp>
         <p:nvSpPr>
-          <p:cNvPr id="20" name="Shape 18"/>
+          <p:cNvPr id="21" name="Shape 19"/>
           <p:cNvSpPr/>
           <p:nvPr/>
         </p:nvSpPr>
         <p:spPr>
           <a:xfrm>
-            <a:off x="2167128" y="2953512"/>
-            <a:ext cx="1481328" cy="109728"/>
+            <a:off x="2437790" y="3063240"/>
+            <a:ext cx="1737360" cy="2148840"/>
+          </a:xfrm>
+          <a:prstGeom prst="roundRect">
+            <a:avLst>
+              <a:gd name="adj" fmla="val 4211"/>
+            </a:avLst>
+          </a:prstGeom>
+          <a:solidFill>
+            <a:srgbClr val="F7FAF9"/>
+          </a:solidFill>
+          <a:ln w="12700">
+            <a:solidFill>
+              <a:srgbClr val="F7FAF9"/>
+            </a:solidFill>
+            <a:prstDash val="solid"/>
+          </a:ln>
+        </p:spPr>
+      </p:sp>
+      <p:sp>
+        <p:nvSpPr>
+          <p:cNvPr id="22" name="Shape 20"/>
+          <p:cNvSpPr/>
+          <p:nvPr/>
+        </p:nvSpPr>
+        <p:spPr>
+          <a:xfrm>
+            <a:off x="2437790" y="3063240"/>
+            <a:ext cx="1737360" cy="91440"/>
+          </a:xfrm>
+          <a:prstGeom prst="rect">
+            <a:avLst/>
+          </a:prstGeom>
+          <a:solidFill>
+            <a:srgbClr val="F7FAF9"/>
+          </a:solidFill>
+          <a:ln w="12700">
+            <a:solidFill>
+              <a:srgbClr val="F7FAF9"/>
+            </a:solidFill>
+            <a:prstDash val="solid"/>
+          </a:ln>
+        </p:spPr>
+      </p:sp>
+      <p:sp>
+        <p:nvSpPr>
+          <p:cNvPr id="23" name="Text 21"/>
+          <p:cNvSpPr txBox="1"/>
+          <p:nvPr/>
+        </p:nvSpPr>
+        <p:spPr>
+          <a:xfrm>
+            <a:off x="2602382" y="2112264"/>
+            <a:ext cx="1408176" cy="201168"/>
+          </a:xfrm>
+          <a:prstGeom prst="rect">
+            <a:avLst/>
+          </a:prstGeom>
+          <a:noFill/>
+          <a:ln/>
+        </p:spPr>
+        <p:txBody>
+          <a:bodyPr wrap="square" lIns="0" tIns="0" rIns="0" bIns="0" rtlCol="0" anchor="ctr"/>
+          <a:lstStyle/>
+          <a:p>
+            <a:pPr indent="0" marL="0">
+              <a:buNone/>
+            </a:pPr>
+            <a:r>
+              <a:rPr lang="en-US" sz="950" b="1" dirty="0">
+                <a:solidFill>
+                  <a:srgbClr val="8FC3B5"/>
+                </a:solidFill>
+                <a:latin typeface="Consolas" pitchFamily="34" charset="0"/>
+                <a:ea typeface="Consolas" pitchFamily="34" charset="-122"/>
+                <a:cs typeface="Consolas" pitchFamily="34" charset="-120"/>
+              </a:rPr>
+              <a:t>PHASE 2</a:t>
+            </a:r>
+            <a:endParaRPr lang="en-US" sz="950" dirty="0"/>
+          </a:p>
+        </p:txBody>
+      </p:sp>
+      <p:sp>
+        <p:nvSpPr>
+          <p:cNvPr id="24" name="Text 22"/>
+          <p:cNvSpPr txBox="1"/>
+          <p:nvPr/>
+        </p:nvSpPr>
+        <p:spPr>
+          <a:xfrm>
+            <a:off x="2602382" y="2304288"/>
+            <a:ext cx="1408176" cy="667512"/>
+          </a:xfrm>
+          <a:prstGeom prst="rect">
+            <a:avLst/>
+          </a:prstGeom>
+          <a:noFill/>
+          <a:ln/>
+        </p:spPr>
+        <p:txBody>
+          <a:bodyPr wrap="square" lIns="0" tIns="0" rIns="0" bIns="0" rtlCol="0" anchor="t"/>
+          <a:lstStyle/>
+          <a:p>
+            <a:pPr indent="0" marL="0">
+              <a:buNone/>
+            </a:pPr>
+            <a:r>
+              <a:rPr lang="en-US" sz="1400" b="1" dirty="0">
+                <a:solidFill>
+                  <a:srgbClr val="FFFFFF"/>
+                </a:solidFill>
+                <a:latin typeface="Cambria" pitchFamily="34" charset="0"/>
+                <a:ea typeface="Cambria" pitchFamily="34" charset="-122"/>
+                <a:cs typeface="Cambria" pitchFamily="34" charset="-120"/>
+              </a:rPr>
+              <a:t>Feasibility</a:t>
+            </a:r>
+            <a:endParaRPr lang="en-US" sz="1400" dirty="0"/>
+          </a:p>
+        </p:txBody>
+      </p:sp>
+      <p:sp>
+        <p:nvSpPr>
+          <p:cNvPr id="25" name="Text 23"/>
+          <p:cNvSpPr txBox="1"/>
+          <p:nvPr/>
+        </p:nvSpPr>
+        <p:spPr>
+          <a:xfrm>
+            <a:off x="2584094" y="3191256"/>
+            <a:ext cx="1444752" cy="1892808"/>
+          </a:xfrm>
+          <a:prstGeom prst="rect">
+            <a:avLst/>
+          </a:prstGeom>
+          <a:noFill/>
+          <a:ln/>
+        </p:spPr>
+        <p:txBody>
+          <a:bodyPr wrap="square" lIns="0" tIns="0" rIns="0" bIns="0" rtlCol="0" anchor="t"/>
+          <a:lstStyle/>
+          <a:p>
+            <a:pPr indent="0" marL="0">
+              <a:spcAft>
+                <a:spcPts val="400"/>
+              </a:spcAft>
+              <a:buNone/>
+            </a:pPr>
+            <a:endParaRPr lang="en-US" sz="900" dirty="0"/>
+          </a:p>
+        </p:txBody>
+      </p:sp>
+      <p:sp>
+        <p:nvSpPr>
+          <p:cNvPr id="26" name="Text 24"/>
+          <p:cNvSpPr txBox="1"/>
+          <p:nvPr/>
+        </p:nvSpPr>
+        <p:spPr>
+          <a:xfrm>
+            <a:off x="2565806" y="3200400"/>
+            <a:ext cx="1481328" cy="1600200"/>
+          </a:xfrm>
+          <a:prstGeom prst="rect">
+            <a:avLst/>
+          </a:prstGeom>
+          <a:noFill/>
+          <a:ln/>
+        </p:spPr>
+        <p:txBody>
+          <a:bodyPr wrap="square" lIns="0" tIns="0" rIns="0" bIns="0" rtlCol="0" anchor="t"/>
+          <a:lstStyle/>
+          <a:p>
+            <a:pPr indent="0" marL="0">
+              <a:spcAft>
+                <a:spcPts val="600"/>
+              </a:spcAft>
+              <a:buNone/>
+            </a:pPr>
+            <a:r>
+              <a:rPr lang="en-US" sz="950" dirty="0">
+                <a:solidFill>
+                  <a:srgbClr val="16202B"/>
+                </a:solidFill>
+                <a:latin typeface="Calibri" pitchFamily="34" charset="0"/>
+                <a:ea typeface="Calibri" pitchFamily="34" charset="-122"/>
+                <a:cs typeface="Calibri" pitchFamily="34" charset="-120"/>
+              </a:rPr>
+              <a:t>Seven questions, each answered with a basis and an owner; the variable map on request.</a:t>
+            </a:r>
+            <a:endParaRPr lang="en-US" sz="950" dirty="0"/>
+          </a:p>
+          <a:p>
+            <a:pPr indent="0" marL="0">
+              <a:buNone/>
+            </a:pPr>
+            <a:r>
+              <a:rPr lang="en-US" sz="950" b="1" dirty="0">
+                <a:solidFill>
+                  <a:srgbClr val="0F4C43"/>
+                </a:solidFill>
+                <a:latin typeface="Calibri" pitchFamily="34" charset="0"/>
+                <a:ea typeface="Calibri" pitchFamily="34" charset="-122"/>
+                <a:cs typeface="Calibri" pitchFamily="34" charset="-120"/>
+              </a:rPr>
+              <a:t>Free. Gate: every row has a basis and a result.</a:t>
+            </a:r>
+            <a:endParaRPr lang="en-US" sz="950" dirty="0"/>
+          </a:p>
+        </p:txBody>
+      </p:sp>
+      <p:sp>
+        <p:nvSpPr>
+          <p:cNvPr id="27" name="Shape 25"/>
+          <p:cNvSpPr/>
+          <p:nvPr/>
+        </p:nvSpPr>
+        <p:spPr>
+          <a:xfrm>
+            <a:off x="2565806" y="4937760"/>
+            <a:ext cx="118872" cy="118872"/>
           </a:xfrm>
           <a:prstGeom prst="rect">
             <a:avLst/>
@@ -4427,18 +4672,70 @@
       </p:sp>
       <p:sp>
         <p:nvSpPr>
-          <p:cNvPr id="21" name="Shape 19"/>
+          <p:cNvPr id="28" name="Shape 26"/>
           <p:cNvSpPr/>
           <p:nvPr/>
         </p:nvSpPr>
         <p:spPr>
           <a:xfrm>
-            <a:off x="2167128" y="3063240"/>
-            <a:ext cx="1481328" cy="2148840"/>
+            <a:off x="4308653" y="2011680"/>
+            <a:ext cx="1737360" cy="1051560"/>
           </a:xfrm>
           <a:prstGeom prst="roundRect">
             <a:avLst>
-              <a:gd name="adj" fmla="val 4938"/>
+              <a:gd name="adj" fmla="val 6957"/>
+            </a:avLst>
+          </a:prstGeom>
+          <a:solidFill>
+            <a:srgbClr val="0F4C43"/>
+          </a:solidFill>
+          <a:ln w="12700">
+            <a:solidFill>
+              <a:srgbClr val="0F4C43"/>
+            </a:solidFill>
+            <a:prstDash val="solid"/>
+          </a:ln>
+        </p:spPr>
+      </p:sp>
+      <p:sp>
+        <p:nvSpPr>
+          <p:cNvPr id="29" name="Shape 27"/>
+          <p:cNvSpPr/>
+          <p:nvPr/>
+        </p:nvSpPr>
+        <p:spPr>
+          <a:xfrm>
+            <a:off x="4308653" y="2953512"/>
+            <a:ext cx="1737360" cy="109728"/>
+          </a:xfrm>
+          <a:prstGeom prst="rect">
+            <a:avLst/>
+          </a:prstGeom>
+          <a:solidFill>
+            <a:srgbClr val="0F4C43"/>
+          </a:solidFill>
+          <a:ln w="12700">
+            <a:solidFill>
+              <a:srgbClr val="0F4C43"/>
+            </a:solidFill>
+            <a:prstDash val="solid"/>
+          </a:ln>
+        </p:spPr>
+      </p:sp>
+      <p:sp>
+        <p:nvSpPr>
+          <p:cNvPr id="30" name="Shape 28"/>
+          <p:cNvSpPr/>
+          <p:nvPr/>
+        </p:nvSpPr>
+        <p:spPr>
+          <a:xfrm>
+            <a:off x="4308653" y="3063240"/>
+            <a:ext cx="1737360" cy="2148840"/>
+          </a:xfrm>
+          <a:prstGeom prst="roundRect">
+            <a:avLst>
+              <a:gd name="adj" fmla="val 4211"/>
             </a:avLst>
           </a:prstGeom>
           <a:solidFill>
@@ -4454,14 +4751,14 @@
       </p:sp>
       <p:sp>
         <p:nvSpPr>
-          <p:cNvPr id="22" name="Shape 20"/>
+          <p:cNvPr id="31" name="Shape 29"/>
           <p:cNvSpPr/>
           <p:nvPr/>
         </p:nvSpPr>
         <p:spPr>
           <a:xfrm>
-            <a:off x="2167128" y="3063240"/>
-            <a:ext cx="1481328" cy="91440"/>
+            <a:off x="4308653" y="3063240"/>
+            <a:ext cx="1737360" cy="91440"/>
           </a:xfrm>
           <a:prstGeom prst="rect">
             <a:avLst/>
@@ -4479,14 +4776,14 @@
       </p:sp>
       <p:sp>
         <p:nvSpPr>
-          <p:cNvPr id="23" name="Text 21"/>
-          <p:cNvSpPr txBox="1"/>
-          <p:nvPr/>
-        </p:nvSpPr>
-        <p:spPr>
-          <a:xfrm>
-            <a:off x="2331720" y="2112264"/>
-            <a:ext cx="1152144" cy="201168"/>
+          <p:cNvPr id="32" name="Text 30"/>
+          <p:cNvSpPr txBox="1"/>
+          <p:nvPr/>
+        </p:nvSpPr>
+        <p:spPr>
+          <a:xfrm>
+            <a:off x="4473245" y="2112264"/>
+            <a:ext cx="1408176" cy="201168"/>
           </a:xfrm>
           <a:prstGeom prst="rect">
             <a:avLst/>
@@ -4510,7 +4807,7 @@
                 <a:ea typeface="Consolas" pitchFamily="34" charset="-122"/>
                 <a:cs typeface="Consolas" pitchFamily="34" charset="-120"/>
               </a:rPr>
-              <a:t>STEP 2</a:t>
+              <a:t>PHASE 3</a:t>
             </a:r>
             <a:endParaRPr lang="en-US" sz="950" dirty="0"/>
           </a:p>
@@ -4518,14 +4815,14 @@
       </p:sp>
       <p:sp>
         <p:nvSpPr>
-          <p:cNvPr id="24" name="Text 22"/>
-          <p:cNvSpPr txBox="1"/>
-          <p:nvPr/>
-        </p:nvSpPr>
-        <p:spPr>
-          <a:xfrm>
-            <a:off x="2331720" y="2304288"/>
-            <a:ext cx="1152144" cy="667512"/>
+          <p:cNvPr id="33" name="Text 31"/>
+          <p:cNvSpPr txBox="1"/>
+          <p:nvPr/>
+        </p:nvSpPr>
+        <p:spPr>
+          <a:xfrm>
+            <a:off x="4473245" y="2304288"/>
+            <a:ext cx="1408176" cy="667512"/>
           </a:xfrm>
           <a:prstGeom prst="rect">
             <a:avLst/>
@@ -4549,7 +4846,7 @@
                 <a:ea typeface="Cambria" pitchFamily="34" charset="-122"/>
                 <a:cs typeface="Cambria" pitchFamily="34" charset="-120"/>
               </a:rPr>
-              <a:t>Design brief</a:t>
+              <a:t>Design confirmation</a:t>
             </a:r>
             <a:endParaRPr lang="en-US" sz="1400" dirty="0"/>
           </a:p>
@@ -4557,14 +4854,14 @@
       </p:sp>
       <p:sp>
         <p:nvSpPr>
-          <p:cNvPr id="25" name="Text 23"/>
-          <p:cNvSpPr txBox="1"/>
-          <p:nvPr/>
-        </p:nvSpPr>
-        <p:spPr>
-          <a:xfrm>
-            <a:off x="2313432" y="3191256"/>
-            <a:ext cx="1188720" cy="1892808"/>
+          <p:cNvPr id="34" name="Text 32"/>
+          <p:cNvSpPr txBox="1"/>
+          <p:nvPr/>
+        </p:nvSpPr>
+        <p:spPr>
+          <a:xfrm>
+            <a:off x="4454957" y="3191256"/>
+            <a:ext cx="1444752" cy="1892808"/>
           </a:xfrm>
           <a:prstGeom prst="rect">
             <a:avLst/>
@@ -4588,14 +4885,14 @@
       </p:sp>
       <p:sp>
         <p:nvSpPr>
-          <p:cNvPr id="26" name="Text 24"/>
-          <p:cNvSpPr txBox="1"/>
-          <p:nvPr/>
-        </p:nvSpPr>
-        <p:spPr>
-          <a:xfrm>
-            <a:off x="2295144" y="3200400"/>
-            <a:ext cx="1225296" cy="1463040"/>
+          <p:cNvPr id="35" name="Text 33"/>
+          <p:cNvSpPr txBox="1"/>
+          <p:nvPr/>
+        </p:nvSpPr>
+        <p:spPr>
+          <a:xfrm>
+            <a:off x="4436669" y="3200400"/>
+            <a:ext cx="1481328" cy="1600200"/>
           </a:xfrm>
           <a:prstGeom prst="rect">
             <a:avLst/>
@@ -4622,7 +4919,7 @@
                 <a:ea typeface="Calibri" pitchFamily="34" charset="-122"/>
                 <a:cs typeface="Calibri" pitchFamily="34" charset="-120"/>
               </a:rPr>
-              <a:t>The design and why, the typed estimand, the conditions it depends on, the alternatives.</a:t>
+              <a:t>Estimand and variables first, then the free brief: design, conditions, up to three alternatives.</a:t>
             </a:r>
             <a:endParaRPr lang="en-US" sz="950" dirty="0"/>
           </a:p>
@@ -4639,7 +4936,7 @@
                 <a:ea typeface="Calibri" pitchFamily="34" charset="-122"/>
                 <a:cs typeface="Calibri" pitchFamily="34" charset="-120"/>
               </a:rPr>
-              <a:t>Free. Two-lab review.</a:t>
+              <a:t>Free brief. Gate: estimand, variables, design confirmed.</a:t>
             </a:r>
             <a:endParaRPr lang="en-US" sz="950" dirty="0"/>
           </a:p>
@@ -4647,13 +4944,13 @@
       </p:sp>
       <p:sp>
         <p:nvSpPr>
-          <p:cNvPr id="27" name="Shape 25"/>
+          <p:cNvPr id="36" name="Shape 34"/>
           <p:cNvSpPr/>
           <p:nvPr/>
         </p:nvSpPr>
         <p:spPr>
           <a:xfrm>
-            <a:off x="2295144" y="4937760"/>
+            <a:off x="4436669" y="4937760"/>
             <a:ext cx="118872" cy="118872"/>
           </a:xfrm>
           <a:prstGeom prst="rect">
@@ -4672,53 +4969,14 @@
       </p:sp>
       <p:sp>
         <p:nvSpPr>
-          <p:cNvPr id="28" name="Text 26"/>
-          <p:cNvSpPr txBox="1"/>
-          <p:nvPr/>
-        </p:nvSpPr>
-        <p:spPr>
-          <a:xfrm>
-            <a:off x="2478024" y="4873752"/>
-            <a:ext cx="1115568" cy="256032"/>
-          </a:xfrm>
-          <a:prstGeom prst="rect">
-            <a:avLst/>
-          </a:prstGeom>
-          <a:noFill/>
-          <a:ln/>
-        </p:spPr>
-        <p:txBody>
-          <a:bodyPr wrap="square" lIns="0" tIns="0" rIns="0" bIns="0" rtlCol="0" anchor="ctr"/>
-          <a:lstStyle/>
-          <a:p>
-            <a:pPr indent="0" marL="0">
-              <a:buNone/>
-            </a:pPr>
-            <a:r>
-              <a:rPr lang="en-US" sz="800" b="1" dirty="0">
-                <a:solidFill>
-                  <a:srgbClr val="9A6B0F"/>
-                </a:solidFill>
-                <a:latin typeface="Consolas" pitchFamily="34" charset="0"/>
-                <a:ea typeface="Consolas" pitchFamily="34" charset="-122"/>
-                <a:cs typeface="Consolas" pitchFamily="34" charset="-120"/>
-              </a:rPr>
-              <a:t>2 questions asked</a:t>
-            </a:r>
-            <a:endParaRPr lang="en-US" sz="800" dirty="0"/>
-          </a:p>
-        </p:txBody>
-      </p:sp>
-      <p:sp>
-        <p:nvSpPr>
-          <p:cNvPr id="29" name="Shape 27"/>
+          <p:cNvPr id="37" name="Shape 35"/>
           <p:cNvSpPr/>
           <p:nvPr/>
         </p:nvSpPr>
         <p:spPr>
           <a:xfrm>
-            <a:off x="3767328" y="2011680"/>
-            <a:ext cx="1481328" cy="1051560"/>
+            <a:off x="6179515" y="2011680"/>
+            <a:ext cx="1737360" cy="1051560"/>
           </a:xfrm>
           <a:prstGeom prst="roundRect">
             <a:avLst>
@@ -4738,14 +4996,14 @@
       </p:sp>
       <p:sp>
         <p:nvSpPr>
-          <p:cNvPr id="30" name="Shape 28"/>
+          <p:cNvPr id="38" name="Shape 36"/>
           <p:cNvSpPr/>
           <p:nvPr/>
         </p:nvSpPr>
         <p:spPr>
           <a:xfrm>
-            <a:off x="3767328" y="2953512"/>
-            <a:ext cx="1481328" cy="109728"/>
+            <a:off x="6179515" y="2953512"/>
+            <a:ext cx="1737360" cy="109728"/>
           </a:xfrm>
           <a:prstGeom prst="rect">
             <a:avLst/>
@@ -4763,18 +5021,18 @@
       </p:sp>
       <p:sp>
         <p:nvSpPr>
-          <p:cNvPr id="31" name="Shape 29"/>
+          <p:cNvPr id="39" name="Shape 37"/>
           <p:cNvSpPr/>
           <p:nvPr/>
         </p:nvSpPr>
         <p:spPr>
           <a:xfrm>
-            <a:off x="3767328" y="3063240"/>
-            <a:ext cx="1481328" cy="2148840"/>
+            <a:off x="6179515" y="3063240"/>
+            <a:ext cx="1737360" cy="2148840"/>
           </a:xfrm>
           <a:prstGeom prst="roundRect">
             <a:avLst>
-              <a:gd name="adj" fmla="val 4938"/>
+              <a:gd name="adj" fmla="val 4211"/>
             </a:avLst>
           </a:prstGeom>
           <a:solidFill>
@@ -4790,14 +5048,14 @@
       </p:sp>
       <p:sp>
         <p:nvSpPr>
-          <p:cNvPr id="32" name="Shape 30"/>
+          <p:cNvPr id="40" name="Shape 38"/>
           <p:cNvSpPr/>
           <p:nvPr/>
         </p:nvSpPr>
         <p:spPr>
           <a:xfrm>
-            <a:off x="3767328" y="3063240"/>
-            <a:ext cx="1481328" cy="91440"/>
+            <a:off x="6179515" y="3063240"/>
+            <a:ext cx="1737360" cy="91440"/>
           </a:xfrm>
           <a:prstGeom prst="rect">
             <a:avLst/>
@@ -4815,14 +5073,14 @@
       </p:sp>
       <p:sp>
         <p:nvSpPr>
-          <p:cNvPr id="33" name="Text 31"/>
-          <p:cNvSpPr txBox="1"/>
-          <p:nvPr/>
-        </p:nvSpPr>
-        <p:spPr>
-          <a:xfrm>
-            <a:off x="3931920" y="2112264"/>
-            <a:ext cx="1152144" cy="201168"/>
+          <p:cNvPr id="41" name="Text 39"/>
+          <p:cNvSpPr txBox="1"/>
+          <p:nvPr/>
+        </p:nvSpPr>
+        <p:spPr>
+          <a:xfrm>
+            <a:off x="6344107" y="2112264"/>
+            <a:ext cx="1408176" cy="201168"/>
           </a:xfrm>
           <a:prstGeom prst="rect">
             <a:avLst/>
@@ -4846,7 +5104,7 @@
                 <a:ea typeface="Consolas" pitchFamily="34" charset="-122"/>
                 <a:cs typeface="Consolas" pitchFamily="34" charset="-120"/>
               </a:rPr>
-              <a:t>STEP 3</a:t>
+              <a:t>PHASE 4</a:t>
             </a:r>
             <a:endParaRPr lang="en-US" sz="950" dirty="0"/>
           </a:p>
@@ -4854,14 +5112,14 @@
       </p:sp>
       <p:sp>
         <p:nvSpPr>
-          <p:cNvPr id="34" name="Text 32"/>
-          <p:cNvSpPr txBox="1"/>
-          <p:nvPr/>
-        </p:nvSpPr>
-        <p:spPr>
-          <a:xfrm>
-            <a:off x="3931920" y="2304288"/>
-            <a:ext cx="1152144" cy="667512"/>
+          <p:cNvPr id="42" name="Text 40"/>
+          <p:cNvSpPr txBox="1"/>
+          <p:nvPr/>
+        </p:nvSpPr>
+        <p:spPr>
+          <a:xfrm>
+            <a:off x="6344107" y="2304288"/>
+            <a:ext cx="1408176" cy="667512"/>
           </a:xfrm>
           <a:prstGeom prst="rect">
             <a:avLst/>
@@ -4885,7 +5143,7 @@
                 <a:ea typeface="Cambria" pitchFamily="34" charset="-122"/>
                 <a:cs typeface="Cambria" pitchFamily="34" charset="-120"/>
               </a:rPr>
-              <a:t>Patients and data</a:t>
+              <a:t>Analysis and sizing</a:t>
             </a:r>
             <a:endParaRPr lang="en-US" sz="1400" dirty="0"/>
           </a:p>
@@ -4893,14 +5151,14 @@
       </p:sp>
       <p:sp>
         <p:nvSpPr>
-          <p:cNvPr id="35" name="Text 33"/>
-          <p:cNvSpPr txBox="1"/>
-          <p:nvPr/>
-        </p:nvSpPr>
-        <p:spPr>
-          <a:xfrm>
-            <a:off x="3913632" y="3191256"/>
-            <a:ext cx="1188720" cy="1892808"/>
+          <p:cNvPr id="43" name="Text 41"/>
+          <p:cNvSpPr txBox="1"/>
+          <p:nvPr/>
+        </p:nvSpPr>
+        <p:spPr>
+          <a:xfrm>
+            <a:off x="6325819" y="3191256"/>
+            <a:ext cx="1444752" cy="1892808"/>
           </a:xfrm>
           <a:prstGeom prst="rect">
             <a:avLst/>
@@ -4924,14 +5182,14 @@
       </p:sp>
       <p:sp>
         <p:nvSpPr>
-          <p:cNvPr id="36" name="Text 34"/>
-          <p:cNvSpPr txBox="1"/>
-          <p:nvPr/>
-        </p:nvSpPr>
-        <p:spPr>
-          <a:xfrm>
-            <a:off x="3895344" y="3200400"/>
-            <a:ext cx="1225296" cy="1463040"/>
+          <p:cNvPr id="44" name="Text 42"/>
+          <p:cNvSpPr txBox="1"/>
+          <p:nvPr/>
+        </p:nvSpPr>
+        <p:spPr>
+          <a:xfrm>
+            <a:off x="6307531" y="3200400"/>
+            <a:ext cx="1481328" cy="1600200"/>
           </a:xfrm>
           <a:prstGeom prst="rect">
             <a:avLst/>
@@ -4958,7 +5216,7 @@
                 <a:ea typeface="Calibri" pitchFamily="34" charset="-122"/>
                 <a:cs typeface="Calibri" pitchFamily="34" charset="-120"/>
               </a:rPr>
-              <a:t>Who is in, what is measured, where the records come from, who must say yes.</a:t>
+              <a:t>Build the study, then draft each aim's analysis, sizing and exhibits; edit, update, accept.</a:t>
             </a:r>
             <a:endParaRPr lang="en-US" sz="950" dirty="0"/>
           </a:p>
@@ -4975,7 +5233,7 @@
                 <a:ea typeface="Calibri" pitchFamily="34" charset="-122"/>
                 <a:cs typeface="Calibri" pitchFamily="34" charset="-120"/>
               </a:rPr>
-              <a:t>Spends the credit. Sign-in required.</a:t>
+              <a:t>One plan credit. Gate: the biostatistician checkpoint.</a:t>
             </a:r>
             <a:endParaRPr lang="en-US" sz="950" dirty="0"/>
           </a:p>
@@ -4983,17 +5241,44 @@
       </p:sp>
       <p:sp>
         <p:nvSpPr>
-          <p:cNvPr id="37" name="Shape 35"/>
+          <p:cNvPr id="45" name="Shape 43"/>
           <p:cNvSpPr/>
           <p:nvPr/>
         </p:nvSpPr>
         <p:spPr>
           <a:xfrm>
-            <a:off x="3895344" y="4937760"/>
+            <a:off x="6307531" y="4937760"/>
             <a:ext cx="118872" cy="118872"/>
           </a:xfrm>
           <a:prstGeom prst="rect">
             <a:avLst/>
+          </a:prstGeom>
+          <a:solidFill>
+            <a:srgbClr val="D9AC5A"/>
+          </a:solidFill>
+          <a:ln w="12700">
+            <a:solidFill>
+              <a:srgbClr val="D9AC5A"/>
+            </a:solidFill>
+            <a:prstDash val="solid"/>
+          </a:ln>
+        </p:spPr>
+      </p:sp>
+      <p:sp>
+        <p:nvSpPr>
+          <p:cNvPr id="46" name="Shape 44"/>
+          <p:cNvSpPr/>
+          <p:nvPr/>
+        </p:nvSpPr>
+        <p:spPr>
+          <a:xfrm>
+            <a:off x="8050378" y="2011680"/>
+            <a:ext cx="1737360" cy="1051560"/>
+          </a:xfrm>
+          <a:prstGeom prst="roundRect">
+            <a:avLst>
+              <a:gd name="adj" fmla="val 6957"/>
+            </a:avLst>
           </a:prstGeom>
           <a:solidFill>
             <a:srgbClr val="0F4C43"/>
@@ -5008,58 +5293,17 @@
       </p:sp>
       <p:sp>
         <p:nvSpPr>
-          <p:cNvPr id="38" name="Text 36"/>
-          <p:cNvSpPr txBox="1"/>
-          <p:nvPr/>
-        </p:nvSpPr>
-        <p:spPr>
-          <a:xfrm>
-            <a:off x="4078224" y="4873752"/>
-            <a:ext cx="1115568" cy="256032"/>
-          </a:xfrm>
-          <a:prstGeom prst="rect">
-            <a:avLst/>
-          </a:prstGeom>
-          <a:noFill/>
-          <a:ln/>
-        </p:spPr>
-        <p:txBody>
-          <a:bodyPr wrap="square" lIns="0" tIns="0" rIns="0" bIns="0" rtlCol="0" anchor="ctr"/>
-          <a:lstStyle/>
-          <a:p>
-            <a:pPr indent="0" marL="0">
-              <a:buNone/>
-            </a:pPr>
-            <a:r>
-              <a:rPr lang="en-US" sz="800" b="1" dirty="0">
-                <a:solidFill>
-                  <a:srgbClr val="9A6B0F"/>
-                </a:solidFill>
-                <a:latin typeface="Consolas" pitchFamily="34" charset="0"/>
-                <a:ea typeface="Consolas" pitchFamily="34" charset="-122"/>
-                <a:cs typeface="Consolas" pitchFamily="34" charset="-120"/>
-              </a:rPr>
-              <a:t>3 questions asked</a:t>
-            </a:r>
-            <a:endParaRPr lang="en-US" sz="800" dirty="0"/>
-          </a:p>
-        </p:txBody>
-      </p:sp>
-      <p:sp>
-        <p:nvSpPr>
-          <p:cNvPr id="39" name="Shape 37"/>
+          <p:cNvPr id="47" name="Shape 45"/>
           <p:cNvSpPr/>
           <p:nvPr/>
         </p:nvSpPr>
         <p:spPr>
           <a:xfrm>
-            <a:off x="5367528" y="2011680"/>
-            <a:ext cx="1481328" cy="1051560"/>
-          </a:xfrm>
-          <a:prstGeom prst="roundRect">
-            <a:avLst>
-              <a:gd name="adj" fmla="val 6957"/>
-            </a:avLst>
+            <a:off x="8050378" y="2953512"/>
+            <a:ext cx="1737360" cy="109728"/>
+          </a:xfrm>
+          <a:prstGeom prst="rect">
+            <a:avLst/>
           </a:prstGeom>
           <a:solidFill>
             <a:srgbClr val="0F4C43"/>
@@ -5074,17 +5318,264 @@
       </p:sp>
       <p:sp>
         <p:nvSpPr>
-          <p:cNvPr id="40" name="Shape 38"/>
+          <p:cNvPr id="48" name="Shape 46"/>
           <p:cNvSpPr/>
           <p:nvPr/>
         </p:nvSpPr>
         <p:spPr>
           <a:xfrm>
-            <a:off x="5367528" y="2953512"/>
-            <a:ext cx="1481328" cy="109728"/>
-          </a:xfrm>
-          <a:prstGeom prst="rect">
-            <a:avLst/>
+            <a:off x="8050378" y="3063240"/>
+            <a:ext cx="1737360" cy="2148840"/>
+          </a:xfrm>
+          <a:prstGeom prst="roundRect">
+            <a:avLst>
+              <a:gd name="adj" fmla="val 4211"/>
+            </a:avLst>
+          </a:prstGeom>
+          <a:solidFill>
+            <a:srgbClr val="F7FAF9"/>
+          </a:solidFill>
+          <a:ln w="12700">
+            <a:solidFill>
+              <a:srgbClr val="F7FAF9"/>
+            </a:solidFill>
+            <a:prstDash val="solid"/>
+          </a:ln>
+        </p:spPr>
+      </p:sp>
+      <p:sp>
+        <p:nvSpPr>
+          <p:cNvPr id="49" name="Shape 47"/>
+          <p:cNvSpPr/>
+          <p:nvPr/>
+        </p:nvSpPr>
+        <p:spPr>
+          <a:xfrm>
+            <a:off x="8050378" y="3063240"/>
+            <a:ext cx="1737360" cy="91440"/>
+          </a:xfrm>
+          <a:prstGeom prst="rect">
+            <a:avLst/>
+          </a:prstGeom>
+          <a:solidFill>
+            <a:srgbClr val="F7FAF9"/>
+          </a:solidFill>
+          <a:ln w="12700">
+            <a:solidFill>
+              <a:srgbClr val="F7FAF9"/>
+            </a:solidFill>
+            <a:prstDash val="solid"/>
+          </a:ln>
+        </p:spPr>
+      </p:sp>
+      <p:sp>
+        <p:nvSpPr>
+          <p:cNvPr id="50" name="Text 48"/>
+          <p:cNvSpPr txBox="1"/>
+          <p:nvPr/>
+        </p:nvSpPr>
+        <p:spPr>
+          <a:xfrm>
+            <a:off x="8214970" y="2112264"/>
+            <a:ext cx="1408176" cy="201168"/>
+          </a:xfrm>
+          <a:prstGeom prst="rect">
+            <a:avLst/>
+          </a:prstGeom>
+          <a:noFill/>
+          <a:ln/>
+        </p:spPr>
+        <p:txBody>
+          <a:bodyPr wrap="square" lIns="0" tIns="0" rIns="0" bIns="0" rtlCol="0" anchor="ctr"/>
+          <a:lstStyle/>
+          <a:p>
+            <a:pPr indent="0" marL="0">
+              <a:buNone/>
+            </a:pPr>
+            <a:r>
+              <a:rPr lang="en-US" sz="950" b="1" dirty="0">
+                <a:solidFill>
+                  <a:srgbClr val="8FC3B5"/>
+                </a:solidFill>
+                <a:latin typeface="Consolas" pitchFamily="34" charset="0"/>
+                <a:ea typeface="Consolas" pitchFamily="34" charset="-122"/>
+                <a:cs typeface="Consolas" pitchFamily="34" charset="-120"/>
+              </a:rPr>
+              <a:t>PHASE 5</a:t>
+            </a:r>
+            <a:endParaRPr lang="en-US" sz="950" dirty="0"/>
+          </a:p>
+        </p:txBody>
+      </p:sp>
+      <p:sp>
+        <p:nvSpPr>
+          <p:cNvPr id="51" name="Text 49"/>
+          <p:cNvSpPr txBox="1"/>
+          <p:nvPr/>
+        </p:nvSpPr>
+        <p:spPr>
+          <a:xfrm>
+            <a:off x="8214970" y="2304288"/>
+            <a:ext cx="1408176" cy="667512"/>
+          </a:xfrm>
+          <a:prstGeom prst="rect">
+            <a:avLst/>
+          </a:prstGeom>
+          <a:noFill/>
+          <a:ln/>
+        </p:spPr>
+        <p:txBody>
+          <a:bodyPr wrap="square" lIns="0" tIns="0" rIns="0" bIns="0" rtlCol="0" anchor="t"/>
+          <a:lstStyle/>
+          <a:p>
+            <a:pPr indent="0" marL="0">
+              <a:buNone/>
+            </a:pPr>
+            <a:r>
+              <a:rPr lang="en-US" sz="1400" b="1" dirty="0">
+                <a:solidFill>
+                  <a:srgbClr val="FFFFFF"/>
+                </a:solidFill>
+                <a:latin typeface="Cambria" pitchFamily="34" charset="0"/>
+                <a:ea typeface="Cambria" pitchFamily="34" charset="-122"/>
+                <a:cs typeface="Cambria" pitchFamily="34" charset="-120"/>
+              </a:rPr>
+              <a:t>Execution and budget</a:t>
+            </a:r>
+            <a:endParaRPr lang="en-US" sz="1400" dirty="0"/>
+          </a:p>
+        </p:txBody>
+      </p:sp>
+      <p:sp>
+        <p:nvSpPr>
+          <p:cNvPr id="52" name="Text 50"/>
+          <p:cNvSpPr txBox="1"/>
+          <p:nvPr/>
+        </p:nvSpPr>
+        <p:spPr>
+          <a:xfrm>
+            <a:off x="8196682" y="3191256"/>
+            <a:ext cx="1444752" cy="1892808"/>
+          </a:xfrm>
+          <a:prstGeom prst="rect">
+            <a:avLst/>
+          </a:prstGeom>
+          <a:noFill/>
+          <a:ln/>
+        </p:spPr>
+        <p:txBody>
+          <a:bodyPr wrap="square" lIns="0" tIns="0" rIns="0" bIns="0" rtlCol="0" anchor="t"/>
+          <a:lstStyle/>
+          <a:p>
+            <a:pPr indent="0" marL="0">
+              <a:spcAft>
+                <a:spcPts val="400"/>
+              </a:spcAft>
+              <a:buNone/>
+            </a:pPr>
+            <a:endParaRPr lang="en-US" sz="900" dirty="0"/>
+          </a:p>
+        </p:txBody>
+      </p:sp>
+      <p:sp>
+        <p:nvSpPr>
+          <p:cNvPr id="53" name="Text 51"/>
+          <p:cNvSpPr txBox="1"/>
+          <p:nvPr/>
+        </p:nvSpPr>
+        <p:spPr>
+          <a:xfrm>
+            <a:off x="8178394" y="3200400"/>
+            <a:ext cx="1481328" cy="1600200"/>
+          </a:xfrm>
+          <a:prstGeom prst="rect">
+            <a:avLst/>
+          </a:prstGeom>
+          <a:noFill/>
+          <a:ln/>
+        </p:spPr>
+        <p:txBody>
+          <a:bodyPr wrap="square" lIns="0" tIns="0" rIns="0" bIns="0" rtlCol="0" anchor="t"/>
+          <a:lstStyle/>
+          <a:p>
+            <a:pPr indent="0" marL="0">
+              <a:spcAft>
+                <a:spcPts val="600"/>
+              </a:spcAft>
+              <a:buNone/>
+            </a:pPr>
+            <a:r>
+              <a:rPr lang="en-US" sz="950" dirty="0">
+                <a:solidFill>
+                  <a:srgbClr val="16202B"/>
+                </a:solidFill>
+                <a:latin typeface="Calibri" pitchFamily="34" charset="0"/>
+                <a:ea typeface="Calibri" pitchFamily="34" charset="-122"/>
+                <a:cs typeface="Calibri" pitchFamily="34" charset="-120"/>
+              </a:rPr>
+              <a:t>Operations, governance, tasks, timeline and budget drafted on request; readiness recorded.</a:t>
+            </a:r>
+            <a:endParaRPr lang="en-US" sz="950" dirty="0"/>
+          </a:p>
+          <a:p>
+            <a:pPr indent="0" marL="0">
+              <a:buNone/>
+            </a:pPr>
+            <a:r>
+              <a:rPr lang="en-US" sz="950" b="1" dirty="0">
+                <a:solidFill>
+                  <a:srgbClr val="0F4C43"/>
+                </a:solidFill>
+                <a:latin typeface="Calibri" pitchFamily="34" charset="0"/>
+                <a:ea typeface="Calibri" pitchFamily="34" charset="-122"/>
+                <a:cs typeface="Calibri" pitchFamily="34" charset="-120"/>
+              </a:rPr>
+              <a:t>Gate: ready, conditional, or infeasible.</a:t>
+            </a:r>
+            <a:endParaRPr lang="en-US" sz="950" dirty="0"/>
+          </a:p>
+        </p:txBody>
+      </p:sp>
+      <p:sp>
+        <p:nvSpPr>
+          <p:cNvPr id="54" name="Shape 52"/>
+          <p:cNvSpPr/>
+          <p:nvPr/>
+        </p:nvSpPr>
+        <p:spPr>
+          <a:xfrm>
+            <a:off x="8178394" y="4937760"/>
+            <a:ext cx="118872" cy="118872"/>
+          </a:xfrm>
+          <a:prstGeom prst="rect">
+            <a:avLst/>
+          </a:prstGeom>
+          <a:solidFill>
+            <a:srgbClr val="D9AC5A"/>
+          </a:solidFill>
+          <a:ln w="12700">
+            <a:solidFill>
+              <a:srgbClr val="D9AC5A"/>
+            </a:solidFill>
+            <a:prstDash val="solid"/>
+          </a:ln>
+        </p:spPr>
+      </p:sp>
+      <p:sp>
+        <p:nvSpPr>
+          <p:cNvPr id="55" name="Shape 53"/>
+          <p:cNvSpPr/>
+          <p:nvPr/>
+        </p:nvSpPr>
+        <p:spPr>
+          <a:xfrm>
+            <a:off x="9921240" y="2011680"/>
+            <a:ext cx="1737360" cy="1051560"/>
+          </a:xfrm>
+          <a:prstGeom prst="roundRect">
+            <a:avLst>
+              <a:gd name="adj" fmla="val 6957"/>
+            </a:avLst>
           </a:prstGeom>
           <a:solidFill>
             <a:srgbClr val="0F4C43"/>
@@ -5099,18 +5590,43 @@
       </p:sp>
       <p:sp>
         <p:nvSpPr>
-          <p:cNvPr id="41" name="Shape 39"/>
+          <p:cNvPr id="56" name="Shape 54"/>
           <p:cNvSpPr/>
           <p:nvPr/>
         </p:nvSpPr>
         <p:spPr>
           <a:xfrm>
-            <a:off x="5367528" y="3063240"/>
-            <a:ext cx="1481328" cy="2148840"/>
+            <a:off x="9921240" y="2953512"/>
+            <a:ext cx="1737360" cy="109728"/>
+          </a:xfrm>
+          <a:prstGeom prst="rect">
+            <a:avLst/>
+          </a:prstGeom>
+          <a:solidFill>
+            <a:srgbClr val="0F4C43"/>
+          </a:solidFill>
+          <a:ln w="12700">
+            <a:solidFill>
+              <a:srgbClr val="0F4C43"/>
+            </a:solidFill>
+            <a:prstDash val="solid"/>
+          </a:ln>
+        </p:spPr>
+      </p:sp>
+      <p:sp>
+        <p:nvSpPr>
+          <p:cNvPr id="57" name="Shape 55"/>
+          <p:cNvSpPr/>
+          <p:nvPr/>
+        </p:nvSpPr>
+        <p:spPr>
+          <a:xfrm>
+            <a:off x="9921240" y="3063240"/>
+            <a:ext cx="1737360" cy="2148840"/>
           </a:xfrm>
           <a:prstGeom prst="roundRect">
             <a:avLst>
-              <a:gd name="adj" fmla="val 4938"/>
+              <a:gd name="adj" fmla="val 4211"/>
             </a:avLst>
           </a:prstGeom>
           <a:solidFill>
@@ -5126,14 +5642,14 @@
       </p:sp>
       <p:sp>
         <p:nvSpPr>
-          <p:cNvPr id="42" name="Shape 40"/>
+          <p:cNvPr id="58" name="Shape 56"/>
           <p:cNvSpPr/>
           <p:nvPr/>
         </p:nvSpPr>
         <p:spPr>
           <a:xfrm>
-            <a:off x="5367528" y="3063240"/>
-            <a:ext cx="1481328" cy="91440"/>
+            <a:off x="9921240" y="3063240"/>
+            <a:ext cx="1737360" cy="91440"/>
           </a:xfrm>
           <a:prstGeom prst="rect">
             <a:avLst/>
@@ -5151,14 +5667,14 @@
       </p:sp>
       <p:sp>
         <p:nvSpPr>
-          <p:cNvPr id="43" name="Text 41"/>
-          <p:cNvSpPr txBox="1"/>
-          <p:nvPr/>
-        </p:nvSpPr>
-        <p:spPr>
-          <a:xfrm>
-            <a:off x="5532120" y="2112264"/>
-            <a:ext cx="1152144" cy="201168"/>
+          <p:cNvPr id="59" name="Text 57"/>
+          <p:cNvSpPr txBox="1"/>
+          <p:nvPr/>
+        </p:nvSpPr>
+        <p:spPr>
+          <a:xfrm>
+            <a:off x="10085832" y="2112264"/>
+            <a:ext cx="1408176" cy="201168"/>
           </a:xfrm>
           <a:prstGeom prst="rect">
             <a:avLst/>
@@ -5182,7 +5698,7 @@
                 <a:ea typeface="Consolas" pitchFamily="34" charset="-122"/>
                 <a:cs typeface="Consolas" pitchFamily="34" charset="-120"/>
               </a:rPr>
-              <a:t>STEP 4</a:t>
+              <a:t>PHASE 6</a:t>
             </a:r>
             <a:endParaRPr lang="en-US" sz="950" dirty="0"/>
           </a:p>
@@ -5190,14 +5706,14 @@
       </p:sp>
       <p:sp>
         <p:nvSpPr>
-          <p:cNvPr id="44" name="Text 42"/>
-          <p:cNvSpPr txBox="1"/>
-          <p:nvPr/>
-        </p:nvSpPr>
-        <p:spPr>
-          <a:xfrm>
-            <a:off x="5532120" y="2304288"/>
-            <a:ext cx="1152144" cy="667512"/>
+          <p:cNvPr id="60" name="Text 58"/>
+          <p:cNvSpPr txBox="1"/>
+          <p:nvPr/>
+        </p:nvSpPr>
+        <p:spPr>
+          <a:xfrm>
+            <a:off x="10085832" y="2304288"/>
+            <a:ext cx="1408176" cy="667512"/>
           </a:xfrm>
           <a:prstGeom prst="rect">
             <a:avLst/>
@@ -5221,7 +5737,7 @@
                 <a:ea typeface="Cambria" pitchFamily="34" charset="-122"/>
                 <a:cs typeface="Cambria" pitchFamily="34" charset="-120"/>
               </a:rPr>
-              <a:t>Analysis and how many</a:t>
+              <a:t>Finalise and export</a:t>
             </a:r>
             <a:endParaRPr lang="en-US" sz="1400" dirty="0"/>
           </a:p>
@@ -5229,14 +5745,14 @@
       </p:sp>
       <p:sp>
         <p:nvSpPr>
-          <p:cNvPr id="45" name="Text 43"/>
-          <p:cNvSpPr txBox="1"/>
-          <p:nvPr/>
-        </p:nvSpPr>
-        <p:spPr>
-          <a:xfrm>
-            <a:off x="5513832" y="3191256"/>
-            <a:ext cx="1188720" cy="1892808"/>
+          <p:cNvPr id="61" name="Text 59"/>
+          <p:cNvSpPr txBox="1"/>
+          <p:nvPr/>
+        </p:nvSpPr>
+        <p:spPr>
+          <a:xfrm>
+            <a:off x="10067544" y="3191256"/>
+            <a:ext cx="1444752" cy="1892808"/>
           </a:xfrm>
           <a:prstGeom prst="rect">
             <a:avLst/>
@@ -5260,14 +5776,14 @@
       </p:sp>
       <p:sp>
         <p:nvSpPr>
-          <p:cNvPr id="46" name="Text 44"/>
-          <p:cNvSpPr txBox="1"/>
-          <p:nvPr/>
-        </p:nvSpPr>
-        <p:spPr>
-          <a:xfrm>
-            <a:off x="5495544" y="3200400"/>
-            <a:ext cx="1225296" cy="1463040"/>
+          <p:cNvPr id="62" name="Text 60"/>
+          <p:cNvSpPr txBox="1"/>
+          <p:nvPr/>
+        </p:nvSpPr>
+        <p:spPr>
+          <a:xfrm>
+            <a:off x="10049256" y="3200400"/>
+            <a:ext cx="1481328" cy="1600200"/>
           </a:xfrm>
           <a:prstGeom prst="rect">
             <a:avLst/>
@@ -5294,7 +5810,7 @@
                 <a:ea typeface="Calibri" pitchFamily="34" charset="-122"/>
                 <a:cs typeface="Calibri" pitchFamily="34" charset="-120"/>
               </a:rPr>
-              <a:t>How the numbers are compared, and how many patients that takes.</a:t>
+              <a:t>Written package and code per language on request; reconciler named; export with review record.</a:t>
             </a:r>
             <a:endParaRPr lang="en-US" sz="950" dirty="0"/>
           </a:p>
@@ -5311,7 +5827,7 @@
                 <a:ea typeface="Calibri" pitchFamily="34" charset="-122"/>
                 <a:cs typeface="Calibri" pitchFamily="34" charset="-120"/>
               </a:rPr>
-              <a:t>Two-lab review, corrective pass, adjudication.</a:t>
+              <a:t>Gate: nothing pending, no open comments.</a:t>
             </a:r>
             <a:endParaRPr lang="en-US" sz="950" dirty="0"/>
           </a:p>
@@ -5319,24 +5835,24 @@
       </p:sp>
       <p:sp>
         <p:nvSpPr>
-          <p:cNvPr id="47" name="Shape 45"/>
+          <p:cNvPr id="63" name="Shape 61"/>
           <p:cNvSpPr/>
           <p:nvPr/>
         </p:nvSpPr>
         <p:spPr>
           <a:xfrm>
-            <a:off x="5495544" y="4937760"/>
+            <a:off x="10049256" y="4937760"/>
             <a:ext cx="118872" cy="118872"/>
           </a:xfrm>
           <a:prstGeom prst="rect">
             <a:avLst/>
           </a:prstGeom>
           <a:solidFill>
-            <a:srgbClr val="9A6B0F"/>
+            <a:srgbClr val="D9AC5A"/>
           </a:solidFill>
           <a:ln w="12700">
             <a:solidFill>
-              <a:srgbClr val="9A6B0F"/>
+              <a:srgbClr val="D9AC5A"/>
             </a:solidFill>
             <a:prstDash val="solid"/>
           </a:ln>
@@ -5344,937 +5860,7 @@
       </p:sp>
       <p:sp>
         <p:nvSpPr>
-          <p:cNvPr id="48" name="Text 46"/>
-          <p:cNvSpPr txBox="1"/>
-          <p:nvPr/>
-        </p:nvSpPr>
-        <p:spPr>
-          <a:xfrm>
-            <a:off x="5678424" y="4873752"/>
-            <a:ext cx="1115568" cy="256032"/>
-          </a:xfrm>
-          <a:prstGeom prst="rect">
-            <a:avLst/>
-          </a:prstGeom>
-          <a:noFill/>
-          <a:ln/>
-        </p:spPr>
-        <p:txBody>
-          <a:bodyPr wrap="square" lIns="0" tIns="0" rIns="0" bIns="0" rtlCol="0" anchor="ctr"/>
-          <a:lstStyle/>
-          <a:p>
-            <a:pPr indent="0" marL="0">
-              <a:buNone/>
-            </a:pPr>
-            <a:r>
-              <a:rPr lang="en-US" sz="800" b="1" dirty="0">
-                <a:solidFill>
-                  <a:srgbClr val="9A6B0F"/>
-                </a:solidFill>
-                <a:latin typeface="Consolas" pitchFamily="34" charset="0"/>
-                <a:ea typeface="Consolas" pitchFamily="34" charset="-122"/>
-                <a:cs typeface="Consolas" pitchFamily="34" charset="-120"/>
-              </a:rPr>
-              <a:t>1 question asked</a:t>
-            </a:r>
-            <a:endParaRPr lang="en-US" sz="800" dirty="0"/>
-          </a:p>
-        </p:txBody>
-      </p:sp>
-      <p:sp>
-        <p:nvSpPr>
-          <p:cNvPr id="49" name="Shape 47"/>
-          <p:cNvSpPr/>
-          <p:nvPr/>
-        </p:nvSpPr>
-        <p:spPr>
-          <a:xfrm>
-            <a:off x="6967728" y="2011680"/>
-            <a:ext cx="1481328" cy="1051560"/>
-          </a:xfrm>
-          <a:prstGeom prst="roundRect">
-            <a:avLst>
-              <a:gd name="adj" fmla="val 6957"/>
-            </a:avLst>
-          </a:prstGeom>
-          <a:solidFill>
-            <a:srgbClr val="0F4C43"/>
-          </a:solidFill>
-          <a:ln w="12700">
-            <a:solidFill>
-              <a:srgbClr val="0F4C43"/>
-            </a:solidFill>
-            <a:prstDash val="solid"/>
-          </a:ln>
-        </p:spPr>
-      </p:sp>
-      <p:sp>
-        <p:nvSpPr>
-          <p:cNvPr id="50" name="Shape 48"/>
-          <p:cNvSpPr/>
-          <p:nvPr/>
-        </p:nvSpPr>
-        <p:spPr>
-          <a:xfrm>
-            <a:off x="6967728" y="2953512"/>
-            <a:ext cx="1481328" cy="109728"/>
-          </a:xfrm>
-          <a:prstGeom prst="rect">
-            <a:avLst/>
-          </a:prstGeom>
-          <a:solidFill>
-            <a:srgbClr val="0F4C43"/>
-          </a:solidFill>
-          <a:ln w="12700">
-            <a:solidFill>
-              <a:srgbClr val="0F4C43"/>
-            </a:solidFill>
-            <a:prstDash val="solid"/>
-          </a:ln>
-        </p:spPr>
-      </p:sp>
-      <p:sp>
-        <p:nvSpPr>
-          <p:cNvPr id="51" name="Shape 49"/>
-          <p:cNvSpPr/>
-          <p:nvPr/>
-        </p:nvSpPr>
-        <p:spPr>
-          <a:xfrm>
-            <a:off x="6967728" y="3063240"/>
-            <a:ext cx="1481328" cy="2148840"/>
-          </a:xfrm>
-          <a:prstGeom prst="roundRect">
-            <a:avLst>
-              <a:gd name="adj" fmla="val 4938"/>
-            </a:avLst>
-          </a:prstGeom>
-          <a:solidFill>
-            <a:srgbClr val="F7FAF9"/>
-          </a:solidFill>
-          <a:ln w="12700">
-            <a:solidFill>
-              <a:srgbClr val="F7FAF9"/>
-            </a:solidFill>
-            <a:prstDash val="solid"/>
-          </a:ln>
-        </p:spPr>
-      </p:sp>
-      <p:sp>
-        <p:nvSpPr>
-          <p:cNvPr id="52" name="Shape 50"/>
-          <p:cNvSpPr/>
-          <p:nvPr/>
-        </p:nvSpPr>
-        <p:spPr>
-          <a:xfrm>
-            <a:off x="6967728" y="3063240"/>
-            <a:ext cx="1481328" cy="91440"/>
-          </a:xfrm>
-          <a:prstGeom prst="rect">
-            <a:avLst/>
-          </a:prstGeom>
-          <a:solidFill>
-            <a:srgbClr val="F7FAF9"/>
-          </a:solidFill>
-          <a:ln w="12700">
-            <a:solidFill>
-              <a:srgbClr val="F7FAF9"/>
-            </a:solidFill>
-            <a:prstDash val="solid"/>
-          </a:ln>
-        </p:spPr>
-      </p:sp>
-      <p:sp>
-        <p:nvSpPr>
-          <p:cNvPr id="53" name="Text 51"/>
-          <p:cNvSpPr txBox="1"/>
-          <p:nvPr/>
-        </p:nvSpPr>
-        <p:spPr>
-          <a:xfrm>
-            <a:off x="7132320" y="2112264"/>
-            <a:ext cx="1152144" cy="201168"/>
-          </a:xfrm>
-          <a:prstGeom prst="rect">
-            <a:avLst/>
-          </a:prstGeom>
-          <a:noFill/>
-          <a:ln/>
-        </p:spPr>
-        <p:txBody>
-          <a:bodyPr wrap="square" lIns="0" tIns="0" rIns="0" bIns="0" rtlCol="0" anchor="ctr"/>
-          <a:lstStyle/>
-          <a:p>
-            <a:pPr indent="0" marL="0">
-              <a:buNone/>
-            </a:pPr>
-            <a:r>
-              <a:rPr lang="en-US" sz="950" b="1" dirty="0">
-                <a:solidFill>
-                  <a:srgbClr val="8FC3B5"/>
-                </a:solidFill>
-                <a:latin typeface="Consolas" pitchFamily="34" charset="0"/>
-                <a:ea typeface="Consolas" pitchFamily="34" charset="-122"/>
-                <a:cs typeface="Consolas" pitchFamily="34" charset="-120"/>
-              </a:rPr>
-              <a:t>STEP 5</a:t>
-            </a:r>
-            <a:endParaRPr lang="en-US" sz="950" dirty="0"/>
-          </a:p>
-        </p:txBody>
-      </p:sp>
-      <p:sp>
-        <p:nvSpPr>
-          <p:cNvPr id="54" name="Text 52"/>
-          <p:cNvSpPr txBox="1"/>
-          <p:nvPr/>
-        </p:nvSpPr>
-        <p:spPr>
-          <a:xfrm>
-            <a:off x="7132320" y="2304288"/>
-            <a:ext cx="1152144" cy="667512"/>
-          </a:xfrm>
-          <a:prstGeom prst="rect">
-            <a:avLst/>
-          </a:prstGeom>
-          <a:noFill/>
-          <a:ln/>
-        </p:spPr>
-        <p:txBody>
-          <a:bodyPr wrap="square" lIns="0" tIns="0" rIns="0" bIns="0" rtlCol="0" anchor="t"/>
-          <a:lstStyle/>
-          <a:p>
-            <a:pPr indent="0" marL="0">
-              <a:buNone/>
-            </a:pPr>
-            <a:r>
-              <a:rPr lang="en-US" sz="1400" b="1" dirty="0">
-                <a:solidFill>
-                  <a:srgbClr val="FFFFFF"/>
-                </a:solidFill>
-                <a:latin typeface="Cambria" pitchFamily="34" charset="0"/>
-                <a:ea typeface="Cambria" pitchFamily="34" charset="-122"/>
-                <a:cs typeface="Cambria" pitchFamily="34" charset="-120"/>
-              </a:rPr>
-              <a:t>Approvals, team, cost</a:t>
-            </a:r>
-            <a:endParaRPr lang="en-US" sz="1400" dirty="0"/>
-          </a:p>
-        </p:txBody>
-      </p:sp>
-      <p:sp>
-        <p:nvSpPr>
-          <p:cNvPr id="55" name="Text 53"/>
-          <p:cNvSpPr txBox="1"/>
-          <p:nvPr/>
-        </p:nvSpPr>
-        <p:spPr>
-          <a:xfrm>
-            <a:off x="7114032" y="3191256"/>
-            <a:ext cx="1188720" cy="1892808"/>
-          </a:xfrm>
-          <a:prstGeom prst="rect">
-            <a:avLst/>
-          </a:prstGeom>
-          <a:noFill/>
-          <a:ln/>
-        </p:spPr>
-        <p:txBody>
-          <a:bodyPr wrap="square" lIns="0" tIns="0" rIns="0" bIns="0" rtlCol="0" anchor="t"/>
-          <a:lstStyle/>
-          <a:p>
-            <a:pPr indent="0" marL="0">
-              <a:spcAft>
-                <a:spcPts val="400"/>
-              </a:spcAft>
-              <a:buNone/>
-            </a:pPr>
-            <a:endParaRPr lang="en-US" sz="900" dirty="0"/>
-          </a:p>
-        </p:txBody>
-      </p:sp>
-      <p:sp>
-        <p:nvSpPr>
-          <p:cNvPr id="56" name="Text 54"/>
-          <p:cNvSpPr txBox="1"/>
-          <p:nvPr/>
-        </p:nvSpPr>
-        <p:spPr>
-          <a:xfrm>
-            <a:off x="7095744" y="3200400"/>
-            <a:ext cx="1225296" cy="1463040"/>
-          </a:xfrm>
-          <a:prstGeom prst="rect">
-            <a:avLst/>
-          </a:prstGeom>
-          <a:noFill/>
-          <a:ln/>
-        </p:spPr>
-        <p:txBody>
-          <a:bodyPr wrap="square" lIns="0" tIns="0" rIns="0" bIns="0" rtlCol="0" anchor="t"/>
-          <a:lstStyle/>
-          <a:p>
-            <a:pPr indent="0" marL="0">
-              <a:spcAft>
-                <a:spcPts val="600"/>
-              </a:spcAft>
-              <a:buNone/>
-            </a:pPr>
-            <a:r>
-              <a:rPr lang="en-US" sz="950" dirty="0">
-                <a:solidFill>
-                  <a:srgbClr val="16202B"/>
-                </a:solidFill>
-                <a:latin typeface="Calibri" pitchFamily="34" charset="0"/>
-                <a:ea typeface="Calibri" pitchFamily="34" charset="-122"/>
-                <a:cs typeface="Calibri" pitchFamily="34" charset="-120"/>
-              </a:rPr>
-              <a:t>Who approves, what it costs, what to do on Monday.</a:t>
-            </a:r>
-            <a:endParaRPr lang="en-US" sz="950" dirty="0"/>
-          </a:p>
-          <a:p>
-            <a:pPr indent="0" marL="0">
-              <a:buNone/>
-            </a:pPr>
-            <a:r>
-              <a:rPr lang="en-US" sz="950" b="1" dirty="0">
-                <a:solidFill>
-                  <a:srgbClr val="0F4C43"/>
-                </a:solidFill>
-                <a:latin typeface="Calibri" pitchFamily="34" charset="0"/>
-                <a:ea typeface="Calibri" pitchFamily="34" charset="-122"/>
-                <a:cs typeface="Calibri" pitchFamily="34" charset="-120"/>
-              </a:rPr>
-              <a:t>Runs on its own after step 4.</a:t>
-            </a:r>
-            <a:endParaRPr lang="en-US" sz="950" dirty="0"/>
-          </a:p>
-        </p:txBody>
-      </p:sp>
-      <p:sp>
-        <p:nvSpPr>
-          <p:cNvPr id="57" name="Shape 55"/>
-          <p:cNvSpPr/>
-          <p:nvPr/>
-        </p:nvSpPr>
-        <p:spPr>
-          <a:xfrm>
-            <a:off x="7095744" y="4937760"/>
-            <a:ext cx="118872" cy="118872"/>
-          </a:xfrm>
-          <a:prstGeom prst="rect">
-            <a:avLst/>
-          </a:prstGeom>
-          <a:solidFill>
-            <a:srgbClr val="0F4C43"/>
-          </a:solidFill>
-          <a:ln w="12700">
-            <a:solidFill>
-              <a:srgbClr val="0F4C43"/>
-            </a:solidFill>
-            <a:prstDash val="solid"/>
-          </a:ln>
-        </p:spPr>
-      </p:sp>
-      <p:sp>
-        <p:nvSpPr>
-          <p:cNvPr id="58" name="Shape 56"/>
-          <p:cNvSpPr/>
-          <p:nvPr/>
-        </p:nvSpPr>
-        <p:spPr>
-          <a:xfrm>
-            <a:off x="8567928" y="2011680"/>
-            <a:ext cx="1481328" cy="1051560"/>
-          </a:xfrm>
-          <a:prstGeom prst="roundRect">
-            <a:avLst>
-              <a:gd name="adj" fmla="val 6957"/>
-            </a:avLst>
-          </a:prstGeom>
-          <a:solidFill>
-            <a:srgbClr val="0F4C43"/>
-          </a:solidFill>
-          <a:ln w="12700">
-            <a:solidFill>
-              <a:srgbClr val="0F4C43"/>
-            </a:solidFill>
-            <a:prstDash val="solid"/>
-          </a:ln>
-        </p:spPr>
-      </p:sp>
-      <p:sp>
-        <p:nvSpPr>
-          <p:cNvPr id="59" name="Shape 57"/>
-          <p:cNvSpPr/>
-          <p:nvPr/>
-        </p:nvSpPr>
-        <p:spPr>
-          <a:xfrm>
-            <a:off x="8567928" y="2953512"/>
-            <a:ext cx="1481328" cy="109728"/>
-          </a:xfrm>
-          <a:prstGeom prst="rect">
-            <a:avLst/>
-          </a:prstGeom>
-          <a:solidFill>
-            <a:srgbClr val="0F4C43"/>
-          </a:solidFill>
-          <a:ln w="12700">
-            <a:solidFill>
-              <a:srgbClr val="0F4C43"/>
-            </a:solidFill>
-            <a:prstDash val="solid"/>
-          </a:ln>
-        </p:spPr>
-      </p:sp>
-      <p:sp>
-        <p:nvSpPr>
-          <p:cNvPr id="60" name="Shape 58"/>
-          <p:cNvSpPr/>
-          <p:nvPr/>
-        </p:nvSpPr>
-        <p:spPr>
-          <a:xfrm>
-            <a:off x="8567928" y="3063240"/>
-            <a:ext cx="1481328" cy="2148840"/>
-          </a:xfrm>
-          <a:prstGeom prst="roundRect">
-            <a:avLst>
-              <a:gd name="adj" fmla="val 4938"/>
-            </a:avLst>
-          </a:prstGeom>
-          <a:solidFill>
-            <a:srgbClr val="F7FAF9"/>
-          </a:solidFill>
-          <a:ln w="12700">
-            <a:solidFill>
-              <a:srgbClr val="F7FAF9"/>
-            </a:solidFill>
-            <a:prstDash val="solid"/>
-          </a:ln>
-        </p:spPr>
-      </p:sp>
-      <p:sp>
-        <p:nvSpPr>
-          <p:cNvPr id="61" name="Shape 59"/>
-          <p:cNvSpPr/>
-          <p:nvPr/>
-        </p:nvSpPr>
-        <p:spPr>
-          <a:xfrm>
-            <a:off x="8567928" y="3063240"/>
-            <a:ext cx="1481328" cy="91440"/>
-          </a:xfrm>
-          <a:prstGeom prst="rect">
-            <a:avLst/>
-          </a:prstGeom>
-          <a:solidFill>
-            <a:srgbClr val="F7FAF9"/>
-          </a:solidFill>
-          <a:ln w="12700">
-            <a:solidFill>
-              <a:srgbClr val="F7FAF9"/>
-            </a:solidFill>
-            <a:prstDash val="solid"/>
-          </a:ln>
-        </p:spPr>
-      </p:sp>
-      <p:sp>
-        <p:nvSpPr>
-          <p:cNvPr id="62" name="Text 60"/>
-          <p:cNvSpPr txBox="1"/>
-          <p:nvPr/>
-        </p:nvSpPr>
-        <p:spPr>
-          <a:xfrm>
-            <a:off x="8732520" y="2112264"/>
-            <a:ext cx="1152144" cy="201168"/>
-          </a:xfrm>
-          <a:prstGeom prst="rect">
-            <a:avLst/>
-          </a:prstGeom>
-          <a:noFill/>
-          <a:ln/>
-        </p:spPr>
-        <p:txBody>
-          <a:bodyPr wrap="square" lIns="0" tIns="0" rIns="0" bIns="0" rtlCol="0" anchor="ctr"/>
-          <a:lstStyle/>
-          <a:p>
-            <a:pPr indent="0" marL="0">
-              <a:buNone/>
-            </a:pPr>
-            <a:r>
-              <a:rPr lang="en-US" sz="950" b="1" dirty="0">
-                <a:solidFill>
-                  <a:srgbClr val="8FC3B5"/>
-                </a:solidFill>
-                <a:latin typeface="Consolas" pitchFamily="34" charset="0"/>
-                <a:ea typeface="Consolas" pitchFamily="34" charset="-122"/>
-                <a:cs typeface="Consolas" pitchFamily="34" charset="-120"/>
-              </a:rPr>
-              <a:t>STEP 6</a:t>
-            </a:r>
-            <a:endParaRPr lang="en-US" sz="950" dirty="0"/>
-          </a:p>
-        </p:txBody>
-      </p:sp>
-      <p:sp>
-        <p:nvSpPr>
-          <p:cNvPr id="63" name="Text 61"/>
-          <p:cNvSpPr txBox="1"/>
-          <p:nvPr/>
-        </p:nvSpPr>
-        <p:spPr>
-          <a:xfrm>
-            <a:off x="8732520" y="2304288"/>
-            <a:ext cx="1152144" cy="667512"/>
-          </a:xfrm>
-          <a:prstGeom prst="rect">
-            <a:avLst/>
-          </a:prstGeom>
-          <a:noFill/>
-          <a:ln/>
-        </p:spPr>
-        <p:txBody>
-          <a:bodyPr wrap="square" lIns="0" tIns="0" rIns="0" bIns="0" rtlCol="0" anchor="t"/>
-          <a:lstStyle/>
-          <a:p>
-            <a:pPr indent="0" marL="0">
-              <a:buNone/>
-            </a:pPr>
-            <a:r>
-              <a:rPr lang="en-US" sz="1400" b="1" dirty="0">
-                <a:solidFill>
-                  <a:srgbClr val="FFFFFF"/>
-                </a:solidFill>
-                <a:latin typeface="Cambria" pitchFamily="34" charset="0"/>
-                <a:ea typeface="Cambria" pitchFamily="34" charset="-122"/>
-                <a:cs typeface="Cambria" pitchFamily="34" charset="-120"/>
-              </a:rPr>
-              <a:t>Write-up</a:t>
-            </a:r>
-            <a:endParaRPr lang="en-US" sz="1400" dirty="0"/>
-          </a:p>
-        </p:txBody>
-      </p:sp>
-      <p:sp>
-        <p:nvSpPr>
-          <p:cNvPr id="64" name="Text 62"/>
-          <p:cNvSpPr txBox="1"/>
-          <p:nvPr/>
-        </p:nvSpPr>
-        <p:spPr>
-          <a:xfrm>
-            <a:off x="8714232" y="3191256"/>
-            <a:ext cx="1188720" cy="1892808"/>
-          </a:xfrm>
-          <a:prstGeom prst="rect">
-            <a:avLst/>
-          </a:prstGeom>
-          <a:noFill/>
-          <a:ln/>
-        </p:spPr>
-        <p:txBody>
-          <a:bodyPr wrap="square" lIns="0" tIns="0" rIns="0" bIns="0" rtlCol="0" anchor="t"/>
-          <a:lstStyle/>
-          <a:p>
-            <a:pPr indent="0" marL="0">
-              <a:spcAft>
-                <a:spcPts val="400"/>
-              </a:spcAft>
-              <a:buNone/>
-            </a:pPr>
-            <a:endParaRPr lang="en-US" sz="900" dirty="0"/>
-          </a:p>
-        </p:txBody>
-      </p:sp>
-      <p:sp>
-        <p:nvSpPr>
-          <p:cNvPr id="65" name="Text 63"/>
-          <p:cNvSpPr txBox="1"/>
-          <p:nvPr/>
-        </p:nvSpPr>
-        <p:spPr>
-          <a:xfrm>
-            <a:off x="8695944" y="3200400"/>
-            <a:ext cx="1225296" cy="1463040"/>
-          </a:xfrm>
-          <a:prstGeom prst="rect">
-            <a:avLst/>
-          </a:prstGeom>
-          <a:noFill/>
-          <a:ln/>
-        </p:spPr>
-        <p:txBody>
-          <a:bodyPr wrap="square" lIns="0" tIns="0" rIns="0" bIns="0" rtlCol="0" anchor="t"/>
-          <a:lstStyle/>
-          <a:p>
-            <a:pPr indent="0" marL="0">
-              <a:spcAft>
-                <a:spcPts val="600"/>
-              </a:spcAft>
-              <a:buNone/>
-            </a:pPr>
-            <a:r>
-              <a:rPr lang="en-US" sz="950" dirty="0">
-                <a:solidFill>
-                  <a:srgbClr val="16202B"/>
-                </a:solidFill>
-                <a:latin typeface="Calibri" pitchFamily="34" charset="0"/>
-                <a:ea typeface="Calibri" pitchFamily="34" charset="-122"/>
-                <a:cs typeface="Calibri" pitchFamily="34" charset="-120"/>
-              </a:rPr>
-              <a:t>Abstract, methods paragraph, background with PubMed-resolved references.</a:t>
-            </a:r>
-            <a:endParaRPr lang="en-US" sz="950" dirty="0"/>
-          </a:p>
-          <a:p>
-            <a:pPr indent="0" marL="0">
-              <a:buNone/>
-            </a:pPr>
-            <a:r>
-              <a:rPr lang="en-US" sz="950" b="1" dirty="0">
-                <a:solidFill>
-                  <a:srgbClr val="0F4C43"/>
-                </a:solidFill>
-                <a:latin typeface="Calibri" pitchFamily="34" charset="0"/>
-                <a:ea typeface="Calibri" pitchFamily="34" charset="-122"/>
-                <a:cs typeface="Calibri" pitchFamily="34" charset="-120"/>
-              </a:rPr>
-              <a:t>On request.</a:t>
-            </a:r>
-            <a:endParaRPr lang="en-US" sz="950" dirty="0"/>
-          </a:p>
-        </p:txBody>
-      </p:sp>
-      <p:sp>
-        <p:nvSpPr>
-          <p:cNvPr id="66" name="Shape 64"/>
-          <p:cNvSpPr/>
-          <p:nvPr/>
-        </p:nvSpPr>
-        <p:spPr>
-          <a:xfrm>
-            <a:off x="8695944" y="4937760"/>
-            <a:ext cx="118872" cy="118872"/>
-          </a:xfrm>
-          <a:prstGeom prst="rect">
-            <a:avLst/>
-          </a:prstGeom>
-          <a:solidFill>
-            <a:srgbClr val="0F4C43"/>
-          </a:solidFill>
-          <a:ln w="12700">
-            <a:solidFill>
-              <a:srgbClr val="0F4C43"/>
-            </a:solidFill>
-            <a:prstDash val="solid"/>
-          </a:ln>
-        </p:spPr>
-      </p:sp>
-      <p:sp>
-        <p:nvSpPr>
-          <p:cNvPr id="67" name="Shape 65"/>
-          <p:cNvSpPr/>
-          <p:nvPr/>
-        </p:nvSpPr>
-        <p:spPr>
-          <a:xfrm>
-            <a:off x="10168128" y="2011680"/>
-            <a:ext cx="1481328" cy="1051560"/>
-          </a:xfrm>
-          <a:prstGeom prst="roundRect">
-            <a:avLst>
-              <a:gd name="adj" fmla="val 6957"/>
-            </a:avLst>
-          </a:prstGeom>
-          <a:solidFill>
-            <a:srgbClr val="0F4C43"/>
-          </a:solidFill>
-          <a:ln w="12700">
-            <a:solidFill>
-              <a:srgbClr val="0F4C43"/>
-            </a:solidFill>
-            <a:prstDash val="solid"/>
-          </a:ln>
-        </p:spPr>
-      </p:sp>
-      <p:sp>
-        <p:nvSpPr>
-          <p:cNvPr id="68" name="Shape 66"/>
-          <p:cNvSpPr/>
-          <p:nvPr/>
-        </p:nvSpPr>
-        <p:spPr>
-          <a:xfrm>
-            <a:off x="10168128" y="2953512"/>
-            <a:ext cx="1481328" cy="109728"/>
-          </a:xfrm>
-          <a:prstGeom prst="rect">
-            <a:avLst/>
-          </a:prstGeom>
-          <a:solidFill>
-            <a:srgbClr val="0F4C43"/>
-          </a:solidFill>
-          <a:ln w="12700">
-            <a:solidFill>
-              <a:srgbClr val="0F4C43"/>
-            </a:solidFill>
-            <a:prstDash val="solid"/>
-          </a:ln>
-        </p:spPr>
-      </p:sp>
-      <p:sp>
-        <p:nvSpPr>
-          <p:cNvPr id="69" name="Shape 67"/>
-          <p:cNvSpPr/>
-          <p:nvPr/>
-        </p:nvSpPr>
-        <p:spPr>
-          <a:xfrm>
-            <a:off x="10168128" y="3063240"/>
-            <a:ext cx="1481328" cy="2148840"/>
-          </a:xfrm>
-          <a:prstGeom prst="roundRect">
-            <a:avLst>
-              <a:gd name="adj" fmla="val 4938"/>
-            </a:avLst>
-          </a:prstGeom>
-          <a:solidFill>
-            <a:srgbClr val="F7FAF9"/>
-          </a:solidFill>
-          <a:ln w="12700">
-            <a:solidFill>
-              <a:srgbClr val="F7FAF9"/>
-            </a:solidFill>
-            <a:prstDash val="solid"/>
-          </a:ln>
-        </p:spPr>
-      </p:sp>
-      <p:sp>
-        <p:nvSpPr>
-          <p:cNvPr id="70" name="Shape 68"/>
-          <p:cNvSpPr/>
-          <p:nvPr/>
-        </p:nvSpPr>
-        <p:spPr>
-          <a:xfrm>
-            <a:off x="10168128" y="3063240"/>
-            <a:ext cx="1481328" cy="91440"/>
-          </a:xfrm>
-          <a:prstGeom prst="rect">
-            <a:avLst/>
-          </a:prstGeom>
-          <a:solidFill>
-            <a:srgbClr val="F7FAF9"/>
-          </a:solidFill>
-          <a:ln w="12700">
-            <a:solidFill>
-              <a:srgbClr val="F7FAF9"/>
-            </a:solidFill>
-            <a:prstDash val="solid"/>
-          </a:ln>
-        </p:spPr>
-      </p:sp>
-      <p:sp>
-        <p:nvSpPr>
-          <p:cNvPr id="71" name="Text 69"/>
-          <p:cNvSpPr txBox="1"/>
-          <p:nvPr/>
-        </p:nvSpPr>
-        <p:spPr>
-          <a:xfrm>
-            <a:off x="10332720" y="2112264"/>
-            <a:ext cx="1152144" cy="201168"/>
-          </a:xfrm>
-          <a:prstGeom prst="rect">
-            <a:avLst/>
-          </a:prstGeom>
-          <a:noFill/>
-          <a:ln/>
-        </p:spPr>
-        <p:txBody>
-          <a:bodyPr wrap="square" lIns="0" tIns="0" rIns="0" bIns="0" rtlCol="0" anchor="ctr"/>
-          <a:lstStyle/>
-          <a:p>
-            <a:pPr indent="0" marL="0">
-              <a:buNone/>
-            </a:pPr>
-            <a:r>
-              <a:rPr lang="en-US" sz="950" b="1" dirty="0">
-                <a:solidFill>
-                  <a:srgbClr val="8FC3B5"/>
-                </a:solidFill>
-                <a:latin typeface="Consolas" pitchFamily="34" charset="0"/>
-                <a:ea typeface="Consolas" pitchFamily="34" charset="-122"/>
-                <a:cs typeface="Consolas" pitchFamily="34" charset="-120"/>
-              </a:rPr>
-              <a:t>STEP 7</a:t>
-            </a:r>
-            <a:endParaRPr lang="en-US" sz="950" dirty="0"/>
-          </a:p>
-        </p:txBody>
-      </p:sp>
-      <p:sp>
-        <p:nvSpPr>
-          <p:cNvPr id="72" name="Text 70"/>
-          <p:cNvSpPr txBox="1"/>
-          <p:nvPr/>
-        </p:nvSpPr>
-        <p:spPr>
-          <a:xfrm>
-            <a:off x="10332720" y="2304288"/>
-            <a:ext cx="1152144" cy="667512"/>
-          </a:xfrm>
-          <a:prstGeom prst="rect">
-            <a:avLst/>
-          </a:prstGeom>
-          <a:noFill/>
-          <a:ln/>
-        </p:spPr>
-        <p:txBody>
-          <a:bodyPr wrap="square" lIns="0" tIns="0" rIns="0" bIns="0" rtlCol="0" anchor="t"/>
-          <a:lstStyle/>
-          <a:p>
-            <a:pPr indent="0" marL="0">
-              <a:buNone/>
-            </a:pPr>
-            <a:r>
-              <a:rPr lang="en-US" sz="1400" b="1" dirty="0">
-                <a:solidFill>
-                  <a:srgbClr val="FFFFFF"/>
-                </a:solidFill>
-                <a:latin typeface="Cambria" pitchFamily="34" charset="0"/>
-                <a:ea typeface="Cambria" pitchFamily="34" charset="-122"/>
-                <a:cs typeface="Cambria" pitchFamily="34" charset="-120"/>
-              </a:rPr>
-              <a:t>Code</a:t>
-            </a:r>
-            <a:endParaRPr lang="en-US" sz="1400" dirty="0"/>
-          </a:p>
-        </p:txBody>
-      </p:sp>
-      <p:sp>
-        <p:nvSpPr>
-          <p:cNvPr id="73" name="Text 71"/>
-          <p:cNvSpPr txBox="1"/>
-          <p:nvPr/>
-        </p:nvSpPr>
-        <p:spPr>
-          <a:xfrm>
-            <a:off x="10314432" y="3191256"/>
-            <a:ext cx="1188720" cy="1892808"/>
-          </a:xfrm>
-          <a:prstGeom prst="rect">
-            <a:avLst/>
-          </a:prstGeom>
-          <a:noFill/>
-          <a:ln/>
-        </p:spPr>
-        <p:txBody>
-          <a:bodyPr wrap="square" lIns="0" tIns="0" rIns="0" bIns="0" rtlCol="0" anchor="t"/>
-          <a:lstStyle/>
-          <a:p>
-            <a:pPr indent="0" marL="0">
-              <a:spcAft>
-                <a:spcPts val="400"/>
-              </a:spcAft>
-              <a:buNone/>
-            </a:pPr>
-            <a:endParaRPr lang="en-US" sz="900" dirty="0"/>
-          </a:p>
-        </p:txBody>
-      </p:sp>
-      <p:sp>
-        <p:nvSpPr>
-          <p:cNvPr id="74" name="Text 72"/>
-          <p:cNvSpPr txBox="1"/>
-          <p:nvPr/>
-        </p:nvSpPr>
-        <p:spPr>
-          <a:xfrm>
-            <a:off x="10296144" y="3200400"/>
-            <a:ext cx="1225296" cy="1463040"/>
-          </a:xfrm>
-          <a:prstGeom prst="rect">
-            <a:avLst/>
-          </a:prstGeom>
-          <a:noFill/>
-          <a:ln/>
-        </p:spPr>
-        <p:txBody>
-          <a:bodyPr wrap="square" lIns="0" tIns="0" rIns="0" bIns="0" rtlCol="0" anchor="t"/>
-          <a:lstStyle/>
-          <a:p>
-            <a:pPr indent="0" marL="0">
-              <a:spcAft>
-                <a:spcPts val="600"/>
-              </a:spcAft>
-              <a:buNone/>
-            </a:pPr>
-            <a:r>
-              <a:rPr lang="en-US" sz="950" dirty="0">
-                <a:solidFill>
-                  <a:srgbClr val="16202B"/>
-                </a:solidFill>
-                <a:latin typeface="Calibri" pitchFamily="34" charset="0"/>
-                <a:ea typeface="Calibri" pitchFamily="34" charset="-122"/>
-                <a:cs typeface="Calibri" pitchFamily="34" charset="-120"/>
-              </a:rPr>
-              <a:t>Runnable code in the investigator's software, never executed by Mallard.</a:t>
-            </a:r>
-            <a:endParaRPr lang="en-US" sz="950" dirty="0"/>
-          </a:p>
-          <a:p>
-            <a:pPr indent="0" marL="0">
-              <a:buNone/>
-            </a:pPr>
-            <a:r>
-              <a:rPr lang="en-US" sz="950" b="1" dirty="0">
-                <a:solidFill>
-                  <a:srgbClr val="0F4C43"/>
-                </a:solidFill>
-                <a:latin typeface="Calibri" pitchFamily="34" charset="0"/>
-                <a:ea typeface="Calibri" pitchFamily="34" charset="-122"/>
-                <a:cs typeface="Calibri" pitchFamily="34" charset="-120"/>
-              </a:rPr>
-              <a:t>On request.</a:t>
-            </a:r>
-            <a:endParaRPr lang="en-US" sz="950" dirty="0"/>
-          </a:p>
-        </p:txBody>
-      </p:sp>
-      <p:sp>
-        <p:nvSpPr>
-          <p:cNvPr id="75" name="Shape 73"/>
-          <p:cNvSpPr/>
-          <p:nvPr/>
-        </p:nvSpPr>
-        <p:spPr>
-          <a:xfrm>
-            <a:off x="10296144" y="4937760"/>
-            <a:ext cx="118872" cy="118872"/>
-          </a:xfrm>
-          <a:prstGeom prst="rect">
-            <a:avLst/>
-          </a:prstGeom>
-          <a:solidFill>
-            <a:srgbClr val="0F4C43"/>
-          </a:solidFill>
-          <a:ln w="12700">
-            <a:solidFill>
-              <a:srgbClr val="0F4C43"/>
-            </a:solidFill>
-            <a:prstDash val="solid"/>
-          </a:ln>
-        </p:spPr>
-      </p:sp>
-      <p:sp>
-        <p:nvSpPr>
-          <p:cNvPr id="76" name="Shape 74"/>
+          <p:cNvPr id="64" name="Shape 62"/>
           <p:cNvSpPr/>
           <p:nvPr/>
         </p:nvSpPr>
@@ -6299,7 +5885,7 @@
       </p:sp>
       <p:sp>
         <p:nvSpPr>
-          <p:cNvPr id="77" name="Text 75"/>
+          <p:cNvPr id="65" name="Text 63"/>
           <p:cNvSpPr txBox="1"/>
           <p:nvPr/>
         </p:nvSpPr>
@@ -6330,7 +5916,7 @@
                 <a:ea typeface="Calibri" pitchFamily="34" charset="-122"/>
                 <a:cs typeface="Calibri" pitchFamily="34" charset="-120"/>
               </a:rPr>
-              <a:t>Each step drafts only its own sections. The investigator's answers are pinned as facts no later step can overwrite, and re-running a step marks everything after it stale.</a:t>
+              <a:t>A later decision can reopen an earlier phase. Before an edit is saved, the investigator sees what generated work it affects and what is preserved.</a:t>
             </a:r>
             <a:endParaRPr lang="en-US" sz="1450" dirty="0"/>
           </a:p>
@@ -7232,7 +6818,7 @@
                 <a:ea typeface="Calibri" pitchFamily="34" charset="-122"/>
                 <a:cs typeface="Calibri" pitchFamily="34" charset="-120"/>
               </a:rPr>
-              <a:t>Two reviews, one guarded revision, a judge that never edits, and then the code</a:t>
+              <a:t>Two reviews, one guarded revision, a judge that never edits, then the code, then the investigator</a:t>
             </a:r>
             <a:endParaRPr lang="en-US" sz="1500" dirty="0"/>
           </a:p>
@@ -7966,7 +7552,7 @@
                 <a:ea typeface="Calibri" pitchFamily="34" charset="-122"/>
                 <a:cs typeface="Calibri" pitchFamily="34" charset="-120"/>
               </a:rPr>
-              <a:t>Open findings become one form: values only they know, contradictions to reconcile, mechanical fixes. One button, one revision, one credit.</a:t>
+              <a:t>An edit to a confirmed decision is previewed with the work it affects. Update affected sections regenerates only the stale parts, and the result is held with a diff until it is accepted or discarded.</a:t>
             </a:r>
             <a:endParaRPr lang="en-US" sz="1100" dirty="0"/>
           </a:p>
@@ -9084,7 +8670,7 @@
                 <a:ea typeface="Calibri" pitchFamily="34" charset="-122"/>
                 <a:cs typeface="Calibri" pitchFamily="34" charset="-120"/>
               </a:rPr>
-              <a:t>●  11 typed inputs</a:t>
+              <a:t>●  11 typed inputs and 4 presses</a:t>
             </a:r>
             <a:endParaRPr lang="en-US" sz="1200" dirty="0"/>
           </a:p>
@@ -9104,7 +8690,7 @@
                 <a:ea typeface="Calibri" pitchFamily="34" charset="-122"/>
                 <a:cs typeface="Calibri" pitchFamily="34" charset="-120"/>
               </a:rPr>
-              <a:t>Context fields, aims and hypotheses, feasibility answers, estimand and variables, analysis contract and sizing inputs, counts, execution, finalisation.</a:t>
+              <a:t>Context fields, aims and hypotheses, feasibility answers, estimand and variables, answers to the model, analysis contract and sizing inputs, counts, execution, finalisation. Presses: build study, draft analyses, draft execution, write-up and code.</a:t>
             </a:r>
             <a:endParaRPr lang="en-US" sz="1200" dirty="0"/>
           </a:p>
@@ -9144,7 +8730,7 @@
                 <a:ea typeface="Calibri" pitchFamily="34" charset="-122"/>
                 <a:cs typeface="Calibri" pitchFamily="34" charset="-120"/>
               </a:rPr>
-              <a:t>Confirmatory or not, aims-check disposition, basis per answer, approve or alternative, each design condition, biostatistician review, multiplicity, data requests, revise, readiness, write-up and code.</a:t>
+              <a:t>Confirmatory or not, aims-check disposition, basis per answer, approve or alternative, each design condition, data requests, multiplicity, save or update after an edit, accept or discard a result, readiness, write-up and code.</a:t>
             </a:r>
             <a:endParaRPr lang="en-US" sz="1200" dirty="0"/>
           </a:p>
@@ -9652,7 +9238,7 @@
                 <a:ea typeface="Calibri" pitchFamily="34" charset="-122"/>
                 <a:cs typeface="Calibri" pitchFamily="34" charset="-120"/>
               </a:rPr>
-              <a:t>●  11 gates and checks</a:t>
+              <a:t>●  Six phase gates and the checks between them</a:t>
             </a:r>
             <a:endParaRPr lang="en-US" sz="1200" dirty="0"/>
           </a:p>
@@ -9672,7 +9258,7 @@
                 <a:ea typeface="Calibri" pitchFamily="34" charset="-122"/>
                 <a:cs typeface="Calibri" pitchFamily="34" charset="-120"/>
               </a:rPr>
-              <a:t>PHI stripping, context, question, feasibility, conflict, design, credit, 37 plan checks, counts, analysis, execution and finalisation gates, then the export.</a:t>
+              <a:t>PHI stripping, the conflict gate, the credit check, the 37 plan checks, the recomputed number, count reconciliation, the stale-dependency map and the pending-result guard, then the export.</a:t>
             </a:r>
             <a:endParaRPr lang="en-US" sz="1200" dirty="0"/>
           </a:p>
@@ -9776,7 +9362,7 @@
                 <a:ea typeface="Calibri" pitchFamily="34" charset="-122"/>
                 <a:cs typeface="Calibri" pitchFamily="34" charset="-120"/>
               </a:rPr>
-              <a:t>The one loop back from the code lane to the models is the investigator's fixup form, and it costs a credit.</a:t>
+              <a:t>The one loop back from the code lane to the models is an investigator's decision edit, and its result waits for acceptance.</a:t>
             </a:r>
             <a:endParaRPr lang="en-US" sz="1450" dirty="0"/>
           </a:p>
@@ -9847,7 +9433,7 @@
                 <a:ea typeface="Cambria" pitchFamily="34" charset="-122"/>
                 <a:cs typeface="Cambria" pitchFamily="34" charset="-120"/>
               </a:rPr>
-              <a:t>One panel of the process map: analysis and sizing</a:t>
+              <a:t>One panel of the process map: revision inside Phase 4</a:t>
             </a:r>
             <a:endParaRPr lang="en-US" sz="3400" dirty="0"/>
           </a:p>
@@ -9886,7 +9472,7 @@
                 <a:ea typeface="Calibri" pitchFamily="34" charset="-122"/>
                 <a:cs typeface="Calibri" pitchFamily="34" charset="-120"/>
               </a:rPr>
-              <a:t>Parallelogram = investigator input · diamond = decision · rectangle = process · numbered circle = continues on the next panel</a:t>
+              <a:t>Parallelogram = investigator input · diamond = decision · rectangle = process · numbered circle = continues on another panel</a:t>
             </a:r>
             <a:endParaRPr lang="en-US" sz="1500" dirty="0"/>
           </a:p>
@@ -9894,7 +9480,7 @@
       </p:sp>
       <p:pic>
         <p:nvPicPr>
-          <p:cNvPr id="4" name="Image 0" descr="panelD.png">    </p:cNvPr>
+          <p:cNvPr id="4" name="Image 0" descr="panelE.png">    </p:cNvPr>
           <p:cNvPicPr>
             <a:picLocks noChangeAspect="1"/>
           </p:cNvPicPr>
@@ -9972,7 +9558,7 @@
                 <a:ea typeface="Calibri" pitchFamily="34" charset="-122"/>
                 <a:cs typeface="Calibri" pitchFamily="34" charset="-120"/>
               </a:rPr>
-              <a:t>The investigator supplies the contract and presses Calculate; the code recomputes the number and runs the checks; the fixup form is the only route back to the models.</a:t>
+              <a:t>Multiplicity and counts are investigator decisions. An edit is previewed, affected work is marked stale, an update regenerates only that work, and the result waits for acceptance.</a:t>
             </a:r>
             <a:endParaRPr lang="en-US" sz="1050" dirty="0"/>
           </a:p>
@@ -10001,7 +9587,7 @@
                 <a:ea typeface="Calibri" pitchFamily="34" charset="-122"/>
                 <a:cs typeface="Calibri" pitchFamily="34" charset="-120"/>
               </a:rPr>
-              <a:t>Five panels cover the whole flow, tagged I1 to I11 and D1 to D11.</a:t>
+              <a:t>Six panels cover the whole flow, tagged I1 to I11 and D1 to D11.</a:t>
             </a:r>
             <a:endParaRPr lang="en-US" sz="1050" dirty="0"/>
           </a:p>
@@ -10537,7 +10123,7 @@
                 <a:ea typeface="Calibri" pitchFamily="34" charset="-122"/>
                 <a:cs typeface="Calibri" pitchFamily="34" charset="-120"/>
               </a:rPr>
-              <a:t>Code feasibility gate; a task blocks design until closed</a:t>
+              <a:t>Code Phase 2 gate; a task blocks design until closed</a:t>
             </a:r>
             <a:endParaRPr lang="en-US" sz="1050" dirty="0"/>
           </a:p>
@@ -10821,7 +10407,7 @@
                 <a:ea typeface="Calibri" pitchFamily="34" charset="-122"/>
                 <a:cs typeface="Calibri" pitchFamily="34" charset="-120"/>
               </a:rPr>
-              <a:t>Investigator defines the estimand and variables</a:t>
+              <a:t>Code Phase 3 gate, then the design confirmation</a:t>
             </a:r>
             <a:endParaRPr lang="en-US" sz="1050" dirty="0"/>
           </a:p>
@@ -10924,7 +10510,7 @@
                 <a:ea typeface="Calibri" pitchFamily="34" charset="-122"/>
                 <a:cs typeface="Calibri" pitchFamily="34" charset="-120"/>
               </a:rPr>
-              <a:t>Request a biostatistician design review?</a:t>
+              <a:t>Data beyond the map: add it, or remove from the analysis</a:t>
             </a:r>
             <a:endParaRPr lang="en-US" sz="1250" dirty="0"/>
           </a:p>
@@ -10963,7 +10549,7 @@
                 <a:ea typeface="Calibri" pitchFamily="34" charset="-122"/>
                 <a:cs typeface="Calibri" pitchFamily="34" charset="-120"/>
               </a:rPr>
-              <a:t>Code pins the review to the decisions; any change makes it stale</a:t>
+              <a:t>Investigator fills the analysis contract</a:t>
             </a:r>
             <a:endParaRPr lang="en-US" sz="1050" dirty="0"/>
           </a:p>
@@ -11105,7 +10691,7 @@
                 <a:ea typeface="Calibri" pitchFamily="34" charset="-122"/>
                 <a:cs typeface="Calibri" pitchFamily="34" charset="-120"/>
               </a:rPr>
-              <a:t>Code analysis gate</a:t>
+              <a:t>Investigator reconciles counts; code Phase 4 gate</a:t>
             </a:r>
             <a:endParaRPr lang="en-US" sz="1050" dirty="0"/>
           </a:p>
@@ -11208,7 +10794,7 @@
                 <a:ea typeface="Calibri" pitchFamily="34" charset="-122"/>
                 <a:cs typeface="Calibri" pitchFamily="34" charset="-120"/>
               </a:rPr>
-              <a:t>Data beyond the map: add it, or remove from the analysis</a:t>
+              <a:t>After an edit: save only, or update the affected sections</a:t>
             </a:r>
             <a:endParaRPr lang="en-US" sz="1250" dirty="0"/>
           </a:p>
@@ -11247,7 +10833,7 @@
                 <a:ea typeface="Calibri" pitchFamily="34" charset="-122"/>
                 <a:cs typeface="Calibri" pitchFamily="34" charset="-120"/>
               </a:rPr>
-              <a:t>Code analysis gate</a:t>
+              <a:t>Code marks stale work; models regenerate only that</a:t>
             </a:r>
             <a:endParaRPr lang="en-US" sz="1050" dirty="0"/>
           </a:p>
@@ -11350,7 +10936,7 @@
                 <a:ea typeface="Calibri" pitchFamily="34" charset="-122"/>
                 <a:cs typeface="Calibri" pitchFamily="34" charset="-120"/>
               </a:rPr>
-              <a:t>Send the fixup form as one revision?</a:t>
+              <a:t>Accept or discard the generated changes</a:t>
             </a:r>
             <a:endParaRPr lang="en-US" sz="1250" dirty="0"/>
           </a:p>
@@ -11389,7 +10975,7 @@
                 <a:ea typeface="Calibri" pitchFamily="34" charset="-122"/>
                 <a:cs typeface="Calibri" pitchFamily="34" charset="-120"/>
               </a:rPr>
-              <a:t>Models: guarded patch and adjudication; one credit</a:t>
+              <a:t>Code Phase 4 gate; the result is refused if decisions moved</a:t>
             </a:r>
             <a:endParaRPr lang="en-US" sz="1050" dirty="0"/>
           </a:p>
@@ -11531,7 +11117,7 @@
                 <a:ea typeface="Calibri" pitchFamily="34" charset="-122"/>
                 <a:cs typeface="Calibri" pitchFamily="34" charset="-120"/>
               </a:rPr>
-              <a:t>Code execution gate; infeasible blocks the phase</a:t>
+              <a:t>Code Phase 5 gate; infeasible blocks the phase</a:t>
             </a:r>
             <a:endParaRPr lang="en-US" sz="1050" dirty="0"/>
           </a:p>
@@ -11634,7 +11220,7 @@
                 <a:ea typeface="Calibri" pitchFamily="34" charset="-122"/>
                 <a:cs typeface="Calibri" pitchFamily="34" charset="-120"/>
               </a:rPr>
-              <a:t>Request the write-up and code, and in which languages</a:t>
+              <a:t>Request the written package and code, and in which languages</a:t>
             </a:r>
             <a:endParaRPr lang="en-US" sz="1250" dirty="0"/>
           </a:p>
@@ -11673,7 +11259,7 @@
                 <a:ea typeface="Calibri" pitchFamily="34" charset="-122"/>
                 <a:cs typeface="Calibri" pitchFamily="34" charset="-120"/>
               </a:rPr>
-              <a:t>Models draft steps 6 and 7 on request; code is never executed</a:t>
+              <a:t>Models draft them on request; code is never executed</a:t>
             </a:r>
             <a:endParaRPr lang="en-US" sz="1050" dirty="0"/>
           </a:p>
@@ -11737,7 +11323,7 @@
                 <a:ea typeface="Calibri" pitchFamily="34" charset="-122"/>
                 <a:cs typeface="Calibri" pitchFamily="34" charset="-120"/>
               </a:rPr>
-              <a:t>Eleven more items are typed inputs rather than choices: the context fields, aims, hypotheses, feasibility answers, conflict answers, estimand and variables, the model's questions, the analysis contract, counts, execution fields and finalisation.</a:t>
+              <a:t>Eleven more items are typed inputs rather than choices, and four are presses: build the study, draft the analyses, draft execution, and request the written package and code.</a:t>
             </a:r>
             <a:endParaRPr lang="en-US" sz="1000" dirty="0"/>
           </a:p>

--- a/docs/Mallard Study Design Process - leaders deck.pptx
+++ b/docs/Mallard Study Design Process - leaders deck.pptx
@@ -16,9 +16,14 @@
     <p:sldId id="264" r:id="rId10"/>
     <p:sldId id="265" r:id="rId11"/>
     <p:sldId id="266" r:id="rId12"/>
+    <p:sldId id="267" r:id="rId13"/>
+    <p:sldId id="268" r:id="rId14"/>
+    <p:sldId id="269" r:id="rId15"/>
+    <p:sldId id="270" r:id="rId16"/>
+    <p:sldId id="271" r:id="rId17"/>
   </p:sldIdLst>
   <p:notesMasterIdLst>
-    <p:notesMasterId r:id="rId13"/>
+    <p:notesMasterId r:id="rId18"/>
   </p:notesMasterIdLst>
   <p:sldSz cx="12192000" cy="6858000"/>
   <p:notesSz cx="6858000" cy="12192000"/>
@@ -600,7 +605,7 @@
           <a:p>
             <a:r>
               <a:rPr lang="en-US" dirty="0"/>
-              <a:t>Two minutes. Lead with these rather than being asked. The independent-evaluation card is the honest one and the audience will respect it. Do not soften the write-up failure rate; say it was measured on eight attempts and has not been re-measured.</a:t>
+              <a:t>Thirty seconds. Do not read the panel. Point at the three lanes and the one thing in the sidebar, then move on. If time is short, show panel 5 (revision) only and treat the others as an appendix.</a:t>
             </a:r>
             <a:endParaRPr lang="en-US" dirty="0"/>
           </a:p>
@@ -688,7 +693,7 @@
           <a:p>
             <a:r>
               <a:rPr lang="en-US" dirty="0"/>
-              <a:t>Two minutes, then questions. Restate the three points. Point to the document for the five-panel map and Appendix A. Agree a next step and a date before leaving.</a:t>
+              <a:t>Thirty seconds. Do not read the panel. Point at the three lanes and the one thing in the sidebar, then move on. If time is short, show panel 5 (revision) only and treat the others as an appendix.</a:t>
             </a:r>
             <a:endParaRPr lang="en-US" dirty="0"/>
           </a:p>
@@ -712,6 +717,446 @@
             <a:fld id="{F7021451-1387-4CA6-816F-3879F97B5CBC}" type="slidenum">
               <a:rPr lang="en-US"/>
               <a:t>11</a:t>
+            </a:fld>
+            <a:endParaRPr lang="en-US"/>
+          </a:p>
+        </p:txBody>
+      </p:sp>
+    </p:spTree>
+    <p:extLst>
+      <p:ext uri="{BB962C8B-B14F-4D97-AF65-F5344CB8AC3E}">
+        <p14:creationId xmlns:p14="http://schemas.microsoft.com/office/powerpoint/2010/main" val="1024086991"/>
+      </p:ext>
+    </p:extLst>
+  </p:cSld>
+  <p:clrMapOvr>
+    <a:masterClrMapping/>
+  </p:clrMapOvr>
+</p:notes>
+</file>
+
+<file path=ppt/notesSlides/notesSlide12.xml><?xml version="1.0" encoding="utf-8"?>
+<p:notes xmlns:a="http://schemas.openxmlformats.org/drawingml/2006/main" xmlns:r="http://schemas.openxmlformats.org/officeDocument/2006/relationships" xmlns:p="http://schemas.openxmlformats.org/presentationml/2006/main">
+  <p:cSld>
+    <p:spTree>
+      <p:nvGrpSpPr>
+        <p:cNvPr id="1" name=""/>
+        <p:cNvGrpSpPr/>
+        <p:nvPr/>
+      </p:nvGrpSpPr>
+      <p:grpSpPr>
+        <a:xfrm>
+          <a:off x="0" y="0"/>
+          <a:ext cx="0" cy="0"/>
+          <a:chOff x="0" y="0"/>
+          <a:chExt cx="0" cy="0"/>
+        </a:xfrm>
+      </p:grpSpPr>
+      <p:sp>
+        <p:nvSpPr>
+          <p:cNvPr id="2" name="Slide Image Placeholder 1"/>
+          <p:cNvSpPr>
+            <a:spLocks noGrp="1" noRot="1" noChangeAspect="1"/>
+          </p:cNvSpPr>
+          <p:nvPr>
+            <p:ph type="sldImg"/>
+          </p:nvPr>
+        </p:nvSpPr>
+        <p:spPr/>
+      </p:sp>
+      <p:sp>
+        <p:nvSpPr>
+          <p:cNvPr id="3" name="Notes Placeholder 2"/>
+          <p:cNvSpPr>
+            <a:spLocks noGrp="1"/>
+          </p:cNvSpPr>
+          <p:nvPr>
+            <p:ph type="body" idx="1"/>
+          </p:nvPr>
+        </p:nvSpPr>
+        <p:spPr/>
+        <p:txBody>
+          <a:bodyPr/>
+          <a:lstStyle/>
+          <a:p>
+            <a:r>
+              <a:rPr lang="en-US" dirty="0"/>
+              <a:t>Thirty seconds. Do not read the panel. Point at the three lanes and the one thing in the sidebar, then move on. If time is short, show panel 5 (revision) only and treat the others as an appendix.</a:t>
+            </a:r>
+            <a:endParaRPr lang="en-US" dirty="0"/>
+          </a:p>
+        </p:txBody>
+      </p:sp>
+      <p:sp>
+        <p:nvSpPr>
+          <p:cNvPr id="4" name="Slide Number Placeholder 3"/>
+          <p:cNvSpPr>
+            <a:spLocks noGrp="1"/>
+          </p:cNvSpPr>
+          <p:nvPr>
+            <p:ph type="sldNum" sz="quarter" idx="10"/>
+          </p:nvPr>
+        </p:nvSpPr>
+        <p:spPr/>
+        <p:txBody>
+          <a:bodyPr/>
+          <a:lstStyle/>
+          <a:p>
+            <a:fld id="{F7021451-1387-4CA6-816F-3879F97B5CBC}" type="slidenum">
+              <a:rPr lang="en-US"/>
+              <a:t>12</a:t>
+            </a:fld>
+            <a:endParaRPr lang="en-US"/>
+          </a:p>
+        </p:txBody>
+      </p:sp>
+    </p:spTree>
+    <p:extLst>
+      <p:ext uri="{BB962C8B-B14F-4D97-AF65-F5344CB8AC3E}">
+        <p14:creationId xmlns:p14="http://schemas.microsoft.com/office/powerpoint/2010/main" val="1024086991"/>
+      </p:ext>
+    </p:extLst>
+  </p:cSld>
+  <p:clrMapOvr>
+    <a:masterClrMapping/>
+  </p:clrMapOvr>
+</p:notes>
+</file>
+
+<file path=ppt/notesSlides/notesSlide13.xml><?xml version="1.0" encoding="utf-8"?>
+<p:notes xmlns:a="http://schemas.openxmlformats.org/drawingml/2006/main" xmlns:r="http://schemas.openxmlformats.org/officeDocument/2006/relationships" xmlns:p="http://schemas.openxmlformats.org/presentationml/2006/main">
+  <p:cSld>
+    <p:spTree>
+      <p:nvGrpSpPr>
+        <p:cNvPr id="1" name=""/>
+        <p:cNvGrpSpPr/>
+        <p:nvPr/>
+      </p:nvGrpSpPr>
+      <p:grpSpPr>
+        <a:xfrm>
+          <a:off x="0" y="0"/>
+          <a:ext cx="0" cy="0"/>
+          <a:chOff x="0" y="0"/>
+          <a:chExt cx="0" cy="0"/>
+        </a:xfrm>
+      </p:grpSpPr>
+      <p:sp>
+        <p:nvSpPr>
+          <p:cNvPr id="2" name="Slide Image Placeholder 1"/>
+          <p:cNvSpPr>
+            <a:spLocks noGrp="1" noRot="1" noChangeAspect="1"/>
+          </p:cNvSpPr>
+          <p:nvPr>
+            <p:ph type="sldImg"/>
+          </p:nvPr>
+        </p:nvSpPr>
+        <p:spPr/>
+      </p:sp>
+      <p:sp>
+        <p:nvSpPr>
+          <p:cNvPr id="3" name="Notes Placeholder 2"/>
+          <p:cNvSpPr>
+            <a:spLocks noGrp="1"/>
+          </p:cNvSpPr>
+          <p:nvPr>
+            <p:ph type="body" idx="1"/>
+          </p:nvPr>
+        </p:nvSpPr>
+        <p:spPr/>
+        <p:txBody>
+          <a:bodyPr/>
+          <a:lstStyle/>
+          <a:p>
+            <a:r>
+              <a:rPr lang="en-US" dirty="0"/>
+              <a:t>Thirty seconds. Do not read the panel. Point at the three lanes and the one thing in the sidebar, then move on. If time is short, show panel 5 (revision) only and treat the others as an appendix.</a:t>
+            </a:r>
+            <a:endParaRPr lang="en-US" dirty="0"/>
+          </a:p>
+        </p:txBody>
+      </p:sp>
+      <p:sp>
+        <p:nvSpPr>
+          <p:cNvPr id="4" name="Slide Number Placeholder 3"/>
+          <p:cNvSpPr>
+            <a:spLocks noGrp="1"/>
+          </p:cNvSpPr>
+          <p:nvPr>
+            <p:ph type="sldNum" sz="quarter" idx="10"/>
+          </p:nvPr>
+        </p:nvSpPr>
+        <p:spPr/>
+        <p:txBody>
+          <a:bodyPr/>
+          <a:lstStyle/>
+          <a:p>
+            <a:fld id="{F7021451-1387-4CA6-816F-3879F97B5CBC}" type="slidenum">
+              <a:rPr lang="en-US"/>
+              <a:t>13</a:t>
+            </a:fld>
+            <a:endParaRPr lang="en-US"/>
+          </a:p>
+        </p:txBody>
+      </p:sp>
+    </p:spTree>
+    <p:extLst>
+      <p:ext uri="{BB962C8B-B14F-4D97-AF65-F5344CB8AC3E}">
+        <p14:creationId xmlns:p14="http://schemas.microsoft.com/office/powerpoint/2010/main" val="1024086991"/>
+      </p:ext>
+    </p:extLst>
+  </p:cSld>
+  <p:clrMapOvr>
+    <a:masterClrMapping/>
+  </p:clrMapOvr>
+</p:notes>
+</file>
+
+<file path=ppt/notesSlides/notesSlide14.xml><?xml version="1.0" encoding="utf-8"?>
+<p:notes xmlns:a="http://schemas.openxmlformats.org/drawingml/2006/main" xmlns:r="http://schemas.openxmlformats.org/officeDocument/2006/relationships" xmlns:p="http://schemas.openxmlformats.org/presentationml/2006/main">
+  <p:cSld>
+    <p:spTree>
+      <p:nvGrpSpPr>
+        <p:cNvPr id="1" name=""/>
+        <p:cNvGrpSpPr/>
+        <p:nvPr/>
+      </p:nvGrpSpPr>
+      <p:grpSpPr>
+        <a:xfrm>
+          <a:off x="0" y="0"/>
+          <a:ext cx="0" cy="0"/>
+          <a:chOff x="0" y="0"/>
+          <a:chExt cx="0" cy="0"/>
+        </a:xfrm>
+      </p:grpSpPr>
+      <p:sp>
+        <p:nvSpPr>
+          <p:cNvPr id="2" name="Slide Image Placeholder 1"/>
+          <p:cNvSpPr>
+            <a:spLocks noGrp="1" noRot="1" noChangeAspect="1"/>
+          </p:cNvSpPr>
+          <p:nvPr>
+            <p:ph type="sldImg"/>
+          </p:nvPr>
+        </p:nvSpPr>
+        <p:spPr/>
+      </p:sp>
+      <p:sp>
+        <p:nvSpPr>
+          <p:cNvPr id="3" name="Notes Placeholder 2"/>
+          <p:cNvSpPr>
+            <a:spLocks noGrp="1"/>
+          </p:cNvSpPr>
+          <p:nvPr>
+            <p:ph type="body" idx="1"/>
+          </p:nvPr>
+        </p:nvSpPr>
+        <p:spPr/>
+        <p:txBody>
+          <a:bodyPr/>
+          <a:lstStyle/>
+          <a:p>
+            <a:r>
+              <a:rPr lang="en-US" dirty="0"/>
+              <a:t>Two minutes. Do not read all eleven. Name D4, D8 and D9: the design approval that gates the credit, the save-or-update choice after an edit, and the explicit acceptance of anything regenerated. Appendix A of the document gives every option and its effect.</a:t>
+            </a:r>
+            <a:endParaRPr lang="en-US" dirty="0"/>
+          </a:p>
+        </p:txBody>
+      </p:sp>
+      <p:sp>
+        <p:nvSpPr>
+          <p:cNvPr id="4" name="Slide Number Placeholder 3"/>
+          <p:cNvSpPr>
+            <a:spLocks noGrp="1"/>
+          </p:cNvSpPr>
+          <p:nvPr>
+            <p:ph type="sldNum" sz="quarter" idx="10"/>
+          </p:nvPr>
+        </p:nvSpPr>
+        <p:spPr/>
+        <p:txBody>
+          <a:bodyPr/>
+          <a:lstStyle/>
+          <a:p>
+            <a:fld id="{F7021451-1387-4CA6-816F-3879F97B5CBC}" type="slidenum">
+              <a:rPr lang="en-US"/>
+              <a:t>14</a:t>
+            </a:fld>
+            <a:endParaRPr lang="en-US"/>
+          </a:p>
+        </p:txBody>
+      </p:sp>
+    </p:spTree>
+    <p:extLst>
+      <p:ext uri="{BB962C8B-B14F-4D97-AF65-F5344CB8AC3E}">
+        <p14:creationId xmlns:p14="http://schemas.microsoft.com/office/powerpoint/2010/main" val="1024086991"/>
+      </p:ext>
+    </p:extLst>
+  </p:cSld>
+  <p:clrMapOvr>
+    <a:masterClrMapping/>
+  </p:clrMapOvr>
+</p:notes>
+</file>
+
+<file path=ppt/notesSlides/notesSlide15.xml><?xml version="1.0" encoding="utf-8"?>
+<p:notes xmlns:a="http://schemas.openxmlformats.org/drawingml/2006/main" xmlns:r="http://schemas.openxmlformats.org/officeDocument/2006/relationships" xmlns:p="http://schemas.openxmlformats.org/presentationml/2006/main">
+  <p:cSld>
+    <p:spTree>
+      <p:nvGrpSpPr>
+        <p:cNvPr id="1" name=""/>
+        <p:cNvGrpSpPr/>
+        <p:nvPr/>
+      </p:nvGrpSpPr>
+      <p:grpSpPr>
+        <a:xfrm>
+          <a:off x="0" y="0"/>
+          <a:ext cx="0" cy="0"/>
+          <a:chOff x="0" y="0"/>
+          <a:chExt cx="0" cy="0"/>
+        </a:xfrm>
+      </p:grpSpPr>
+      <p:sp>
+        <p:nvSpPr>
+          <p:cNvPr id="2" name="Slide Image Placeholder 1"/>
+          <p:cNvSpPr>
+            <a:spLocks noGrp="1" noRot="1" noChangeAspect="1"/>
+          </p:cNvSpPr>
+          <p:nvPr>
+            <p:ph type="sldImg"/>
+          </p:nvPr>
+        </p:nvSpPr>
+        <p:spPr/>
+      </p:sp>
+      <p:sp>
+        <p:nvSpPr>
+          <p:cNvPr id="3" name="Notes Placeholder 2"/>
+          <p:cNvSpPr>
+            <a:spLocks noGrp="1"/>
+          </p:cNvSpPr>
+          <p:nvPr>
+            <p:ph type="body" idx="1"/>
+          </p:nvPr>
+        </p:nvSpPr>
+        <p:spPr/>
+        <p:txBody>
+          <a:bodyPr/>
+          <a:lstStyle/>
+          <a:p>
+            <a:r>
+              <a:rPr lang="en-US" dirty="0"/>
+              <a:t>Two minutes. Lead with these rather than being asked. The independent-evaluation card is the honest one and the audience will respect it. Do not soften the write-up failure rate; say it was measured on eight attempts and has not been re-measured.</a:t>
+            </a:r>
+            <a:endParaRPr lang="en-US" dirty="0"/>
+          </a:p>
+        </p:txBody>
+      </p:sp>
+      <p:sp>
+        <p:nvSpPr>
+          <p:cNvPr id="4" name="Slide Number Placeholder 3"/>
+          <p:cNvSpPr>
+            <a:spLocks noGrp="1"/>
+          </p:cNvSpPr>
+          <p:nvPr>
+            <p:ph type="sldNum" sz="quarter" idx="10"/>
+          </p:nvPr>
+        </p:nvSpPr>
+        <p:spPr/>
+        <p:txBody>
+          <a:bodyPr/>
+          <a:lstStyle/>
+          <a:p>
+            <a:fld id="{F7021451-1387-4CA6-816F-3879F97B5CBC}" type="slidenum">
+              <a:rPr lang="en-US"/>
+              <a:t>15</a:t>
+            </a:fld>
+            <a:endParaRPr lang="en-US"/>
+          </a:p>
+        </p:txBody>
+      </p:sp>
+    </p:spTree>
+    <p:extLst>
+      <p:ext uri="{BB962C8B-B14F-4D97-AF65-F5344CB8AC3E}">
+        <p14:creationId xmlns:p14="http://schemas.microsoft.com/office/powerpoint/2010/main" val="1024086991"/>
+      </p:ext>
+    </p:extLst>
+  </p:cSld>
+  <p:clrMapOvr>
+    <a:masterClrMapping/>
+  </p:clrMapOvr>
+</p:notes>
+</file>
+
+<file path=ppt/notesSlides/notesSlide16.xml><?xml version="1.0" encoding="utf-8"?>
+<p:notes xmlns:a="http://schemas.openxmlformats.org/drawingml/2006/main" xmlns:r="http://schemas.openxmlformats.org/officeDocument/2006/relationships" xmlns:p="http://schemas.openxmlformats.org/presentationml/2006/main">
+  <p:cSld>
+    <p:spTree>
+      <p:nvGrpSpPr>
+        <p:cNvPr id="1" name=""/>
+        <p:cNvGrpSpPr/>
+        <p:nvPr/>
+      </p:nvGrpSpPr>
+      <p:grpSpPr>
+        <a:xfrm>
+          <a:off x="0" y="0"/>
+          <a:ext cx="0" cy="0"/>
+          <a:chOff x="0" y="0"/>
+          <a:chExt cx="0" cy="0"/>
+        </a:xfrm>
+      </p:grpSpPr>
+      <p:sp>
+        <p:nvSpPr>
+          <p:cNvPr id="2" name="Slide Image Placeholder 1"/>
+          <p:cNvSpPr>
+            <a:spLocks noGrp="1" noRot="1" noChangeAspect="1"/>
+          </p:cNvSpPr>
+          <p:nvPr>
+            <p:ph type="sldImg"/>
+          </p:nvPr>
+        </p:nvSpPr>
+        <p:spPr/>
+      </p:sp>
+      <p:sp>
+        <p:nvSpPr>
+          <p:cNvPr id="3" name="Notes Placeholder 2"/>
+          <p:cNvSpPr>
+            <a:spLocks noGrp="1"/>
+          </p:cNvSpPr>
+          <p:nvPr>
+            <p:ph type="body" idx="1"/>
+          </p:nvPr>
+        </p:nvSpPr>
+        <p:spPr/>
+        <p:txBody>
+          <a:bodyPr/>
+          <a:lstStyle/>
+          <a:p>
+            <a:r>
+              <a:rPr lang="en-US" dirty="0"/>
+              <a:t>Two minutes, then questions. Restate the three points. Point to the document for the six-panel map and Appendix A. Agree a next step and a date before leaving.</a:t>
+            </a:r>
+            <a:endParaRPr lang="en-US" dirty="0"/>
+          </a:p>
+        </p:txBody>
+      </p:sp>
+      <p:sp>
+        <p:nvSpPr>
+          <p:cNvPr id="4" name="Slide Number Placeholder 3"/>
+          <p:cNvSpPr>
+            <a:spLocks noGrp="1"/>
+          </p:cNvSpPr>
+          <p:nvPr>
+            <p:ph type="sldNum" sz="quarter" idx="10"/>
+          </p:nvPr>
+        </p:nvSpPr>
+        <p:spPr/>
+        <p:txBody>
+          <a:bodyPr/>
+          <a:lstStyle/>
+          <a:p>
+            <a:fld id="{F7021451-1387-4CA6-816F-3879F97B5CBC}" type="slidenum">
+              <a:rPr lang="en-US"/>
+              <a:t>16</a:t>
             </a:fld>
             <a:endParaRPr lang="en-US"/>
           </a:p>
@@ -1216,7 +1661,7 @@
           <a:p>
             <a:r>
               <a:rPr lang="en-US" dirty="0"/>
-              <a:t>Two minutes. This is the governance slide. The lanes are the answer to "where is the AI in this": it drafts and reviews; it does not decide what is printed. The full swimlane map with every decision is in the document; the next slide shows one panel of it.</a:t>
+              <a:t>Two minutes. This is the governance slide. The lanes are the answer to "where is the AI in this": it drafts and reviews; it does not decide what is printed. The next six slides walk the swimlane map panel by panel; the document has the same map with every tag explained.</a:t>
             </a:r>
             <a:endParaRPr lang="en-US" dirty="0"/>
           </a:p>
@@ -1304,7 +1749,7 @@
           <a:p>
             <a:r>
               <a:rPr lang="en-US" dirty="0"/>
-              <a:t>One minute. Do not read the panel. Point at the three lanes and the fixup diamond, then move on. Offer the document for the other four panels.</a:t>
+              <a:t>Thirty seconds. Do not read the panel. Point at the three lanes and the one thing in the sidebar, then move on. If time is short, show panel 5 (revision) only and treat the others as an appendix.</a:t>
             </a:r>
             <a:endParaRPr lang="en-US" dirty="0"/>
           </a:p>
@@ -1392,7 +1837,7 @@
           <a:p>
             <a:r>
               <a:rPr lang="en-US" dirty="0"/>
-              <a:t>Two minutes. Do not read all eleven. Name D4, D8 and D9: the design approval that gates the credit, the save-or-update choice after an edit, and the explicit acceptance of anything regenerated. Appendix A of the document gives every option and its effect.</a:t>
+              <a:t>Thirty seconds. Do not read the panel. Point at the three lanes and the one thing in the sidebar, then move on. If time is short, show panel 5 (revision) only and treat the others as an appendix.</a:t>
             </a:r>
             <a:endParaRPr lang="en-US" dirty="0"/>
           </a:p>
@@ -2092,7 +2537,7 @@
                 <a:ea typeface="Cambria" pitchFamily="34" charset="-122"/>
                 <a:cs typeface="Cambria" pitchFamily="34" charset="-120"/>
               </a:rPr>
-              <a:t>Where it does not yet help</a:t>
+              <a:t>Process map 3 of 6: the design decision and its gate</a:t>
             </a:r>
             <a:endParaRPr lang="en-US" sz="3400" dirty="0"/>
           </a:p>
@@ -2131,86 +2576,46 @@
                 <a:ea typeface="Calibri" pitchFamily="34" charset="-122"/>
                 <a:cs typeface="Calibri" pitchFamily="34" charset="-120"/>
               </a:rPr>
-              <a:t>Taken from the code, the Learn library and the roadmap notes, not inferred</a:t>
+              <a:t>Parallelogram = investigator input · diamond = decision · rectangle = process · numbered circle = continues on the next panel</a:t>
             </a:r>
             <a:endParaRPr lang="en-US" sz="1500" dirty="0"/>
           </a:p>
         </p:txBody>
       </p:sp>
-      <p:sp>
-        <p:nvSpPr>
-          <p:cNvPr id="4" name="Shape 2"/>
-          <p:cNvSpPr/>
-          <p:nvPr/>
-        </p:nvSpPr>
-        <p:spPr>
-          <a:xfrm>
-            <a:off x="566928" y="1691640"/>
-            <a:ext cx="5349240" cy="1920240"/>
-          </a:xfrm>
-          <a:prstGeom prst="rect">
-            <a:avLst/>
-          </a:prstGeom>
-          <a:solidFill>
-            <a:srgbClr val="EEF3F2"/>
-          </a:solidFill>
-          <a:ln w="12700">
-            <a:solidFill>
-              <a:srgbClr val="EEF3F2"/>
-            </a:solidFill>
-            <a:prstDash val="solid"/>
-          </a:ln>
-        </p:spPr>
-      </p:sp>
-      <p:sp>
-        <p:nvSpPr>
-          <p:cNvPr id="5" name="Text 3"/>
-          <p:cNvSpPr txBox="1"/>
-          <p:nvPr/>
-        </p:nvSpPr>
-        <p:spPr>
-          <a:xfrm>
-            <a:off x="841248" y="1892808"/>
-            <a:ext cx="4800600" cy="365760"/>
-          </a:xfrm>
-          <a:prstGeom prst="rect">
-            <a:avLst/>
-          </a:prstGeom>
-          <a:noFill/>
-          <a:ln/>
-        </p:spPr>
-        <p:txBody>
-          <a:bodyPr wrap="square" lIns="0" tIns="0" rIns="0" bIns="0" rtlCol="0" anchor="ctr"/>
-          <a:lstStyle/>
-          <a:p>
-            <a:pPr indent="0" marL="0">
-              <a:buNone/>
-            </a:pPr>
-            <a:r>
-              <a:rPr lang="en-US" sz="1600" b="1" dirty="0">
-                <a:solidFill>
-                  <a:srgbClr val="0F4C43"/>
-                </a:solidFill>
-                <a:latin typeface="Calibri" pitchFamily="34" charset="0"/>
-                <a:ea typeface="Calibri" pitchFamily="34" charset="-122"/>
-                <a:cs typeface="Calibri" pitchFamily="34" charset="-120"/>
-              </a:rPr>
-              <a:t>Designs it will not size</a:t>
-            </a:r>
-            <a:endParaRPr lang="en-US" sz="1600" dirty="0"/>
-          </a:p>
-        </p:txBody>
-      </p:sp>
-      <p:sp>
-        <p:nvSpPr>
-          <p:cNvPr id="6" name="Text 4"/>
-          <p:cNvSpPr txBox="1"/>
-          <p:nvPr/>
-        </p:nvSpPr>
-        <p:spPr>
-          <a:xfrm>
-            <a:off x="841248" y="2331720"/>
-            <a:ext cx="4800600" cy="1143000"/>
+      <p:pic>
+        <p:nvPicPr>
+          <p:cNvPr id="4" name="Image 0" descr="panelC.png">    </p:cNvPr>
+          <p:cNvPicPr>
+            <a:picLocks noChangeAspect="1"/>
+          </p:cNvPicPr>
+          <p:nvPr/>
+        </p:nvPicPr>
+        <p:blipFill>
+          <a:blip r:embed="rId1"/>
+          <a:stretch>
+            <a:fillRect/>
+          </a:stretch>
+        </p:blipFill>
+        <p:spPr>
+          <a:xfrm>
+            <a:off x="566928" y="1572768"/>
+            <a:ext cx="7150608" cy="4709160"/>
+          </a:xfrm>
+          <a:prstGeom prst="rect">
+            <a:avLst/>
+          </a:prstGeom>
+        </p:spPr>
+      </p:pic>
+      <p:sp>
+        <p:nvSpPr>
+          <p:cNvPr id="5" name="Text 2"/>
+          <p:cNvSpPr txBox="1"/>
+          <p:nvPr/>
+        </p:nvSpPr>
+        <p:spPr>
+          <a:xfrm>
+            <a:off x="10149840" y="1600200"/>
+            <a:ext cx="1737360" cy="4846320"/>
           </a:xfrm>
           <a:prstGeom prst="rect">
             <a:avLst/>
@@ -2223,10 +2628,13 @@
           <a:lstStyle/>
           <a:p>
             <a:pPr indent="0" marL="0">
-              <a:buNone/>
-            </a:pPr>
-            <a:r>
-              <a:rPr lang="en-US" sz="1200" dirty="0">
+              <a:spcAft>
+                <a:spcPts val="600"/>
+              </a:spcAft>
+              <a:buNone/>
+            </a:pPr>
+            <a:r>
+              <a:rPr lang="en-US" sz="1050" b="1" dirty="0">
                 <a:solidFill>
                   <a:srgbClr val="16202B"/>
                 </a:solidFill>
@@ -2234,102 +2642,19 @@
                 <a:ea typeface="Calibri" pitchFamily="34" charset="-122"/>
                 <a:cs typeface="Calibri" pitchFamily="34" charset="-120"/>
               </a:rPr>
-              <a:t>Cluster and stepped-wedge rollouts, mediation, repeated measures, matched case-control, prediction models, equivalence: the method is named and no number is printed. Adaptive, Bayesian, platform and SMART designs have no path at all.</a:t>
-            </a:r>
-            <a:endParaRPr lang="en-US" sz="1200" dirty="0"/>
-          </a:p>
-        </p:txBody>
-      </p:sp>
-      <p:sp>
-        <p:nvSpPr>
-          <p:cNvPr id="7" name="Shape 5"/>
-          <p:cNvSpPr/>
-          <p:nvPr/>
-        </p:nvSpPr>
-        <p:spPr>
-          <a:xfrm>
-            <a:off x="6236208" y="1691640"/>
-            <a:ext cx="5349240" cy="1920240"/>
-          </a:xfrm>
-          <a:prstGeom prst="rect">
-            <a:avLst/>
-          </a:prstGeom>
-          <a:solidFill>
-            <a:srgbClr val="EEF3F2"/>
-          </a:solidFill>
-          <a:ln w="12700">
-            <a:solidFill>
-              <a:srgbClr val="EEF3F2"/>
-            </a:solidFill>
-            <a:prstDash val="solid"/>
-          </a:ln>
-        </p:spPr>
-      </p:sp>
-      <p:sp>
-        <p:nvSpPr>
-          <p:cNvPr id="8" name="Text 6"/>
-          <p:cNvSpPr txBox="1"/>
-          <p:nvPr/>
-        </p:nvSpPr>
-        <p:spPr>
-          <a:xfrm>
-            <a:off x="6510528" y="1892808"/>
-            <a:ext cx="4800600" cy="365760"/>
-          </a:xfrm>
-          <a:prstGeom prst="rect">
-            <a:avLst/>
-          </a:prstGeom>
-          <a:noFill/>
-          <a:ln/>
-        </p:spPr>
-        <p:txBody>
-          <a:bodyPr wrap="square" lIns="0" tIns="0" rIns="0" bIns="0" rtlCol="0" anchor="ctr"/>
-          <a:lstStyle/>
-          <a:p>
-            <a:pPr indent="0" marL="0">
-              <a:buNone/>
-            </a:pPr>
-            <a:r>
-              <a:rPr lang="en-US" sz="1600" b="1" dirty="0">
-                <a:solidFill>
-                  <a:srgbClr val="0F4C43"/>
-                </a:solidFill>
-                <a:latin typeface="Calibri" pitchFamily="34" charset="0"/>
-                <a:ea typeface="Calibri" pitchFamily="34" charset="-122"/>
-                <a:cs typeface="Calibri" pitchFamily="34" charset="-120"/>
-              </a:rPr>
-              <a:t>The checks confirm naming, not application</a:t>
-            </a:r>
-            <a:endParaRPr lang="en-US" sz="1600" dirty="0"/>
-          </a:p>
-        </p:txBody>
-      </p:sp>
-      <p:sp>
-        <p:nvSpPr>
-          <p:cNvPr id="9" name="Text 7"/>
-          <p:cNvSpPr txBox="1"/>
-          <p:nvPr/>
-        </p:nvSpPr>
-        <p:spPr>
-          <a:xfrm>
-            <a:off x="6510528" y="2331720"/>
-            <a:ext cx="4800600" cy="1143000"/>
-          </a:xfrm>
-          <a:prstGeom prst="rect">
-            <a:avLst/>
-          </a:prstGeom>
-          <a:noFill/>
-          <a:ln/>
-        </p:spPr>
-        <p:txBody>
-          <a:bodyPr wrap="square" lIns="0" tIns="0" rIns="0" bIns="0" rtlCol="0" anchor="t"/>
-          <a:lstStyle/>
-          <a:p>
-            <a:pPr indent="0" marL="0">
-              <a:buNone/>
-            </a:pPr>
-            <a:r>
-              <a:rPr lang="en-US" sz="1200" dirty="0">
+              <a:t>The design is the investigator's decision.</a:t>
+            </a:r>
+            <a:endParaRPr lang="en-US" sz="1050" dirty="0"/>
+          </a:p>
+          <a:p>
+            <a:pPr indent="0" marL="0">
+              <a:spcAft>
+                <a:spcPts val="600"/>
+              </a:spcAft>
+              <a:buNone/>
+            </a:pPr>
+            <a:r>
+              <a:rPr lang="en-US" sz="1050" dirty="0">
                 <a:solidFill>
                   <a:srgbClr val="16202B"/>
                 </a:solidFill>
@@ -2337,244 +2662,28 @@
                 <a:ea typeface="Calibri" pitchFamily="34" charset="-122"/>
                 <a:cs typeface="Calibri" pitchFamily="34" charset="-120"/>
               </a:rPr>
-              <a:t>They confirm a plan named the right method. They cannot confirm it was applied correctly, that its assumptions hold, or that the plan is good. No rule covers interim analyses or alpha spending.</a:t>
-            </a:r>
-            <a:endParaRPr lang="en-US" sz="1200" dirty="0"/>
-          </a:p>
-        </p:txBody>
-      </p:sp>
-      <p:sp>
-        <p:nvSpPr>
-          <p:cNvPr id="10" name="Shape 8"/>
-          <p:cNvSpPr/>
-          <p:nvPr/>
-        </p:nvSpPr>
-        <p:spPr>
-          <a:xfrm>
-            <a:off x="566928" y="3794760"/>
-            <a:ext cx="5349240" cy="1920240"/>
-          </a:xfrm>
-          <a:prstGeom prst="rect">
-            <a:avLst/>
-          </a:prstGeom>
-          <a:solidFill>
-            <a:srgbClr val="EEF3F2"/>
-          </a:solidFill>
-          <a:ln w="12700">
-            <a:solidFill>
-              <a:srgbClr val="EEF3F2"/>
-            </a:solidFill>
-            <a:prstDash val="solid"/>
-          </a:ln>
-        </p:spPr>
-      </p:sp>
-      <p:sp>
-        <p:nvSpPr>
-          <p:cNvPr id="11" name="Text 9"/>
-          <p:cNvSpPr txBox="1"/>
-          <p:nvPr/>
-        </p:nvSpPr>
-        <p:spPr>
-          <a:xfrm>
-            <a:off x="841248" y="3995928"/>
-            <a:ext cx="4800600" cy="365760"/>
-          </a:xfrm>
-          <a:prstGeom prst="rect">
-            <a:avLst/>
-          </a:prstGeom>
-          <a:noFill/>
-          <a:ln/>
-        </p:spPr>
-        <p:txBody>
-          <a:bodyPr wrap="square" lIns="0" tIns="0" rIns="0" bIns="0" rtlCol="0" anchor="ctr"/>
-          <a:lstStyle/>
-          <a:p>
-            <a:pPr indent="0" marL="0">
-              <a:buNone/>
-            </a:pPr>
-            <a:r>
-              <a:rPr lang="en-US" sz="1600" b="1" dirty="0">
-                <a:solidFill>
-                  <a:srgbClr val="0F4C43"/>
-                </a:solidFill>
-                <a:latin typeface="Calibri" pitchFamily="34" charset="0"/>
-                <a:ea typeface="Calibri" pitchFamily="34" charset="-122"/>
-                <a:cs typeface="Calibri" pitchFamily="34" charset="-120"/>
-              </a:rPr>
-              <a:t>No independent evaluation</a:t>
-            </a:r>
-            <a:endParaRPr lang="en-US" sz="1600" dirty="0"/>
-          </a:p>
-        </p:txBody>
-      </p:sp>
-      <p:sp>
-        <p:nvSpPr>
-          <p:cNvPr id="12" name="Text 10"/>
-          <p:cNvSpPr txBox="1"/>
-          <p:nvPr/>
-        </p:nvSpPr>
-        <p:spPr>
-          <a:xfrm>
-            <a:off x="841248" y="4434840"/>
-            <a:ext cx="4800600" cy="1143000"/>
-          </a:xfrm>
-          <a:prstGeom prst="rect">
-            <a:avLst/>
-          </a:prstGeom>
-          <a:noFill/>
-          <a:ln/>
-        </p:spPr>
-        <p:txBody>
-          <a:bodyPr wrap="square" lIns="0" tIns="0" rIns="0" bIns="0" rtlCol="0" anchor="t"/>
-          <a:lstStyle/>
-          <a:p>
-            <a:pPr indent="0" marL="0">
-              <a:buNone/>
-            </a:pPr>
-            <a:r>
-              <a:rPr lang="en-US" sz="1200" dirty="0">
-                <a:solidFill>
-                  <a:srgbClr val="16202B"/>
-                </a:solidFill>
-                <a:latin typeface="Calibri" pitchFamily="34" charset="0"/>
-                <a:ea typeface="Calibri" pitchFamily="34" charset="-122"/>
-                <a:cs typeface="Calibri" pitchFamily="34" charset="-120"/>
-              </a:rPr>
-              <a:t>The evaluation was run by the person who built the tool, on scenarios he chose. There is no outcome evidence that studies planned with it are better studies. A September evaluation record measured the write-up step failing on about half of eight attempts.</a:t>
-            </a:r>
-            <a:endParaRPr lang="en-US" sz="1200" dirty="0"/>
-          </a:p>
-        </p:txBody>
-      </p:sp>
-      <p:sp>
-        <p:nvSpPr>
-          <p:cNvPr id="13" name="Shape 11"/>
-          <p:cNvSpPr/>
-          <p:nvPr/>
-        </p:nvSpPr>
-        <p:spPr>
-          <a:xfrm>
-            <a:off x="6236208" y="3794760"/>
-            <a:ext cx="5349240" cy="1920240"/>
-          </a:xfrm>
-          <a:prstGeom prst="rect">
-            <a:avLst/>
-          </a:prstGeom>
-          <a:solidFill>
-            <a:srgbClr val="EEF3F2"/>
-          </a:solidFill>
-          <a:ln w="12700">
-            <a:solidFill>
-              <a:srgbClr val="EEF3F2"/>
-            </a:solidFill>
-            <a:prstDash val="solid"/>
-          </a:ln>
-        </p:spPr>
-      </p:sp>
-      <p:sp>
-        <p:nvSpPr>
-          <p:cNvPr id="14" name="Text 12"/>
-          <p:cNvSpPr txBox="1"/>
-          <p:nvPr/>
-        </p:nvSpPr>
-        <p:spPr>
-          <a:xfrm>
-            <a:off x="6510528" y="3995928"/>
-            <a:ext cx="4800600" cy="365760"/>
-          </a:xfrm>
-          <a:prstGeom prst="rect">
-            <a:avLst/>
-          </a:prstGeom>
-          <a:noFill/>
-          <a:ln/>
-        </p:spPr>
-        <p:txBody>
-          <a:bodyPr wrap="square" lIns="0" tIns="0" rIns="0" bIns="0" rtlCol="0" anchor="ctr"/>
-          <a:lstStyle/>
-          <a:p>
-            <a:pPr indent="0" marL="0">
-              <a:buNone/>
-            </a:pPr>
-            <a:r>
-              <a:rPr lang="en-US" sz="1600" b="1" dirty="0">
-                <a:solidFill>
-                  <a:srgbClr val="0F4C43"/>
-                </a:solidFill>
-                <a:latin typeface="Calibri" pitchFamily="34" charset="0"/>
-                <a:ea typeface="Calibri" pitchFamily="34" charset="-122"/>
-                <a:cs typeface="Calibri" pitchFamily="34" charset="-120"/>
-              </a:rPr>
-              <a:t>Code and citations are drafts</a:t>
-            </a:r>
-            <a:endParaRPr lang="en-US" sz="1600" dirty="0"/>
-          </a:p>
-        </p:txBody>
-      </p:sp>
-      <p:sp>
-        <p:nvSpPr>
-          <p:cNvPr id="15" name="Text 13"/>
-          <p:cNvSpPr txBox="1"/>
-          <p:nvPr/>
-        </p:nvSpPr>
-        <p:spPr>
-          <a:xfrm>
-            <a:off x="6510528" y="4434840"/>
-            <a:ext cx="4800600" cy="1143000"/>
-          </a:xfrm>
-          <a:prstGeom prst="rect">
-            <a:avLst/>
-          </a:prstGeom>
-          <a:noFill/>
-          <a:ln/>
-        </p:spPr>
-        <p:txBody>
-          <a:bodyPr wrap="square" lIns="0" tIns="0" rIns="0" bIns="0" rtlCol="0" anchor="t"/>
-          <a:lstStyle/>
-          <a:p>
-            <a:pPr indent="0" marL="0">
-              <a:buNone/>
-            </a:pPr>
-            <a:r>
-              <a:rPr lang="en-US" sz="1200" dirty="0">
-                <a:solidFill>
-                  <a:srgbClr val="16202B"/>
-                </a:solidFill>
-                <a:latin typeface="Calibri" pitchFamily="34" charset="0"/>
-                <a:ea typeface="Calibri" pitchFamily="34" charset="-122"/>
-                <a:cs typeface="Calibri" pitchFamily="34" charset="-120"/>
-              </a:rPr>
-              <a:t>Generated code is never executed, and every export says so. A reference is verified as a PubMed record, not as a claim: the investigator must confirm it supports the use.</a:t>
-            </a:r>
-            <a:endParaRPr lang="en-US" sz="1200" dirty="0"/>
-          </a:p>
-        </p:txBody>
-      </p:sp>
-      <p:sp>
-        <p:nvSpPr>
-          <p:cNvPr id="16" name="Text 14"/>
-          <p:cNvSpPr txBox="1"/>
-          <p:nvPr/>
-        </p:nvSpPr>
-        <p:spPr>
-          <a:xfrm>
-            <a:off x="566928" y="5943600"/>
-            <a:ext cx="10972800" cy="457200"/>
-          </a:xfrm>
-          <a:prstGeom prst="rect">
-            <a:avLst/>
-          </a:prstGeom>
-          <a:noFill/>
-          <a:ln/>
-        </p:spPr>
-        <p:txBody>
-          <a:bodyPr wrap="square" lIns="0" tIns="0" rIns="0" bIns="0" rtlCol="0" anchor="ctr"/>
-          <a:lstStyle/>
-          <a:p>
-            <a:pPr indent="0" marL="0">
-              <a:buNone/>
-            </a:pPr>
-            <a:r>
-              <a:rPr lang="en-US" sz="1200" dirty="0">
+              <a:t>The brief is drafted and reviewed, its conditions are appended as feasibility rows, and the investigator picks the design and confirms the gate. Nothing downstream can generate until this gate is confirmed.</a:t>
+            </a:r>
+            <a:endParaRPr lang="en-US" sz="1050" dirty="0"/>
+          </a:p>
+          <a:p>
+            <a:pPr indent="0" marL="0">
+              <a:spcAft>
+                <a:spcPts val="600"/>
+              </a:spcAft>
+              <a:buNone/>
+            </a:pPr>
+            <a:endParaRPr lang="en-US" sz="1050" dirty="0"/>
+          </a:p>
+          <a:p>
+            <a:pPr indent="0" marL="0">
+              <a:spcAft>
+                <a:spcPts val="600"/>
+              </a:spcAft>
+              <a:buNone/>
+            </a:pPr>
+            <a:r>
+              <a:rPr lang="en-US" sz="1050" dirty="0">
                 <a:solidFill>
                   <a:srgbClr val="5A6B7A"/>
                 </a:solidFill>
@@ -2582,9 +2691,9 @@
                 <a:ea typeface="Calibri" pitchFamily="34" charset="-122"/>
                 <a:cs typeface="Calibri" pitchFamily="34" charset="-120"/>
               </a:rPr>
-              <a:t>The product's own methods page lists what it refuses: IRB determinations, final interpretation of results, a sample size it cannot justify, replacing collaborators, writing citations from memory.</a:t>
-            </a:r>
-            <a:endParaRPr lang="en-US" sz="1200" dirty="0"/>
+              <a:t>Tags I1 to I11 mark investigator inputs and D1 to D11 decisions, in the order they are asked.</a:t>
+            </a:r>
+            <a:endParaRPr lang="en-US" sz="1050" dirty="0"/>
           </a:p>
         </p:txBody>
       </p:sp>
@@ -2599,6 +2708,2978 @@
 <file path=ppt/slides/slide11.xml><?xml version="1.0" encoding="utf-8"?>
 <p:sld xmlns:a="http://schemas.openxmlformats.org/drawingml/2006/main" xmlns:r="http://schemas.openxmlformats.org/officeDocument/2006/relationships" xmlns:p="http://schemas.openxmlformats.org/presentationml/2006/main">
   <p:cSld name="Slide 11">
+    <p:bg>
+      <p:bgPr>
+        <a:solidFill>
+          <a:srgbClr val="FFFFFF"/>
+        </a:solidFill>
+      </p:bgPr>
+    </p:bg>
+    <p:spTree>
+      <p:nvGrpSpPr>
+        <p:cNvPr id="1" name=""/>
+        <p:cNvGrpSpPr/>
+        <p:nvPr/>
+      </p:nvGrpSpPr>
+      <p:grpSpPr>
+        <a:xfrm>
+          <a:off x="0" y="0"/>
+          <a:ext cx="0" cy="0"/>
+          <a:chOff x="0" y="0"/>
+          <a:chExt cx="0" cy="0"/>
+        </a:xfrm>
+      </p:grpSpPr>
+      <p:sp>
+        <p:nvSpPr>
+          <p:cNvPr id="2" name="Text 0"/>
+          <p:cNvSpPr txBox="1"/>
+          <p:nvPr/>
+        </p:nvSpPr>
+        <p:spPr>
+          <a:xfrm>
+            <a:off x="566928" y="384048"/>
+            <a:ext cx="10881360" cy="658368"/>
+          </a:xfrm>
+          <a:prstGeom prst="rect">
+            <a:avLst/>
+          </a:prstGeom>
+          <a:noFill/>
+          <a:ln/>
+        </p:spPr>
+        <p:txBody>
+          <a:bodyPr wrap="square" lIns="0" tIns="0" rIns="0" bIns="0" rtlCol="0" anchor="ctr"/>
+          <a:lstStyle/>
+          <a:p>
+            <a:pPr indent="0" marL="0">
+              <a:buNone/>
+            </a:pPr>
+            <a:r>
+              <a:rPr lang="en-US" sz="3400" b="1" dirty="0">
+                <a:solidFill>
+                  <a:srgbClr val="16202B"/>
+                </a:solidFill>
+                <a:latin typeface="Cambria" pitchFamily="34" charset="0"/>
+                <a:ea typeface="Cambria" pitchFamily="34" charset="-122"/>
+                <a:cs typeface="Cambria" pitchFamily="34" charset="-120"/>
+              </a:rPr>
+              <a:t>Process map 4 of 6: build the study, draft the analyses</a:t>
+            </a:r>
+            <a:endParaRPr lang="en-US" sz="3400" dirty="0"/>
+          </a:p>
+        </p:txBody>
+      </p:sp>
+      <p:sp>
+        <p:nvSpPr>
+          <p:cNvPr id="3" name="Text 1"/>
+          <p:cNvSpPr txBox="1"/>
+          <p:nvPr/>
+        </p:nvSpPr>
+        <p:spPr>
+          <a:xfrm>
+            <a:off x="566928" y="1060704"/>
+            <a:ext cx="10881360" cy="365760"/>
+          </a:xfrm>
+          <a:prstGeom prst="rect">
+            <a:avLst/>
+          </a:prstGeom>
+          <a:noFill/>
+          <a:ln/>
+        </p:spPr>
+        <p:txBody>
+          <a:bodyPr wrap="square" lIns="0" tIns="0" rIns="0" bIns="0" rtlCol="0" anchor="ctr"/>
+          <a:lstStyle/>
+          <a:p>
+            <a:pPr indent="0" marL="0">
+              <a:buNone/>
+            </a:pPr>
+            <a:r>
+              <a:rPr lang="en-US" sz="1500" dirty="0">
+                <a:solidFill>
+                  <a:srgbClr val="5A6B7A"/>
+                </a:solidFill>
+                <a:latin typeface="Calibri" pitchFamily="34" charset="0"/>
+                <a:ea typeface="Calibri" pitchFamily="34" charset="-122"/>
+                <a:cs typeface="Calibri" pitchFamily="34" charset="-120"/>
+              </a:rPr>
+              <a:t>Parallelogram = investigator input · diamond = decision · rectangle = process · numbered circle = continues on the next panel</a:t>
+            </a:r>
+            <a:endParaRPr lang="en-US" sz="1500" dirty="0"/>
+          </a:p>
+        </p:txBody>
+      </p:sp>
+      <p:pic>
+        <p:nvPicPr>
+          <p:cNvPr id="4" name="Image 0" descr="panelD.png">    </p:cNvPr>
+          <p:cNvPicPr>
+            <a:picLocks noChangeAspect="1"/>
+          </p:cNvPicPr>
+          <p:nvPr/>
+        </p:nvPicPr>
+        <p:blipFill>
+          <a:blip r:embed="rId1"/>
+          <a:stretch>
+            <a:fillRect/>
+          </a:stretch>
+        </p:blipFill>
+        <p:spPr>
+          <a:xfrm>
+            <a:off x="566928" y="1572768"/>
+            <a:ext cx="8430768" cy="4709160"/>
+          </a:xfrm>
+          <a:prstGeom prst="rect">
+            <a:avLst/>
+          </a:prstGeom>
+        </p:spPr>
+      </p:pic>
+      <p:sp>
+        <p:nvSpPr>
+          <p:cNvPr id="5" name="Text 2"/>
+          <p:cNvSpPr txBox="1"/>
+          <p:nvPr/>
+        </p:nvSpPr>
+        <p:spPr>
+          <a:xfrm>
+            <a:off x="10149840" y="1600200"/>
+            <a:ext cx="1737360" cy="4846320"/>
+          </a:xfrm>
+          <a:prstGeom prst="rect">
+            <a:avLst/>
+          </a:prstGeom>
+          <a:noFill/>
+          <a:ln/>
+        </p:spPr>
+        <p:txBody>
+          <a:bodyPr wrap="square" lIns="0" tIns="0" rIns="0" bIns="0" rtlCol="0" anchor="t"/>
+          <a:lstStyle/>
+          <a:p>
+            <a:pPr indent="0" marL="0">
+              <a:spcAft>
+                <a:spcPts val="600"/>
+              </a:spcAft>
+              <a:buNone/>
+            </a:pPr>
+            <a:r>
+              <a:rPr lang="en-US" sz="1050" b="1" dirty="0">
+                <a:solidFill>
+                  <a:srgbClr val="16202B"/>
+                </a:solidFill>
+                <a:latin typeface="Calibri" pitchFamily="34" charset="0"/>
+                <a:ea typeface="Calibri" pitchFamily="34" charset="-122"/>
+                <a:cs typeface="Calibri" pitchFamily="34" charset="-120"/>
+              </a:rPr>
+              <a:t>Two separate presses, one plan credit.</a:t>
+            </a:r>
+            <a:endParaRPr lang="en-US" sz="1050" dirty="0"/>
+          </a:p>
+          <a:p>
+            <a:pPr indent="0" marL="0">
+              <a:spcAft>
+                <a:spcPts val="600"/>
+              </a:spcAft>
+              <a:buNone/>
+            </a:pPr>
+            <a:r>
+              <a:rPr lang="en-US" sz="1050" dirty="0">
+                <a:solidFill>
+                  <a:srgbClr val="16202B"/>
+                </a:solidFill>
+                <a:latin typeface="Calibri" pitchFamily="34" charset="0"/>
+                <a:ea typeface="Calibri" pitchFamily="34" charset="-122"/>
+                <a:cs typeface="Calibri" pitchFamily="34" charset="-120"/>
+              </a:rPr>
+              <a:t>Build study spends the plan credit and runs the deterministic sizing calculators. Draft analyses is a second press, and the analysis brief gets both the model review and the deterministic checks.</a:t>
+            </a:r>
+            <a:endParaRPr lang="en-US" sz="1050" dirty="0"/>
+          </a:p>
+          <a:p>
+            <a:pPr indent="0" marL="0">
+              <a:spcAft>
+                <a:spcPts val="600"/>
+              </a:spcAft>
+              <a:buNone/>
+            </a:pPr>
+            <a:endParaRPr lang="en-US" sz="1050" dirty="0"/>
+          </a:p>
+          <a:p>
+            <a:pPr indent="0" marL="0">
+              <a:spcAft>
+                <a:spcPts val="600"/>
+              </a:spcAft>
+              <a:buNone/>
+            </a:pPr>
+            <a:r>
+              <a:rPr lang="en-US" sz="1050" dirty="0">
+                <a:solidFill>
+                  <a:srgbClr val="5A6B7A"/>
+                </a:solidFill>
+                <a:latin typeface="Calibri" pitchFamily="34" charset="0"/>
+                <a:ea typeface="Calibri" pitchFamily="34" charset="-122"/>
+                <a:cs typeface="Calibri" pitchFamily="34" charset="-120"/>
+              </a:rPr>
+              <a:t>Tags I1 to I11 mark investigator inputs and D1 to D11 decisions, in the order they are asked.</a:t>
+            </a:r>
+            <a:endParaRPr lang="en-US" sz="1050" dirty="0"/>
+          </a:p>
+        </p:txBody>
+      </p:sp>
+    </p:spTree>
+  </p:cSld>
+  <p:clrMapOvr>
+    <a:masterClrMapping/>
+  </p:clrMapOvr>
+</p:sld>
+</file>
+
+<file path=ppt/slides/slide12.xml><?xml version="1.0" encoding="utf-8"?>
+<p:sld xmlns:a="http://schemas.openxmlformats.org/drawingml/2006/main" xmlns:r="http://schemas.openxmlformats.org/officeDocument/2006/relationships" xmlns:p="http://schemas.openxmlformats.org/presentationml/2006/main">
+  <p:cSld name="Slide 12">
+    <p:bg>
+      <p:bgPr>
+        <a:solidFill>
+          <a:srgbClr val="FFFFFF"/>
+        </a:solidFill>
+      </p:bgPr>
+    </p:bg>
+    <p:spTree>
+      <p:nvGrpSpPr>
+        <p:cNvPr id="1" name=""/>
+        <p:cNvGrpSpPr/>
+        <p:nvPr/>
+      </p:nvGrpSpPr>
+      <p:grpSpPr>
+        <a:xfrm>
+          <a:off x="0" y="0"/>
+          <a:ext cx="0" cy="0"/>
+          <a:chOff x="0" y="0"/>
+          <a:chExt cx="0" cy="0"/>
+        </a:xfrm>
+      </p:grpSpPr>
+      <p:sp>
+        <p:nvSpPr>
+          <p:cNvPr id="2" name="Text 0"/>
+          <p:cNvSpPr txBox="1"/>
+          <p:nvPr/>
+        </p:nvSpPr>
+        <p:spPr>
+          <a:xfrm>
+            <a:off x="566928" y="384048"/>
+            <a:ext cx="10881360" cy="658368"/>
+          </a:xfrm>
+          <a:prstGeom prst="rect">
+            <a:avLst/>
+          </a:prstGeom>
+          <a:noFill/>
+          <a:ln/>
+        </p:spPr>
+        <p:txBody>
+          <a:bodyPr wrap="square" lIns="0" tIns="0" rIns="0" bIns="0" rtlCol="0" anchor="ctr"/>
+          <a:lstStyle/>
+          <a:p>
+            <a:pPr indent="0" marL="0">
+              <a:buNone/>
+            </a:pPr>
+            <a:r>
+              <a:rPr lang="en-US" sz="3400" b="1" dirty="0">
+                <a:solidFill>
+                  <a:srgbClr val="16202B"/>
+                </a:solidFill>
+                <a:latin typeface="Cambria" pitchFamily="34" charset="0"/>
+                <a:ea typeface="Cambria" pitchFamily="34" charset="-122"/>
+                <a:cs typeface="Cambria" pitchFamily="34" charset="-120"/>
+              </a:rPr>
+              <a:t>Process map 5 of 6: shared decisions and revision</a:t>
+            </a:r>
+            <a:endParaRPr lang="en-US" sz="3400" dirty="0"/>
+          </a:p>
+        </p:txBody>
+      </p:sp>
+      <p:sp>
+        <p:nvSpPr>
+          <p:cNvPr id="3" name="Text 1"/>
+          <p:cNvSpPr txBox="1"/>
+          <p:nvPr/>
+        </p:nvSpPr>
+        <p:spPr>
+          <a:xfrm>
+            <a:off x="566928" y="1060704"/>
+            <a:ext cx="10881360" cy="365760"/>
+          </a:xfrm>
+          <a:prstGeom prst="rect">
+            <a:avLst/>
+          </a:prstGeom>
+          <a:noFill/>
+          <a:ln/>
+        </p:spPr>
+        <p:txBody>
+          <a:bodyPr wrap="square" lIns="0" tIns="0" rIns="0" bIns="0" rtlCol="0" anchor="ctr"/>
+          <a:lstStyle/>
+          <a:p>
+            <a:pPr indent="0" marL="0">
+              <a:buNone/>
+            </a:pPr>
+            <a:r>
+              <a:rPr lang="en-US" sz="1500" dirty="0">
+                <a:solidFill>
+                  <a:srgbClr val="5A6B7A"/>
+                </a:solidFill>
+                <a:latin typeface="Calibri" pitchFamily="34" charset="0"/>
+                <a:ea typeface="Calibri" pitchFamily="34" charset="-122"/>
+                <a:cs typeface="Calibri" pitchFamily="34" charset="-120"/>
+              </a:rPr>
+              <a:t>Parallelogram = investigator input · diamond = decision · rectangle = process · numbered circle = continues on the next panel</a:t>
+            </a:r>
+            <a:endParaRPr lang="en-US" sz="1500" dirty="0"/>
+          </a:p>
+        </p:txBody>
+      </p:sp>
+      <p:pic>
+        <p:nvPicPr>
+          <p:cNvPr id="4" name="Image 0" descr="panelE.png">    </p:cNvPr>
+          <p:cNvPicPr>
+            <a:picLocks noChangeAspect="1"/>
+          </p:cNvPicPr>
+          <p:nvPr/>
+        </p:nvPicPr>
+        <p:blipFill>
+          <a:blip r:embed="rId1"/>
+          <a:stretch>
+            <a:fillRect/>
+          </a:stretch>
+        </p:blipFill>
+        <p:spPr>
+          <a:xfrm>
+            <a:off x="566928" y="1572768"/>
+            <a:ext cx="8622792" cy="4709160"/>
+          </a:xfrm>
+          <a:prstGeom prst="rect">
+            <a:avLst/>
+          </a:prstGeom>
+        </p:spPr>
+      </p:pic>
+      <p:sp>
+        <p:nvSpPr>
+          <p:cNvPr id="5" name="Text 2"/>
+          <p:cNvSpPr txBox="1"/>
+          <p:nvPr/>
+        </p:nvSpPr>
+        <p:spPr>
+          <a:xfrm>
+            <a:off x="10149840" y="1600200"/>
+            <a:ext cx="1737360" cy="4846320"/>
+          </a:xfrm>
+          <a:prstGeom prst="rect">
+            <a:avLst/>
+          </a:prstGeom>
+          <a:noFill/>
+          <a:ln/>
+        </p:spPr>
+        <p:txBody>
+          <a:bodyPr wrap="square" lIns="0" tIns="0" rIns="0" bIns="0" rtlCol="0" anchor="t"/>
+          <a:lstStyle/>
+          <a:p>
+            <a:pPr indent="0" marL="0">
+              <a:spcAft>
+                <a:spcPts val="600"/>
+              </a:spcAft>
+              <a:buNone/>
+            </a:pPr>
+            <a:r>
+              <a:rPr lang="en-US" sz="1050" b="1" dirty="0">
+                <a:solidFill>
+                  <a:srgbClr val="16202B"/>
+                </a:solidFill>
+                <a:latin typeface="Calibri" pitchFamily="34" charset="0"/>
+                <a:ea typeface="Calibri" pitchFamily="34" charset="-122"/>
+                <a:cs typeface="Calibri" pitchFamily="34" charset="-120"/>
+              </a:rPr>
+              <a:t>Revision is previewed, not silent.</a:t>
+            </a:r>
+            <a:endParaRPr lang="en-US" sz="1050" dirty="0"/>
+          </a:p>
+          <a:p>
+            <a:pPr indent="0" marL="0">
+              <a:spcAft>
+                <a:spcPts val="600"/>
+              </a:spcAft>
+              <a:buNone/>
+            </a:pPr>
+            <a:r>
+              <a:rPr lang="en-US" sz="1050" dirty="0">
+                <a:solidFill>
+                  <a:srgbClr val="16202B"/>
+                </a:solidFill>
+                <a:latin typeface="Calibri" pitchFamily="34" charset="0"/>
+                <a:ea typeface="Calibri" pitchFamily="34" charset="-122"/>
+                <a:cs typeface="Calibri" pitchFamily="34" charset="-120"/>
+              </a:rPr>
+              <a:t>Multiplicity and counts are investigator decisions. An edit shows its impact, affected work is marked stale, an update regenerates only that work, and the result waits for acceptance or discard.</a:t>
+            </a:r>
+            <a:endParaRPr lang="en-US" sz="1050" dirty="0"/>
+          </a:p>
+          <a:p>
+            <a:pPr indent="0" marL="0">
+              <a:spcAft>
+                <a:spcPts val="600"/>
+              </a:spcAft>
+              <a:buNone/>
+            </a:pPr>
+            <a:endParaRPr lang="en-US" sz="1050" dirty="0"/>
+          </a:p>
+          <a:p>
+            <a:pPr indent="0" marL="0">
+              <a:spcAft>
+                <a:spcPts val="600"/>
+              </a:spcAft>
+              <a:buNone/>
+            </a:pPr>
+            <a:r>
+              <a:rPr lang="en-US" sz="1050" dirty="0">
+                <a:solidFill>
+                  <a:srgbClr val="5A6B7A"/>
+                </a:solidFill>
+                <a:latin typeface="Calibri" pitchFamily="34" charset="0"/>
+                <a:ea typeface="Calibri" pitchFamily="34" charset="-122"/>
+                <a:cs typeface="Calibri" pitchFamily="34" charset="-120"/>
+              </a:rPr>
+              <a:t>Tags I1 to I11 mark investigator inputs and D1 to D11 decisions, in the order they are asked.</a:t>
+            </a:r>
+            <a:endParaRPr lang="en-US" sz="1050" dirty="0"/>
+          </a:p>
+        </p:txBody>
+      </p:sp>
+    </p:spTree>
+  </p:cSld>
+  <p:clrMapOvr>
+    <a:masterClrMapping/>
+  </p:clrMapOvr>
+</p:sld>
+</file>
+
+<file path=ppt/slides/slide13.xml><?xml version="1.0" encoding="utf-8"?>
+<p:sld xmlns:a="http://schemas.openxmlformats.org/drawingml/2006/main" xmlns:r="http://schemas.openxmlformats.org/officeDocument/2006/relationships" xmlns:p="http://schemas.openxmlformats.org/presentationml/2006/main">
+  <p:cSld name="Slide 13">
+    <p:bg>
+      <p:bgPr>
+        <a:solidFill>
+          <a:srgbClr val="FFFFFF"/>
+        </a:solidFill>
+      </p:bgPr>
+    </p:bg>
+    <p:spTree>
+      <p:nvGrpSpPr>
+        <p:cNvPr id="1" name=""/>
+        <p:cNvGrpSpPr/>
+        <p:nvPr/>
+      </p:nvGrpSpPr>
+      <p:grpSpPr>
+        <a:xfrm>
+          <a:off x="0" y="0"/>
+          <a:ext cx="0" cy="0"/>
+          <a:chOff x="0" y="0"/>
+          <a:chExt cx="0" cy="0"/>
+        </a:xfrm>
+      </p:grpSpPr>
+      <p:sp>
+        <p:nvSpPr>
+          <p:cNvPr id="2" name="Text 0"/>
+          <p:cNvSpPr txBox="1"/>
+          <p:nvPr/>
+        </p:nvSpPr>
+        <p:spPr>
+          <a:xfrm>
+            <a:off x="566928" y="384048"/>
+            <a:ext cx="10881360" cy="658368"/>
+          </a:xfrm>
+          <a:prstGeom prst="rect">
+            <a:avLst/>
+          </a:prstGeom>
+          <a:noFill/>
+          <a:ln/>
+        </p:spPr>
+        <p:txBody>
+          <a:bodyPr wrap="square" lIns="0" tIns="0" rIns="0" bIns="0" rtlCol="0" anchor="ctr"/>
+          <a:lstStyle/>
+          <a:p>
+            <a:pPr indent="0" marL="0">
+              <a:buNone/>
+            </a:pPr>
+            <a:r>
+              <a:rPr lang="en-US" sz="3400" b="1" dirty="0">
+                <a:solidFill>
+                  <a:srgbClr val="16202B"/>
+                </a:solidFill>
+                <a:latin typeface="Cambria" pitchFamily="34" charset="0"/>
+                <a:ea typeface="Cambria" pitchFamily="34" charset="-122"/>
+                <a:cs typeface="Cambria" pitchFamily="34" charset="-120"/>
+              </a:rPr>
+              <a:t>Process map 6 of 6: execution and finalisation</a:t>
+            </a:r>
+            <a:endParaRPr lang="en-US" sz="3400" dirty="0"/>
+          </a:p>
+        </p:txBody>
+      </p:sp>
+      <p:sp>
+        <p:nvSpPr>
+          <p:cNvPr id="3" name="Text 1"/>
+          <p:cNvSpPr txBox="1"/>
+          <p:nvPr/>
+        </p:nvSpPr>
+        <p:spPr>
+          <a:xfrm>
+            <a:off x="566928" y="1060704"/>
+            <a:ext cx="10881360" cy="365760"/>
+          </a:xfrm>
+          <a:prstGeom prst="rect">
+            <a:avLst/>
+          </a:prstGeom>
+          <a:noFill/>
+          <a:ln/>
+        </p:spPr>
+        <p:txBody>
+          <a:bodyPr wrap="square" lIns="0" tIns="0" rIns="0" bIns="0" rtlCol="0" anchor="ctr"/>
+          <a:lstStyle/>
+          <a:p>
+            <a:pPr indent="0" marL="0">
+              <a:buNone/>
+            </a:pPr>
+            <a:r>
+              <a:rPr lang="en-US" sz="1500" dirty="0">
+                <a:solidFill>
+                  <a:srgbClr val="5A6B7A"/>
+                </a:solidFill>
+                <a:latin typeface="Calibri" pitchFamily="34" charset="0"/>
+                <a:ea typeface="Calibri" pitchFamily="34" charset="-122"/>
+                <a:cs typeface="Calibri" pitchFamily="34" charset="-120"/>
+              </a:rPr>
+              <a:t>Parallelogram = investigator input · diamond = decision · rectangle = process · numbered circle = continues on the next panel</a:t>
+            </a:r>
+            <a:endParaRPr lang="en-US" sz="1500" dirty="0"/>
+          </a:p>
+        </p:txBody>
+      </p:sp>
+      <p:pic>
+        <p:nvPicPr>
+          <p:cNvPr id="4" name="Image 0" descr="panelF.png">    </p:cNvPr>
+          <p:cNvPicPr>
+            <a:picLocks noChangeAspect="1"/>
+          </p:cNvPicPr>
+          <p:nvPr/>
+        </p:nvPicPr>
+        <p:blipFill>
+          <a:blip r:embed="rId1"/>
+          <a:stretch>
+            <a:fillRect/>
+          </a:stretch>
+        </p:blipFill>
+        <p:spPr>
+          <a:xfrm>
+            <a:off x="566928" y="1572768"/>
+            <a:ext cx="8257032" cy="4709160"/>
+          </a:xfrm>
+          <a:prstGeom prst="rect">
+            <a:avLst/>
+          </a:prstGeom>
+        </p:spPr>
+      </p:pic>
+      <p:sp>
+        <p:nvSpPr>
+          <p:cNvPr id="5" name="Text 2"/>
+          <p:cNvSpPr txBox="1"/>
+          <p:nvPr/>
+        </p:nvSpPr>
+        <p:spPr>
+          <a:xfrm>
+            <a:off x="10149840" y="1600200"/>
+            <a:ext cx="1737360" cy="4846320"/>
+          </a:xfrm>
+          <a:prstGeom prst="rect">
+            <a:avLst/>
+          </a:prstGeom>
+          <a:noFill/>
+          <a:ln/>
+        </p:spPr>
+        <p:txBody>
+          <a:bodyPr wrap="square" lIns="0" tIns="0" rIns="0" bIns="0" rtlCol="0" anchor="t"/>
+          <a:lstStyle/>
+          <a:p>
+            <a:pPr indent="0" marL="0">
+              <a:spcAft>
+                <a:spcPts val="600"/>
+              </a:spcAft>
+              <a:buNone/>
+            </a:pPr>
+            <a:r>
+              <a:rPr lang="en-US" sz="1050" b="1" dirty="0">
+                <a:solidFill>
+                  <a:srgbClr val="16202B"/>
+                </a:solidFill>
+                <a:latin typeface="Calibri" pitchFamily="34" charset="0"/>
+                <a:ea typeface="Calibri" pitchFamily="34" charset="-122"/>
+                <a:cs typeface="Calibri" pitchFamily="34" charset="-120"/>
+              </a:rPr>
+              <a:t>Execution runs on request, and the export is gated.</a:t>
+            </a:r>
+            <a:endParaRPr lang="en-US" sz="1050" dirty="0"/>
+          </a:p>
+          <a:p>
+            <a:pPr indent="0" marL="0">
+              <a:spcAft>
+                <a:spcPts val="600"/>
+              </a:spcAft>
+              <a:buNone/>
+            </a:pPr>
+            <a:r>
+              <a:rPr lang="en-US" sz="1050" dirty="0">
+                <a:solidFill>
+                  <a:srgbClr val="16202B"/>
+                </a:solidFill>
+                <a:latin typeface="Calibri" pitchFamily="34" charset="0"/>
+                <a:ea typeface="Calibri" pitchFamily="34" charset="-122"/>
+                <a:cs typeface="Calibri" pitchFamily="34" charset="-120"/>
+              </a:rPr>
+              <a:t>Execution is a press, not an automatic step. The write-up and code follow, references are verified against PubMed, and the finalisation gate holds the export until every blocking finding is cleared.</a:t>
+            </a:r>
+            <a:endParaRPr lang="en-US" sz="1050" dirty="0"/>
+          </a:p>
+          <a:p>
+            <a:pPr indent="0" marL="0">
+              <a:spcAft>
+                <a:spcPts val="600"/>
+              </a:spcAft>
+              <a:buNone/>
+            </a:pPr>
+            <a:endParaRPr lang="en-US" sz="1050" dirty="0"/>
+          </a:p>
+          <a:p>
+            <a:pPr indent="0" marL="0">
+              <a:spcAft>
+                <a:spcPts val="600"/>
+              </a:spcAft>
+              <a:buNone/>
+            </a:pPr>
+            <a:r>
+              <a:rPr lang="en-US" sz="1050" dirty="0">
+                <a:solidFill>
+                  <a:srgbClr val="5A6B7A"/>
+                </a:solidFill>
+                <a:latin typeface="Calibri" pitchFamily="34" charset="0"/>
+                <a:ea typeface="Calibri" pitchFamily="34" charset="-122"/>
+                <a:cs typeface="Calibri" pitchFamily="34" charset="-120"/>
+              </a:rPr>
+              <a:t>Tags I1 to I11 mark investigator inputs and D1 to D11 decisions, in the order they are asked.</a:t>
+            </a:r>
+            <a:endParaRPr lang="en-US" sz="1050" dirty="0"/>
+          </a:p>
+        </p:txBody>
+      </p:sp>
+    </p:spTree>
+  </p:cSld>
+  <p:clrMapOvr>
+    <a:masterClrMapping/>
+  </p:clrMapOvr>
+</p:sld>
+</file>
+
+<file path=ppt/slides/slide14.xml><?xml version="1.0" encoding="utf-8"?>
+<p:sld xmlns:a="http://schemas.openxmlformats.org/drawingml/2006/main" xmlns:r="http://schemas.openxmlformats.org/officeDocument/2006/relationships" xmlns:p="http://schemas.openxmlformats.org/presentationml/2006/main">
+  <p:cSld name="Slide 14">
+    <p:bg>
+      <p:bgPr>
+        <a:solidFill>
+          <a:srgbClr val="FFFFFF"/>
+        </a:solidFill>
+      </p:bgPr>
+    </p:bg>
+    <p:spTree>
+      <p:nvGrpSpPr>
+        <p:cNvPr id="1" name=""/>
+        <p:cNvGrpSpPr/>
+        <p:nvPr/>
+      </p:nvGrpSpPr>
+      <p:grpSpPr>
+        <a:xfrm>
+          <a:off x="0" y="0"/>
+          <a:ext cx="0" cy="0"/>
+          <a:chOff x="0" y="0"/>
+          <a:chExt cx="0" cy="0"/>
+        </a:xfrm>
+      </p:grpSpPr>
+      <p:sp>
+        <p:nvSpPr>
+          <p:cNvPr id="2" name="Text 0"/>
+          <p:cNvSpPr txBox="1"/>
+          <p:nvPr/>
+        </p:nvSpPr>
+        <p:spPr>
+          <a:xfrm>
+            <a:off x="566928" y="384048"/>
+            <a:ext cx="10881360" cy="658368"/>
+          </a:xfrm>
+          <a:prstGeom prst="rect">
+            <a:avLst/>
+          </a:prstGeom>
+          <a:noFill/>
+          <a:ln/>
+        </p:spPr>
+        <p:txBody>
+          <a:bodyPr wrap="square" lIns="0" tIns="0" rIns="0" bIns="0" rtlCol="0" anchor="ctr"/>
+          <a:lstStyle/>
+          <a:p>
+            <a:pPr indent="0" marL="0">
+              <a:buNone/>
+            </a:pPr>
+            <a:r>
+              <a:rPr lang="en-US" sz="3400" b="1" dirty="0">
+                <a:solidFill>
+                  <a:srgbClr val="16202B"/>
+                </a:solidFill>
+                <a:latin typeface="Cambria" pitchFamily="34" charset="0"/>
+                <a:ea typeface="Cambria" pitchFamily="34" charset="-122"/>
+                <a:cs typeface="Cambria" pitchFamily="34" charset="-120"/>
+              </a:rPr>
+              <a:t>The eleven decisions an investigator makes</a:t>
+            </a:r>
+            <a:endParaRPr lang="en-US" sz="3400" dirty="0"/>
+          </a:p>
+        </p:txBody>
+      </p:sp>
+      <p:sp>
+        <p:nvSpPr>
+          <p:cNvPr id="3" name="Text 1"/>
+          <p:cNvSpPr txBox="1"/>
+          <p:nvPr/>
+        </p:nvSpPr>
+        <p:spPr>
+          <a:xfrm>
+            <a:off x="566928" y="1060704"/>
+            <a:ext cx="10881360" cy="365760"/>
+          </a:xfrm>
+          <a:prstGeom prst="rect">
+            <a:avLst/>
+          </a:prstGeom>
+          <a:noFill/>
+          <a:ln/>
+        </p:spPr>
+        <p:txBody>
+          <a:bodyPr wrap="square" lIns="0" tIns="0" rIns="0" bIns="0" rtlCol="0" anchor="ctr"/>
+          <a:lstStyle/>
+          <a:p>
+            <a:pPr indent="0" marL="0">
+              <a:buNone/>
+            </a:pPr>
+            <a:r>
+              <a:rPr lang="en-US" sz="1500" dirty="0">
+                <a:solidFill>
+                  <a:srgbClr val="5A6B7A"/>
+                </a:solidFill>
+                <a:latin typeface="Calibri" pitchFamily="34" charset="0"/>
+                <a:ea typeface="Calibri" pitchFamily="34" charset="-122"/>
+                <a:cs typeface="Calibri" pitchFamily="34" charset="-120"/>
+              </a:rPr>
+              <a:t>In the order they are asked, and who acts on each one next</a:t>
+            </a:r>
+            <a:endParaRPr lang="en-US" sz="1500" dirty="0"/>
+          </a:p>
+        </p:txBody>
+      </p:sp>
+      <p:sp>
+        <p:nvSpPr>
+          <p:cNvPr id="4" name="Shape 2"/>
+          <p:cNvSpPr/>
+          <p:nvPr/>
+        </p:nvSpPr>
+        <p:spPr>
+          <a:xfrm>
+            <a:off x="566928" y="1618488"/>
+            <a:ext cx="457200" cy="457200"/>
+          </a:xfrm>
+          <a:prstGeom prst="ellipse">
+            <a:avLst/>
+          </a:prstGeom>
+          <a:solidFill>
+            <a:srgbClr val="0F4C43"/>
+          </a:solidFill>
+          <a:ln w="12700">
+            <a:solidFill>
+              <a:srgbClr val="0F4C43"/>
+            </a:solidFill>
+            <a:prstDash val="solid"/>
+          </a:ln>
+        </p:spPr>
+      </p:sp>
+      <p:sp>
+        <p:nvSpPr>
+          <p:cNvPr id="5" name="Text 3"/>
+          <p:cNvSpPr txBox="1"/>
+          <p:nvPr/>
+        </p:nvSpPr>
+        <p:spPr>
+          <a:xfrm>
+            <a:off x="566928" y="1618488"/>
+            <a:ext cx="457200" cy="457200"/>
+          </a:xfrm>
+          <a:prstGeom prst="rect">
+            <a:avLst/>
+          </a:prstGeom>
+          <a:noFill/>
+          <a:ln/>
+        </p:spPr>
+        <p:txBody>
+          <a:bodyPr wrap="square" lIns="0" tIns="0" rIns="0" bIns="0" rtlCol="0" anchor="ctr"/>
+          <a:lstStyle/>
+          <a:p>
+            <a:pPr algn="ctr" indent="0" marL="0">
+              <a:buNone/>
+            </a:pPr>
+            <a:r>
+              <a:rPr lang="en-US" sz="1000" b="1" dirty="0">
+                <a:solidFill>
+                  <a:srgbClr val="FFFFFF"/>
+                </a:solidFill>
+                <a:latin typeface="Calibri" pitchFamily="34" charset="0"/>
+                <a:ea typeface="Calibri" pitchFamily="34" charset="-122"/>
+                <a:cs typeface="Calibri" pitchFamily="34" charset="-120"/>
+              </a:rPr>
+              <a:t>D1</a:t>
+            </a:r>
+            <a:endParaRPr lang="en-US" sz="1000" dirty="0"/>
+          </a:p>
+        </p:txBody>
+      </p:sp>
+      <p:sp>
+        <p:nvSpPr>
+          <p:cNvPr id="6" name="Text 4"/>
+          <p:cNvSpPr txBox="1"/>
+          <p:nvPr/>
+        </p:nvSpPr>
+        <p:spPr>
+          <a:xfrm>
+            <a:off x="1161288" y="1600200"/>
+            <a:ext cx="4846320" cy="274320"/>
+          </a:xfrm>
+          <a:prstGeom prst="rect">
+            <a:avLst/>
+          </a:prstGeom>
+          <a:noFill/>
+          <a:ln/>
+        </p:spPr>
+        <p:txBody>
+          <a:bodyPr wrap="square" lIns="0" tIns="0" rIns="0" bIns="0" rtlCol="0" anchor="ctr"/>
+          <a:lstStyle/>
+          <a:p>
+            <a:pPr indent="0" marL="0">
+              <a:buNone/>
+            </a:pPr>
+            <a:r>
+              <a:rPr lang="en-US" sz="1250" b="1" dirty="0">
+                <a:solidFill>
+                  <a:srgbClr val="16202B"/>
+                </a:solidFill>
+                <a:latin typeface="Calibri" pitchFamily="34" charset="0"/>
+                <a:ea typeface="Calibri" pitchFamily="34" charset="-122"/>
+                <a:cs typeface="Calibri" pitchFamily="34" charset="-120"/>
+              </a:rPr>
+              <a:t>Any aim confirmatory?</a:t>
+            </a:r>
+            <a:endParaRPr lang="en-US" sz="1250" dirty="0"/>
+          </a:p>
+        </p:txBody>
+      </p:sp>
+      <p:sp>
+        <p:nvSpPr>
+          <p:cNvPr id="7" name="Text 5"/>
+          <p:cNvSpPr txBox="1"/>
+          <p:nvPr/>
+        </p:nvSpPr>
+        <p:spPr>
+          <a:xfrm>
+            <a:off x="1161288" y="1874520"/>
+            <a:ext cx="4846320" cy="384048"/>
+          </a:xfrm>
+          <a:prstGeom prst="rect">
+            <a:avLst/>
+          </a:prstGeom>
+          <a:noFill/>
+          <a:ln/>
+        </p:spPr>
+        <p:txBody>
+          <a:bodyPr wrap="square" lIns="0" tIns="0" rIns="0" bIns="0" rtlCol="0" anchor="t"/>
+          <a:lstStyle/>
+          <a:p>
+            <a:pPr indent="0" marL="0">
+              <a:buNone/>
+            </a:pPr>
+            <a:r>
+              <a:rPr lang="en-US" sz="1050" dirty="0">
+                <a:solidFill>
+                  <a:srgbClr val="5A6B7A"/>
+                </a:solidFill>
+                <a:latin typeface="Calibri" pitchFamily="34" charset="0"/>
+                <a:ea typeface="Calibri" pitchFamily="34" charset="-122"/>
+                <a:cs typeface="Calibri" pitchFamily="34" charset="-120"/>
+              </a:rPr>
+              <a:t>Investigator writes the hypothesis; multiplicity becomes required</a:t>
+            </a:r>
+            <a:endParaRPr lang="en-US" sz="1050" dirty="0"/>
+          </a:p>
+        </p:txBody>
+      </p:sp>
+      <p:sp>
+        <p:nvSpPr>
+          <p:cNvPr id="8" name="Shape 6"/>
+          <p:cNvSpPr/>
+          <p:nvPr/>
+        </p:nvSpPr>
+        <p:spPr>
+          <a:xfrm>
+            <a:off x="566928" y="2331720"/>
+            <a:ext cx="457200" cy="457200"/>
+          </a:xfrm>
+          <a:prstGeom prst="ellipse">
+            <a:avLst/>
+          </a:prstGeom>
+          <a:solidFill>
+            <a:srgbClr val="0F4C43"/>
+          </a:solidFill>
+          <a:ln w="12700">
+            <a:solidFill>
+              <a:srgbClr val="0F4C43"/>
+            </a:solidFill>
+            <a:prstDash val="solid"/>
+          </a:ln>
+        </p:spPr>
+      </p:sp>
+      <p:sp>
+        <p:nvSpPr>
+          <p:cNvPr id="9" name="Text 7"/>
+          <p:cNvSpPr txBox="1"/>
+          <p:nvPr/>
+        </p:nvSpPr>
+        <p:spPr>
+          <a:xfrm>
+            <a:off x="566928" y="2331720"/>
+            <a:ext cx="457200" cy="457200"/>
+          </a:xfrm>
+          <a:prstGeom prst="rect">
+            <a:avLst/>
+          </a:prstGeom>
+          <a:noFill/>
+          <a:ln/>
+        </p:spPr>
+        <p:txBody>
+          <a:bodyPr wrap="square" lIns="0" tIns="0" rIns="0" bIns="0" rtlCol="0" anchor="ctr"/>
+          <a:lstStyle/>
+          <a:p>
+            <a:pPr algn="ctr" indent="0" marL="0">
+              <a:buNone/>
+            </a:pPr>
+            <a:r>
+              <a:rPr lang="en-US" sz="1000" b="1" dirty="0">
+                <a:solidFill>
+                  <a:srgbClr val="FFFFFF"/>
+                </a:solidFill>
+                <a:latin typeface="Calibri" pitchFamily="34" charset="0"/>
+                <a:ea typeface="Calibri" pitchFamily="34" charset="-122"/>
+                <a:cs typeface="Calibri" pitchFamily="34" charset="-120"/>
+              </a:rPr>
+              <a:t>D2</a:t>
+            </a:r>
+            <a:endParaRPr lang="en-US" sz="1000" dirty="0"/>
+          </a:p>
+        </p:txBody>
+      </p:sp>
+      <p:sp>
+        <p:nvSpPr>
+          <p:cNvPr id="10" name="Text 8"/>
+          <p:cNvSpPr txBox="1"/>
+          <p:nvPr/>
+        </p:nvSpPr>
+        <p:spPr>
+          <a:xfrm>
+            <a:off x="1161288" y="2313432"/>
+            <a:ext cx="4846320" cy="274320"/>
+          </a:xfrm>
+          <a:prstGeom prst="rect">
+            <a:avLst/>
+          </a:prstGeom>
+          <a:noFill/>
+          <a:ln/>
+        </p:spPr>
+        <p:txBody>
+          <a:bodyPr wrap="square" lIns="0" tIns="0" rIns="0" bIns="0" rtlCol="0" anchor="ctr"/>
+          <a:lstStyle/>
+          <a:p>
+            <a:pPr indent="0" marL="0">
+              <a:buNone/>
+            </a:pPr>
+            <a:r>
+              <a:rPr lang="en-US" sz="1250" b="1" dirty="0">
+                <a:solidFill>
+                  <a:srgbClr val="16202B"/>
+                </a:solidFill>
+                <a:latin typeface="Calibri" pitchFamily="34" charset="0"/>
+                <a:ea typeface="Calibri" pitchFamily="34" charset="-122"/>
+                <a:cs typeface="Calibri" pitchFamily="34" charset="-120"/>
+              </a:rPr>
+              <a:t>Aims-check finding: apply, keep with a reason, or skip</a:t>
+            </a:r>
+            <a:endParaRPr lang="en-US" sz="1250" dirty="0"/>
+          </a:p>
+        </p:txBody>
+      </p:sp>
+      <p:sp>
+        <p:nvSpPr>
+          <p:cNvPr id="11" name="Text 9"/>
+          <p:cNvSpPr txBox="1"/>
+          <p:nvPr/>
+        </p:nvSpPr>
+        <p:spPr>
+          <a:xfrm>
+            <a:off x="1161288" y="2587752"/>
+            <a:ext cx="4846320" cy="384048"/>
+          </a:xfrm>
+          <a:prstGeom prst="rect">
+            <a:avLst/>
+          </a:prstGeom>
+          <a:noFill/>
+          <a:ln/>
+        </p:spPr>
+        <p:txBody>
+          <a:bodyPr wrap="square" lIns="0" tIns="0" rIns="0" bIns="0" rtlCol="0" anchor="t"/>
+          <a:lstStyle/>
+          <a:p>
+            <a:pPr indent="0" marL="0">
+              <a:buNone/>
+            </a:pPr>
+            <a:r>
+              <a:rPr lang="en-US" sz="1050" dirty="0">
+                <a:solidFill>
+                  <a:srgbClr val="5A6B7A"/>
+                </a:solidFill>
+                <a:latin typeface="Calibri" pitchFamily="34" charset="0"/>
+                <a:ea typeface="Calibri" pitchFamily="34" charset="-122"/>
+                <a:cs typeface="Calibri" pitchFamily="34" charset="-120"/>
+              </a:rPr>
+              <a:t>Model runs the literature scan</a:t>
+            </a:r>
+            <a:endParaRPr lang="en-US" sz="1050" dirty="0"/>
+          </a:p>
+        </p:txBody>
+      </p:sp>
+      <p:sp>
+        <p:nvSpPr>
+          <p:cNvPr id="12" name="Shape 10"/>
+          <p:cNvSpPr/>
+          <p:nvPr/>
+        </p:nvSpPr>
+        <p:spPr>
+          <a:xfrm>
+            <a:off x="566928" y="3044952"/>
+            <a:ext cx="457200" cy="457200"/>
+          </a:xfrm>
+          <a:prstGeom prst="ellipse">
+            <a:avLst/>
+          </a:prstGeom>
+          <a:solidFill>
+            <a:srgbClr val="0F4C43"/>
+          </a:solidFill>
+          <a:ln w="12700">
+            <a:solidFill>
+              <a:srgbClr val="0F4C43"/>
+            </a:solidFill>
+            <a:prstDash val="solid"/>
+          </a:ln>
+        </p:spPr>
+      </p:sp>
+      <p:sp>
+        <p:nvSpPr>
+          <p:cNvPr id="13" name="Text 11"/>
+          <p:cNvSpPr txBox="1"/>
+          <p:nvPr/>
+        </p:nvSpPr>
+        <p:spPr>
+          <a:xfrm>
+            <a:off x="566928" y="3044952"/>
+            <a:ext cx="457200" cy="457200"/>
+          </a:xfrm>
+          <a:prstGeom prst="rect">
+            <a:avLst/>
+          </a:prstGeom>
+          <a:noFill/>
+          <a:ln/>
+        </p:spPr>
+        <p:txBody>
+          <a:bodyPr wrap="square" lIns="0" tIns="0" rIns="0" bIns="0" rtlCol="0" anchor="ctr"/>
+          <a:lstStyle/>
+          <a:p>
+            <a:pPr algn="ctr" indent="0" marL="0">
+              <a:buNone/>
+            </a:pPr>
+            <a:r>
+              <a:rPr lang="en-US" sz="1000" b="1" dirty="0">
+                <a:solidFill>
+                  <a:srgbClr val="FFFFFF"/>
+                </a:solidFill>
+                <a:latin typeface="Calibri" pitchFamily="34" charset="0"/>
+                <a:ea typeface="Calibri" pitchFamily="34" charset="-122"/>
+                <a:cs typeface="Calibri" pitchFamily="34" charset="-120"/>
+              </a:rPr>
+              <a:t>D3</a:t>
+            </a:r>
+            <a:endParaRPr lang="en-US" sz="1000" dirty="0"/>
+          </a:p>
+        </p:txBody>
+      </p:sp>
+      <p:sp>
+        <p:nvSpPr>
+          <p:cNvPr id="14" name="Text 12"/>
+          <p:cNvSpPr txBox="1"/>
+          <p:nvPr/>
+        </p:nvSpPr>
+        <p:spPr>
+          <a:xfrm>
+            <a:off x="1161288" y="3026664"/>
+            <a:ext cx="4846320" cy="274320"/>
+          </a:xfrm>
+          <a:prstGeom prst="rect">
+            <a:avLst/>
+          </a:prstGeom>
+          <a:noFill/>
+          <a:ln/>
+        </p:spPr>
+        <p:txBody>
+          <a:bodyPr wrap="square" lIns="0" tIns="0" rIns="0" bIns="0" rtlCol="0" anchor="ctr"/>
+          <a:lstStyle/>
+          <a:p>
+            <a:pPr indent="0" marL="0">
+              <a:buNone/>
+            </a:pPr>
+            <a:r>
+              <a:rPr lang="en-US" sz="1250" b="1" dirty="0">
+                <a:solidFill>
+                  <a:srgbClr val="16202B"/>
+                </a:solidFill>
+                <a:latin typeface="Calibri" pitchFamily="34" charset="0"/>
+                <a:ea typeface="Calibri" pitchFamily="34" charset="-122"/>
+                <a:cs typeface="Calibri" pitchFamily="34" charset="-120"/>
+              </a:rPr>
+              <a:t>Basis per feasibility answer: checked, assumption, or task</a:t>
+            </a:r>
+            <a:endParaRPr lang="en-US" sz="1250" dirty="0"/>
+          </a:p>
+        </p:txBody>
+      </p:sp>
+      <p:sp>
+        <p:nvSpPr>
+          <p:cNvPr id="15" name="Text 13"/>
+          <p:cNvSpPr txBox="1"/>
+          <p:nvPr/>
+        </p:nvSpPr>
+        <p:spPr>
+          <a:xfrm>
+            <a:off x="1161288" y="3300984"/>
+            <a:ext cx="4846320" cy="384048"/>
+          </a:xfrm>
+          <a:prstGeom prst="rect">
+            <a:avLst/>
+          </a:prstGeom>
+          <a:noFill/>
+          <a:ln/>
+        </p:spPr>
+        <p:txBody>
+          <a:bodyPr wrap="square" lIns="0" tIns="0" rIns="0" bIns="0" rtlCol="0" anchor="t"/>
+          <a:lstStyle/>
+          <a:p>
+            <a:pPr indent="0" marL="0">
+              <a:buNone/>
+            </a:pPr>
+            <a:r>
+              <a:rPr lang="en-US" sz="1050" dirty="0">
+                <a:solidFill>
+                  <a:srgbClr val="5A6B7A"/>
+                </a:solidFill>
+                <a:latin typeface="Calibri" pitchFamily="34" charset="0"/>
+                <a:ea typeface="Calibri" pitchFamily="34" charset="-122"/>
+                <a:cs typeface="Calibri" pitchFamily="34" charset="-120"/>
+              </a:rPr>
+              <a:t>Code Phase 2 gate; a task blocks design until closed</a:t>
+            </a:r>
+            <a:endParaRPr lang="en-US" sz="1050" dirty="0"/>
+          </a:p>
+        </p:txBody>
+      </p:sp>
+      <p:sp>
+        <p:nvSpPr>
+          <p:cNvPr id="16" name="Shape 14"/>
+          <p:cNvSpPr/>
+          <p:nvPr/>
+        </p:nvSpPr>
+        <p:spPr>
+          <a:xfrm>
+            <a:off x="566928" y="3758184"/>
+            <a:ext cx="457200" cy="457200"/>
+          </a:xfrm>
+          <a:prstGeom prst="ellipse">
+            <a:avLst/>
+          </a:prstGeom>
+          <a:solidFill>
+            <a:srgbClr val="0F4C43"/>
+          </a:solidFill>
+          <a:ln w="12700">
+            <a:solidFill>
+              <a:srgbClr val="0F4C43"/>
+            </a:solidFill>
+            <a:prstDash val="solid"/>
+          </a:ln>
+        </p:spPr>
+      </p:sp>
+      <p:sp>
+        <p:nvSpPr>
+          <p:cNvPr id="17" name="Text 15"/>
+          <p:cNvSpPr txBox="1"/>
+          <p:nvPr/>
+        </p:nvSpPr>
+        <p:spPr>
+          <a:xfrm>
+            <a:off x="566928" y="3758184"/>
+            <a:ext cx="457200" cy="457200"/>
+          </a:xfrm>
+          <a:prstGeom prst="rect">
+            <a:avLst/>
+          </a:prstGeom>
+          <a:noFill/>
+          <a:ln/>
+        </p:spPr>
+        <p:txBody>
+          <a:bodyPr wrap="square" lIns="0" tIns="0" rIns="0" bIns="0" rtlCol="0" anchor="ctr"/>
+          <a:lstStyle/>
+          <a:p>
+            <a:pPr algn="ctr" indent="0" marL="0">
+              <a:buNone/>
+            </a:pPr>
+            <a:r>
+              <a:rPr lang="en-US" sz="1000" b="1" dirty="0">
+                <a:solidFill>
+                  <a:srgbClr val="FFFFFF"/>
+                </a:solidFill>
+                <a:latin typeface="Calibri" pitchFamily="34" charset="0"/>
+                <a:ea typeface="Calibri" pitchFamily="34" charset="-122"/>
+                <a:cs typeface="Calibri" pitchFamily="34" charset="-120"/>
+              </a:rPr>
+              <a:t>D4</a:t>
+            </a:r>
+            <a:endParaRPr lang="en-US" sz="1000" dirty="0"/>
+          </a:p>
+        </p:txBody>
+      </p:sp>
+      <p:sp>
+        <p:nvSpPr>
+          <p:cNvPr id="18" name="Text 16"/>
+          <p:cNvSpPr txBox="1"/>
+          <p:nvPr/>
+        </p:nvSpPr>
+        <p:spPr>
+          <a:xfrm>
+            <a:off x="1161288" y="3739896"/>
+            <a:ext cx="4846320" cy="274320"/>
+          </a:xfrm>
+          <a:prstGeom prst="rect">
+            <a:avLst/>
+          </a:prstGeom>
+          <a:noFill/>
+          <a:ln/>
+        </p:spPr>
+        <p:txBody>
+          <a:bodyPr wrap="square" lIns="0" tIns="0" rIns="0" bIns="0" rtlCol="0" anchor="ctr"/>
+          <a:lstStyle/>
+          <a:p>
+            <a:pPr indent="0" marL="0">
+              <a:buNone/>
+            </a:pPr>
+            <a:r>
+              <a:rPr lang="en-US" sz="1250" b="1" dirty="0">
+                <a:solidFill>
+                  <a:srgbClr val="16202B"/>
+                </a:solidFill>
+                <a:latin typeface="Calibri" pitchFamily="34" charset="0"/>
+                <a:ea typeface="Calibri" pitchFamily="34" charset="-122"/>
+                <a:cs typeface="Calibri" pitchFamily="34" charset="-120"/>
+              </a:rPr>
+              <a:t>Approve the design, or pick an alternative</a:t>
+            </a:r>
+            <a:endParaRPr lang="en-US" sz="1250" dirty="0"/>
+          </a:p>
+        </p:txBody>
+      </p:sp>
+      <p:sp>
+        <p:nvSpPr>
+          <p:cNvPr id="19" name="Text 17"/>
+          <p:cNvSpPr txBox="1"/>
+          <p:nvPr/>
+        </p:nvSpPr>
+        <p:spPr>
+          <a:xfrm>
+            <a:off x="1161288" y="4014216"/>
+            <a:ext cx="4846320" cy="384048"/>
+          </a:xfrm>
+          <a:prstGeom prst="rect">
+            <a:avLst/>
+          </a:prstGeom>
+          <a:noFill/>
+          <a:ln/>
+        </p:spPr>
+        <p:txBody>
+          <a:bodyPr wrap="square" lIns="0" tIns="0" rIns="0" bIns="0" rtlCol="0" anchor="t"/>
+          <a:lstStyle/>
+          <a:p>
+            <a:pPr indent="0" marL="0">
+              <a:buNone/>
+            </a:pPr>
+            <a:r>
+              <a:rPr lang="en-US" sz="1050" dirty="0">
+                <a:solidFill>
+                  <a:srgbClr val="5A6B7A"/>
+                </a:solidFill>
+                <a:latin typeface="Calibri" pitchFamily="34" charset="0"/>
+                <a:ea typeface="Calibri" pitchFamily="34" charset="-122"/>
+                <a:cs typeface="Calibri" pitchFamily="34" charset="-120"/>
+              </a:rPr>
+              <a:t>Model re-runs the brief, free; or code runs the conflict gate</a:t>
+            </a:r>
+            <a:endParaRPr lang="en-US" sz="1050" dirty="0"/>
+          </a:p>
+        </p:txBody>
+      </p:sp>
+      <p:sp>
+        <p:nvSpPr>
+          <p:cNvPr id="20" name="Shape 18"/>
+          <p:cNvSpPr/>
+          <p:nvPr/>
+        </p:nvSpPr>
+        <p:spPr>
+          <a:xfrm>
+            <a:off x="566928" y="4471416"/>
+            <a:ext cx="457200" cy="457200"/>
+          </a:xfrm>
+          <a:prstGeom prst="ellipse">
+            <a:avLst/>
+          </a:prstGeom>
+          <a:solidFill>
+            <a:srgbClr val="0F4C43"/>
+          </a:solidFill>
+          <a:ln w="12700">
+            <a:solidFill>
+              <a:srgbClr val="0F4C43"/>
+            </a:solidFill>
+            <a:prstDash val="solid"/>
+          </a:ln>
+        </p:spPr>
+      </p:sp>
+      <p:sp>
+        <p:nvSpPr>
+          <p:cNvPr id="21" name="Text 19"/>
+          <p:cNvSpPr txBox="1"/>
+          <p:nvPr/>
+        </p:nvSpPr>
+        <p:spPr>
+          <a:xfrm>
+            <a:off x="566928" y="4471416"/>
+            <a:ext cx="457200" cy="457200"/>
+          </a:xfrm>
+          <a:prstGeom prst="rect">
+            <a:avLst/>
+          </a:prstGeom>
+          <a:noFill/>
+          <a:ln/>
+        </p:spPr>
+        <p:txBody>
+          <a:bodyPr wrap="square" lIns="0" tIns="0" rIns="0" bIns="0" rtlCol="0" anchor="ctr"/>
+          <a:lstStyle/>
+          <a:p>
+            <a:pPr algn="ctr" indent="0" marL="0">
+              <a:buNone/>
+            </a:pPr>
+            <a:r>
+              <a:rPr lang="en-US" sz="1000" b="1" dirty="0">
+                <a:solidFill>
+                  <a:srgbClr val="FFFFFF"/>
+                </a:solidFill>
+                <a:latin typeface="Calibri" pitchFamily="34" charset="0"/>
+                <a:ea typeface="Calibri" pitchFamily="34" charset="-122"/>
+                <a:cs typeface="Calibri" pitchFamily="34" charset="-120"/>
+              </a:rPr>
+              <a:t>D5</a:t>
+            </a:r>
+            <a:endParaRPr lang="en-US" sz="1000" dirty="0"/>
+          </a:p>
+        </p:txBody>
+      </p:sp>
+      <p:sp>
+        <p:nvSpPr>
+          <p:cNvPr id="22" name="Text 20"/>
+          <p:cNvSpPr txBox="1"/>
+          <p:nvPr/>
+        </p:nvSpPr>
+        <p:spPr>
+          <a:xfrm>
+            <a:off x="1161288" y="4453128"/>
+            <a:ext cx="4846320" cy="274320"/>
+          </a:xfrm>
+          <a:prstGeom prst="rect">
+            <a:avLst/>
+          </a:prstGeom>
+          <a:noFill/>
+          <a:ln/>
+        </p:spPr>
+        <p:txBody>
+          <a:bodyPr wrap="square" lIns="0" tIns="0" rIns="0" bIns="0" rtlCol="0" anchor="ctr"/>
+          <a:lstStyle/>
+          <a:p>
+            <a:pPr indent="0" marL="0">
+              <a:buNone/>
+            </a:pPr>
+            <a:r>
+              <a:rPr lang="en-US" sz="1250" b="1" dirty="0">
+                <a:solidFill>
+                  <a:srgbClr val="16202B"/>
+                </a:solidFill>
+                <a:latin typeface="Calibri" pitchFamily="34" charset="0"/>
+                <a:ea typeface="Calibri" pitchFamily="34" charset="-122"/>
+                <a:cs typeface="Calibri" pitchFamily="34" charset="-120"/>
+              </a:rPr>
+              <a:t>Each design condition: confirmed, to check, or not available</a:t>
+            </a:r>
+            <a:endParaRPr lang="en-US" sz="1250" dirty="0"/>
+          </a:p>
+        </p:txBody>
+      </p:sp>
+      <p:sp>
+        <p:nvSpPr>
+          <p:cNvPr id="23" name="Text 21"/>
+          <p:cNvSpPr txBox="1"/>
+          <p:nvPr/>
+        </p:nvSpPr>
+        <p:spPr>
+          <a:xfrm>
+            <a:off x="1161288" y="4727448"/>
+            <a:ext cx="4846320" cy="384048"/>
+          </a:xfrm>
+          <a:prstGeom prst="rect">
+            <a:avLst/>
+          </a:prstGeom>
+          <a:noFill/>
+          <a:ln/>
+        </p:spPr>
+        <p:txBody>
+          <a:bodyPr wrap="square" lIns="0" tIns="0" rIns="0" bIns="0" rtlCol="0" anchor="t"/>
+          <a:lstStyle/>
+          <a:p>
+            <a:pPr indent="0" marL="0">
+              <a:buNone/>
+            </a:pPr>
+            <a:r>
+              <a:rPr lang="en-US" sz="1050" dirty="0">
+                <a:solidFill>
+                  <a:srgbClr val="5A6B7A"/>
+                </a:solidFill>
+                <a:latin typeface="Calibri" pitchFamily="34" charset="0"/>
+                <a:ea typeface="Calibri" pitchFamily="34" charset="-122"/>
+                <a:cs typeface="Calibri" pitchFamily="34" charset="-120"/>
+              </a:rPr>
+              <a:t>Code Phase 3 gate, then the design confirmation</a:t>
+            </a:r>
+            <a:endParaRPr lang="en-US" sz="1050" dirty="0"/>
+          </a:p>
+        </p:txBody>
+      </p:sp>
+      <p:sp>
+        <p:nvSpPr>
+          <p:cNvPr id="24" name="Shape 22"/>
+          <p:cNvSpPr/>
+          <p:nvPr/>
+        </p:nvSpPr>
+        <p:spPr>
+          <a:xfrm>
+            <a:off x="566928" y="5184648"/>
+            <a:ext cx="457200" cy="457200"/>
+          </a:xfrm>
+          <a:prstGeom prst="ellipse">
+            <a:avLst/>
+          </a:prstGeom>
+          <a:solidFill>
+            <a:srgbClr val="0F4C43"/>
+          </a:solidFill>
+          <a:ln w="12700">
+            <a:solidFill>
+              <a:srgbClr val="0F4C43"/>
+            </a:solidFill>
+            <a:prstDash val="solid"/>
+          </a:ln>
+        </p:spPr>
+      </p:sp>
+      <p:sp>
+        <p:nvSpPr>
+          <p:cNvPr id="25" name="Text 23"/>
+          <p:cNvSpPr txBox="1"/>
+          <p:nvPr/>
+        </p:nvSpPr>
+        <p:spPr>
+          <a:xfrm>
+            <a:off x="566928" y="5184648"/>
+            <a:ext cx="457200" cy="457200"/>
+          </a:xfrm>
+          <a:prstGeom prst="rect">
+            <a:avLst/>
+          </a:prstGeom>
+          <a:noFill/>
+          <a:ln/>
+        </p:spPr>
+        <p:txBody>
+          <a:bodyPr wrap="square" lIns="0" tIns="0" rIns="0" bIns="0" rtlCol="0" anchor="ctr"/>
+          <a:lstStyle/>
+          <a:p>
+            <a:pPr algn="ctr" indent="0" marL="0">
+              <a:buNone/>
+            </a:pPr>
+            <a:r>
+              <a:rPr lang="en-US" sz="1000" b="1" dirty="0">
+                <a:solidFill>
+                  <a:srgbClr val="FFFFFF"/>
+                </a:solidFill>
+                <a:latin typeface="Calibri" pitchFamily="34" charset="0"/>
+                <a:ea typeface="Calibri" pitchFamily="34" charset="-122"/>
+                <a:cs typeface="Calibri" pitchFamily="34" charset="-120"/>
+              </a:rPr>
+              <a:t>D6</a:t>
+            </a:r>
+            <a:endParaRPr lang="en-US" sz="1000" dirty="0"/>
+          </a:p>
+        </p:txBody>
+      </p:sp>
+      <p:sp>
+        <p:nvSpPr>
+          <p:cNvPr id="26" name="Text 24"/>
+          <p:cNvSpPr txBox="1"/>
+          <p:nvPr/>
+        </p:nvSpPr>
+        <p:spPr>
+          <a:xfrm>
+            <a:off x="1161288" y="5166360"/>
+            <a:ext cx="4846320" cy="274320"/>
+          </a:xfrm>
+          <a:prstGeom prst="rect">
+            <a:avLst/>
+          </a:prstGeom>
+          <a:noFill/>
+          <a:ln/>
+        </p:spPr>
+        <p:txBody>
+          <a:bodyPr wrap="square" lIns="0" tIns="0" rIns="0" bIns="0" rtlCol="0" anchor="ctr"/>
+          <a:lstStyle/>
+          <a:p>
+            <a:pPr indent="0" marL="0">
+              <a:buNone/>
+            </a:pPr>
+            <a:r>
+              <a:rPr lang="en-US" sz="1250" b="1" dirty="0">
+                <a:solidFill>
+                  <a:srgbClr val="16202B"/>
+                </a:solidFill>
+                <a:latin typeface="Calibri" pitchFamily="34" charset="0"/>
+                <a:ea typeface="Calibri" pitchFamily="34" charset="-122"/>
+                <a:cs typeface="Calibri" pitchFamily="34" charset="-120"/>
+              </a:rPr>
+              <a:t>Data beyond the map: add it, or remove from the analysis</a:t>
+            </a:r>
+            <a:endParaRPr lang="en-US" sz="1250" dirty="0"/>
+          </a:p>
+        </p:txBody>
+      </p:sp>
+      <p:sp>
+        <p:nvSpPr>
+          <p:cNvPr id="27" name="Text 25"/>
+          <p:cNvSpPr txBox="1"/>
+          <p:nvPr/>
+        </p:nvSpPr>
+        <p:spPr>
+          <a:xfrm>
+            <a:off x="1161288" y="5440680"/>
+            <a:ext cx="4846320" cy="384048"/>
+          </a:xfrm>
+          <a:prstGeom prst="rect">
+            <a:avLst/>
+          </a:prstGeom>
+          <a:noFill/>
+          <a:ln/>
+        </p:spPr>
+        <p:txBody>
+          <a:bodyPr wrap="square" lIns="0" tIns="0" rIns="0" bIns="0" rtlCol="0" anchor="t"/>
+          <a:lstStyle/>
+          <a:p>
+            <a:pPr indent="0" marL="0">
+              <a:buNone/>
+            </a:pPr>
+            <a:r>
+              <a:rPr lang="en-US" sz="1050" dirty="0">
+                <a:solidFill>
+                  <a:srgbClr val="5A6B7A"/>
+                </a:solidFill>
+                <a:latin typeface="Calibri" pitchFamily="34" charset="0"/>
+                <a:ea typeface="Calibri" pitchFamily="34" charset="-122"/>
+                <a:cs typeface="Calibri" pitchFamily="34" charset="-120"/>
+              </a:rPr>
+              <a:t>Investigator fills the analysis contract</a:t>
+            </a:r>
+            <a:endParaRPr lang="en-US" sz="1050" dirty="0"/>
+          </a:p>
+        </p:txBody>
+      </p:sp>
+      <p:sp>
+        <p:nvSpPr>
+          <p:cNvPr id="28" name="Shape 26"/>
+          <p:cNvSpPr/>
+          <p:nvPr/>
+        </p:nvSpPr>
+        <p:spPr>
+          <a:xfrm>
+            <a:off x="6144768" y="1618488"/>
+            <a:ext cx="457200" cy="457200"/>
+          </a:xfrm>
+          <a:prstGeom prst="ellipse">
+            <a:avLst/>
+          </a:prstGeom>
+          <a:solidFill>
+            <a:srgbClr val="0F4C43"/>
+          </a:solidFill>
+          <a:ln w="12700">
+            <a:solidFill>
+              <a:srgbClr val="0F4C43"/>
+            </a:solidFill>
+            <a:prstDash val="solid"/>
+          </a:ln>
+        </p:spPr>
+      </p:sp>
+      <p:sp>
+        <p:nvSpPr>
+          <p:cNvPr id="29" name="Text 27"/>
+          <p:cNvSpPr txBox="1"/>
+          <p:nvPr/>
+        </p:nvSpPr>
+        <p:spPr>
+          <a:xfrm>
+            <a:off x="6144768" y="1618488"/>
+            <a:ext cx="457200" cy="457200"/>
+          </a:xfrm>
+          <a:prstGeom prst="rect">
+            <a:avLst/>
+          </a:prstGeom>
+          <a:noFill/>
+          <a:ln/>
+        </p:spPr>
+        <p:txBody>
+          <a:bodyPr wrap="square" lIns="0" tIns="0" rIns="0" bIns="0" rtlCol="0" anchor="ctr"/>
+          <a:lstStyle/>
+          <a:p>
+            <a:pPr algn="ctr" indent="0" marL="0">
+              <a:buNone/>
+            </a:pPr>
+            <a:r>
+              <a:rPr lang="en-US" sz="1000" b="1" dirty="0">
+                <a:solidFill>
+                  <a:srgbClr val="FFFFFF"/>
+                </a:solidFill>
+                <a:latin typeface="Calibri" pitchFamily="34" charset="0"/>
+                <a:ea typeface="Calibri" pitchFamily="34" charset="-122"/>
+                <a:cs typeface="Calibri" pitchFamily="34" charset="-120"/>
+              </a:rPr>
+              <a:t>D7</a:t>
+            </a:r>
+            <a:endParaRPr lang="en-US" sz="1000" dirty="0"/>
+          </a:p>
+        </p:txBody>
+      </p:sp>
+      <p:sp>
+        <p:nvSpPr>
+          <p:cNvPr id="30" name="Text 28"/>
+          <p:cNvSpPr txBox="1"/>
+          <p:nvPr/>
+        </p:nvSpPr>
+        <p:spPr>
+          <a:xfrm>
+            <a:off x="6739128" y="1600200"/>
+            <a:ext cx="4846320" cy="274320"/>
+          </a:xfrm>
+          <a:prstGeom prst="rect">
+            <a:avLst/>
+          </a:prstGeom>
+          <a:noFill/>
+          <a:ln/>
+        </p:spPr>
+        <p:txBody>
+          <a:bodyPr wrap="square" lIns="0" tIns="0" rIns="0" bIns="0" rtlCol="0" anchor="ctr"/>
+          <a:lstStyle/>
+          <a:p>
+            <a:pPr indent="0" marL="0">
+              <a:buNone/>
+            </a:pPr>
+            <a:r>
+              <a:rPr lang="en-US" sz="1250" b="1" dirty="0">
+                <a:solidFill>
+                  <a:srgbClr val="16202B"/>
+                </a:solidFill>
+                <a:latin typeface="Calibri" pitchFamily="34" charset="0"/>
+                <a:ea typeface="Calibri" pitchFamily="34" charset="-122"/>
+                <a:cs typeface="Calibri" pitchFamily="34" charset="-120"/>
+              </a:rPr>
+              <a:t>Multiplicity family, method and sizing implication</a:t>
+            </a:r>
+            <a:endParaRPr lang="en-US" sz="1250" dirty="0"/>
+          </a:p>
+        </p:txBody>
+      </p:sp>
+      <p:sp>
+        <p:nvSpPr>
+          <p:cNvPr id="31" name="Text 29"/>
+          <p:cNvSpPr txBox="1"/>
+          <p:nvPr/>
+        </p:nvSpPr>
+        <p:spPr>
+          <a:xfrm>
+            <a:off x="6739128" y="1874520"/>
+            <a:ext cx="4846320" cy="384048"/>
+          </a:xfrm>
+          <a:prstGeom prst="rect">
+            <a:avLst/>
+          </a:prstGeom>
+          <a:noFill/>
+          <a:ln/>
+        </p:spPr>
+        <p:txBody>
+          <a:bodyPr wrap="square" lIns="0" tIns="0" rIns="0" bIns="0" rtlCol="0" anchor="t"/>
+          <a:lstStyle/>
+          <a:p>
+            <a:pPr indent="0" marL="0">
+              <a:buNone/>
+            </a:pPr>
+            <a:r>
+              <a:rPr lang="en-US" sz="1050" dirty="0">
+                <a:solidFill>
+                  <a:srgbClr val="5A6B7A"/>
+                </a:solidFill>
+                <a:latin typeface="Calibri" pitchFamily="34" charset="0"/>
+                <a:ea typeface="Calibri" pitchFamily="34" charset="-122"/>
+                <a:cs typeface="Calibri" pitchFamily="34" charset="-120"/>
+              </a:rPr>
+              <a:t>Investigator reconciles counts; code Phase 4 gate</a:t>
+            </a:r>
+            <a:endParaRPr lang="en-US" sz="1050" dirty="0"/>
+          </a:p>
+        </p:txBody>
+      </p:sp>
+      <p:sp>
+        <p:nvSpPr>
+          <p:cNvPr id="32" name="Shape 30"/>
+          <p:cNvSpPr/>
+          <p:nvPr/>
+        </p:nvSpPr>
+        <p:spPr>
+          <a:xfrm>
+            <a:off x="6144768" y="2331720"/>
+            <a:ext cx="457200" cy="457200"/>
+          </a:xfrm>
+          <a:prstGeom prst="ellipse">
+            <a:avLst/>
+          </a:prstGeom>
+          <a:solidFill>
+            <a:srgbClr val="0F4C43"/>
+          </a:solidFill>
+          <a:ln w="12700">
+            <a:solidFill>
+              <a:srgbClr val="0F4C43"/>
+            </a:solidFill>
+            <a:prstDash val="solid"/>
+          </a:ln>
+        </p:spPr>
+      </p:sp>
+      <p:sp>
+        <p:nvSpPr>
+          <p:cNvPr id="33" name="Text 31"/>
+          <p:cNvSpPr txBox="1"/>
+          <p:nvPr/>
+        </p:nvSpPr>
+        <p:spPr>
+          <a:xfrm>
+            <a:off x="6144768" y="2331720"/>
+            <a:ext cx="457200" cy="457200"/>
+          </a:xfrm>
+          <a:prstGeom prst="rect">
+            <a:avLst/>
+          </a:prstGeom>
+          <a:noFill/>
+          <a:ln/>
+        </p:spPr>
+        <p:txBody>
+          <a:bodyPr wrap="square" lIns="0" tIns="0" rIns="0" bIns="0" rtlCol="0" anchor="ctr"/>
+          <a:lstStyle/>
+          <a:p>
+            <a:pPr algn="ctr" indent="0" marL="0">
+              <a:buNone/>
+            </a:pPr>
+            <a:r>
+              <a:rPr lang="en-US" sz="1000" b="1" dirty="0">
+                <a:solidFill>
+                  <a:srgbClr val="FFFFFF"/>
+                </a:solidFill>
+                <a:latin typeface="Calibri" pitchFamily="34" charset="0"/>
+                <a:ea typeface="Calibri" pitchFamily="34" charset="-122"/>
+                <a:cs typeface="Calibri" pitchFamily="34" charset="-120"/>
+              </a:rPr>
+              <a:t>D8</a:t>
+            </a:r>
+            <a:endParaRPr lang="en-US" sz="1000" dirty="0"/>
+          </a:p>
+        </p:txBody>
+      </p:sp>
+      <p:sp>
+        <p:nvSpPr>
+          <p:cNvPr id="34" name="Text 32"/>
+          <p:cNvSpPr txBox="1"/>
+          <p:nvPr/>
+        </p:nvSpPr>
+        <p:spPr>
+          <a:xfrm>
+            <a:off x="6739128" y="2313432"/>
+            <a:ext cx="4846320" cy="274320"/>
+          </a:xfrm>
+          <a:prstGeom prst="rect">
+            <a:avLst/>
+          </a:prstGeom>
+          <a:noFill/>
+          <a:ln/>
+        </p:spPr>
+        <p:txBody>
+          <a:bodyPr wrap="square" lIns="0" tIns="0" rIns="0" bIns="0" rtlCol="0" anchor="ctr"/>
+          <a:lstStyle/>
+          <a:p>
+            <a:pPr indent="0" marL="0">
+              <a:buNone/>
+            </a:pPr>
+            <a:r>
+              <a:rPr lang="en-US" sz="1250" b="1" dirty="0">
+                <a:solidFill>
+                  <a:srgbClr val="16202B"/>
+                </a:solidFill>
+                <a:latin typeface="Calibri" pitchFamily="34" charset="0"/>
+                <a:ea typeface="Calibri" pitchFamily="34" charset="-122"/>
+                <a:cs typeface="Calibri" pitchFamily="34" charset="-120"/>
+              </a:rPr>
+              <a:t>After an edit: save only, or update the affected sections</a:t>
+            </a:r>
+            <a:endParaRPr lang="en-US" sz="1250" dirty="0"/>
+          </a:p>
+        </p:txBody>
+      </p:sp>
+      <p:sp>
+        <p:nvSpPr>
+          <p:cNvPr id="35" name="Text 33"/>
+          <p:cNvSpPr txBox="1"/>
+          <p:nvPr/>
+        </p:nvSpPr>
+        <p:spPr>
+          <a:xfrm>
+            <a:off x="6739128" y="2587752"/>
+            <a:ext cx="4846320" cy="384048"/>
+          </a:xfrm>
+          <a:prstGeom prst="rect">
+            <a:avLst/>
+          </a:prstGeom>
+          <a:noFill/>
+          <a:ln/>
+        </p:spPr>
+        <p:txBody>
+          <a:bodyPr wrap="square" lIns="0" tIns="0" rIns="0" bIns="0" rtlCol="0" anchor="t"/>
+          <a:lstStyle/>
+          <a:p>
+            <a:pPr indent="0" marL="0">
+              <a:buNone/>
+            </a:pPr>
+            <a:r>
+              <a:rPr lang="en-US" sz="1050" dirty="0">
+                <a:solidFill>
+                  <a:srgbClr val="5A6B7A"/>
+                </a:solidFill>
+                <a:latin typeface="Calibri" pitchFamily="34" charset="0"/>
+                <a:ea typeface="Calibri" pitchFamily="34" charset="-122"/>
+                <a:cs typeface="Calibri" pitchFamily="34" charset="-120"/>
+              </a:rPr>
+              <a:t>Code marks stale work; models regenerate only that</a:t>
+            </a:r>
+            <a:endParaRPr lang="en-US" sz="1050" dirty="0"/>
+          </a:p>
+        </p:txBody>
+      </p:sp>
+      <p:sp>
+        <p:nvSpPr>
+          <p:cNvPr id="36" name="Shape 34"/>
+          <p:cNvSpPr/>
+          <p:nvPr/>
+        </p:nvSpPr>
+        <p:spPr>
+          <a:xfrm>
+            <a:off x="6144768" y="3044952"/>
+            <a:ext cx="457200" cy="457200"/>
+          </a:xfrm>
+          <a:prstGeom prst="ellipse">
+            <a:avLst/>
+          </a:prstGeom>
+          <a:solidFill>
+            <a:srgbClr val="0F4C43"/>
+          </a:solidFill>
+          <a:ln w="12700">
+            <a:solidFill>
+              <a:srgbClr val="0F4C43"/>
+            </a:solidFill>
+            <a:prstDash val="solid"/>
+          </a:ln>
+        </p:spPr>
+      </p:sp>
+      <p:sp>
+        <p:nvSpPr>
+          <p:cNvPr id="37" name="Text 35"/>
+          <p:cNvSpPr txBox="1"/>
+          <p:nvPr/>
+        </p:nvSpPr>
+        <p:spPr>
+          <a:xfrm>
+            <a:off x="6144768" y="3044952"/>
+            <a:ext cx="457200" cy="457200"/>
+          </a:xfrm>
+          <a:prstGeom prst="rect">
+            <a:avLst/>
+          </a:prstGeom>
+          <a:noFill/>
+          <a:ln/>
+        </p:spPr>
+        <p:txBody>
+          <a:bodyPr wrap="square" lIns="0" tIns="0" rIns="0" bIns="0" rtlCol="0" anchor="ctr"/>
+          <a:lstStyle/>
+          <a:p>
+            <a:pPr algn="ctr" indent="0" marL="0">
+              <a:buNone/>
+            </a:pPr>
+            <a:r>
+              <a:rPr lang="en-US" sz="1000" b="1" dirty="0">
+                <a:solidFill>
+                  <a:srgbClr val="FFFFFF"/>
+                </a:solidFill>
+                <a:latin typeface="Calibri" pitchFamily="34" charset="0"/>
+                <a:ea typeface="Calibri" pitchFamily="34" charset="-122"/>
+                <a:cs typeface="Calibri" pitchFamily="34" charset="-120"/>
+              </a:rPr>
+              <a:t>D9</a:t>
+            </a:r>
+            <a:endParaRPr lang="en-US" sz="1000" dirty="0"/>
+          </a:p>
+        </p:txBody>
+      </p:sp>
+      <p:sp>
+        <p:nvSpPr>
+          <p:cNvPr id="38" name="Text 36"/>
+          <p:cNvSpPr txBox="1"/>
+          <p:nvPr/>
+        </p:nvSpPr>
+        <p:spPr>
+          <a:xfrm>
+            <a:off x="6739128" y="3026664"/>
+            <a:ext cx="4846320" cy="274320"/>
+          </a:xfrm>
+          <a:prstGeom prst="rect">
+            <a:avLst/>
+          </a:prstGeom>
+          <a:noFill/>
+          <a:ln/>
+        </p:spPr>
+        <p:txBody>
+          <a:bodyPr wrap="square" lIns="0" tIns="0" rIns="0" bIns="0" rtlCol="0" anchor="ctr"/>
+          <a:lstStyle/>
+          <a:p>
+            <a:pPr indent="0" marL="0">
+              <a:buNone/>
+            </a:pPr>
+            <a:r>
+              <a:rPr lang="en-US" sz="1250" b="1" dirty="0">
+                <a:solidFill>
+                  <a:srgbClr val="16202B"/>
+                </a:solidFill>
+                <a:latin typeface="Calibri" pitchFamily="34" charset="0"/>
+                <a:ea typeface="Calibri" pitchFamily="34" charset="-122"/>
+                <a:cs typeface="Calibri" pitchFamily="34" charset="-120"/>
+              </a:rPr>
+              <a:t>Accept or discard the generated changes</a:t>
+            </a:r>
+            <a:endParaRPr lang="en-US" sz="1250" dirty="0"/>
+          </a:p>
+        </p:txBody>
+      </p:sp>
+      <p:sp>
+        <p:nvSpPr>
+          <p:cNvPr id="39" name="Text 37"/>
+          <p:cNvSpPr txBox="1"/>
+          <p:nvPr/>
+        </p:nvSpPr>
+        <p:spPr>
+          <a:xfrm>
+            <a:off x="6739128" y="3300984"/>
+            <a:ext cx="4846320" cy="384048"/>
+          </a:xfrm>
+          <a:prstGeom prst="rect">
+            <a:avLst/>
+          </a:prstGeom>
+          <a:noFill/>
+          <a:ln/>
+        </p:spPr>
+        <p:txBody>
+          <a:bodyPr wrap="square" lIns="0" tIns="0" rIns="0" bIns="0" rtlCol="0" anchor="t"/>
+          <a:lstStyle/>
+          <a:p>
+            <a:pPr indent="0" marL="0">
+              <a:buNone/>
+            </a:pPr>
+            <a:r>
+              <a:rPr lang="en-US" sz="1050" dirty="0">
+                <a:solidFill>
+                  <a:srgbClr val="5A6B7A"/>
+                </a:solidFill>
+                <a:latin typeface="Calibri" pitchFamily="34" charset="0"/>
+                <a:ea typeface="Calibri" pitchFamily="34" charset="-122"/>
+                <a:cs typeface="Calibri" pitchFamily="34" charset="-120"/>
+              </a:rPr>
+              <a:t>Code Phase 4 gate; the result is refused if decisions moved</a:t>
+            </a:r>
+            <a:endParaRPr lang="en-US" sz="1050" dirty="0"/>
+          </a:p>
+        </p:txBody>
+      </p:sp>
+      <p:sp>
+        <p:nvSpPr>
+          <p:cNvPr id="40" name="Shape 38"/>
+          <p:cNvSpPr/>
+          <p:nvPr/>
+        </p:nvSpPr>
+        <p:spPr>
+          <a:xfrm>
+            <a:off x="6144768" y="3758184"/>
+            <a:ext cx="457200" cy="457200"/>
+          </a:xfrm>
+          <a:prstGeom prst="ellipse">
+            <a:avLst/>
+          </a:prstGeom>
+          <a:solidFill>
+            <a:srgbClr val="0F4C43"/>
+          </a:solidFill>
+          <a:ln w="12700">
+            <a:solidFill>
+              <a:srgbClr val="0F4C43"/>
+            </a:solidFill>
+            <a:prstDash val="solid"/>
+          </a:ln>
+        </p:spPr>
+      </p:sp>
+      <p:sp>
+        <p:nvSpPr>
+          <p:cNvPr id="41" name="Text 39"/>
+          <p:cNvSpPr txBox="1"/>
+          <p:nvPr/>
+        </p:nvSpPr>
+        <p:spPr>
+          <a:xfrm>
+            <a:off x="6144768" y="3758184"/>
+            <a:ext cx="457200" cy="457200"/>
+          </a:xfrm>
+          <a:prstGeom prst="rect">
+            <a:avLst/>
+          </a:prstGeom>
+          <a:noFill/>
+          <a:ln/>
+        </p:spPr>
+        <p:txBody>
+          <a:bodyPr wrap="square" lIns="0" tIns="0" rIns="0" bIns="0" rtlCol="0" anchor="ctr"/>
+          <a:lstStyle/>
+          <a:p>
+            <a:pPr algn="ctr" indent="0" marL="0">
+              <a:buNone/>
+            </a:pPr>
+            <a:r>
+              <a:rPr lang="en-US" sz="1000" b="1" dirty="0">
+                <a:solidFill>
+                  <a:srgbClr val="FFFFFF"/>
+                </a:solidFill>
+                <a:latin typeface="Calibri" pitchFamily="34" charset="0"/>
+                <a:ea typeface="Calibri" pitchFamily="34" charset="-122"/>
+                <a:cs typeface="Calibri" pitchFamily="34" charset="-120"/>
+              </a:rPr>
+              <a:t>D10</a:t>
+            </a:r>
+            <a:endParaRPr lang="en-US" sz="1000" dirty="0"/>
+          </a:p>
+        </p:txBody>
+      </p:sp>
+      <p:sp>
+        <p:nvSpPr>
+          <p:cNvPr id="42" name="Text 40"/>
+          <p:cNvSpPr txBox="1"/>
+          <p:nvPr/>
+        </p:nvSpPr>
+        <p:spPr>
+          <a:xfrm>
+            <a:off x="6739128" y="3739896"/>
+            <a:ext cx="4846320" cy="274320"/>
+          </a:xfrm>
+          <a:prstGeom prst="rect">
+            <a:avLst/>
+          </a:prstGeom>
+          <a:noFill/>
+          <a:ln/>
+        </p:spPr>
+        <p:txBody>
+          <a:bodyPr wrap="square" lIns="0" tIns="0" rIns="0" bIns="0" rtlCol="0" anchor="ctr"/>
+          <a:lstStyle/>
+          <a:p>
+            <a:pPr indent="0" marL="0">
+              <a:buNone/>
+            </a:pPr>
+            <a:r>
+              <a:rPr lang="en-US" sz="1250" b="1" dirty="0">
+                <a:solidFill>
+                  <a:srgbClr val="16202B"/>
+                </a:solidFill>
+                <a:latin typeface="Calibri" pitchFamily="34" charset="0"/>
+                <a:ea typeface="Calibri" pitchFamily="34" charset="-122"/>
+                <a:cs typeface="Calibri" pitchFamily="34" charset="-120"/>
+              </a:rPr>
+              <a:t>Readiness: ready, conditional or infeasible</a:t>
+            </a:r>
+            <a:endParaRPr lang="en-US" sz="1250" dirty="0"/>
+          </a:p>
+        </p:txBody>
+      </p:sp>
+      <p:sp>
+        <p:nvSpPr>
+          <p:cNvPr id="43" name="Text 41"/>
+          <p:cNvSpPr txBox="1"/>
+          <p:nvPr/>
+        </p:nvSpPr>
+        <p:spPr>
+          <a:xfrm>
+            <a:off x="6739128" y="4014216"/>
+            <a:ext cx="4846320" cy="384048"/>
+          </a:xfrm>
+          <a:prstGeom prst="rect">
+            <a:avLst/>
+          </a:prstGeom>
+          <a:noFill/>
+          <a:ln/>
+        </p:spPr>
+        <p:txBody>
+          <a:bodyPr wrap="square" lIns="0" tIns="0" rIns="0" bIns="0" rtlCol="0" anchor="t"/>
+          <a:lstStyle/>
+          <a:p>
+            <a:pPr indent="0" marL="0">
+              <a:buNone/>
+            </a:pPr>
+            <a:r>
+              <a:rPr lang="en-US" sz="1050" dirty="0">
+                <a:solidFill>
+                  <a:srgbClr val="5A6B7A"/>
+                </a:solidFill>
+                <a:latin typeface="Calibri" pitchFamily="34" charset="0"/>
+                <a:ea typeface="Calibri" pitchFamily="34" charset="-122"/>
+                <a:cs typeface="Calibri" pitchFamily="34" charset="-120"/>
+              </a:rPr>
+              <a:t>Code Phase 5 gate; infeasible blocks the phase</a:t>
+            </a:r>
+            <a:endParaRPr lang="en-US" sz="1050" dirty="0"/>
+          </a:p>
+        </p:txBody>
+      </p:sp>
+      <p:sp>
+        <p:nvSpPr>
+          <p:cNvPr id="44" name="Shape 42"/>
+          <p:cNvSpPr/>
+          <p:nvPr/>
+        </p:nvSpPr>
+        <p:spPr>
+          <a:xfrm>
+            <a:off x="6144768" y="4471416"/>
+            <a:ext cx="457200" cy="457200"/>
+          </a:xfrm>
+          <a:prstGeom prst="ellipse">
+            <a:avLst/>
+          </a:prstGeom>
+          <a:solidFill>
+            <a:srgbClr val="0F4C43"/>
+          </a:solidFill>
+          <a:ln w="12700">
+            <a:solidFill>
+              <a:srgbClr val="0F4C43"/>
+            </a:solidFill>
+            <a:prstDash val="solid"/>
+          </a:ln>
+        </p:spPr>
+      </p:sp>
+      <p:sp>
+        <p:nvSpPr>
+          <p:cNvPr id="45" name="Text 43"/>
+          <p:cNvSpPr txBox="1"/>
+          <p:nvPr/>
+        </p:nvSpPr>
+        <p:spPr>
+          <a:xfrm>
+            <a:off x="6144768" y="4471416"/>
+            <a:ext cx="457200" cy="457200"/>
+          </a:xfrm>
+          <a:prstGeom prst="rect">
+            <a:avLst/>
+          </a:prstGeom>
+          <a:noFill/>
+          <a:ln/>
+        </p:spPr>
+        <p:txBody>
+          <a:bodyPr wrap="square" lIns="0" tIns="0" rIns="0" bIns="0" rtlCol="0" anchor="ctr"/>
+          <a:lstStyle/>
+          <a:p>
+            <a:pPr algn="ctr" indent="0" marL="0">
+              <a:buNone/>
+            </a:pPr>
+            <a:r>
+              <a:rPr lang="en-US" sz="1000" b="1" dirty="0">
+                <a:solidFill>
+                  <a:srgbClr val="FFFFFF"/>
+                </a:solidFill>
+                <a:latin typeface="Calibri" pitchFamily="34" charset="0"/>
+                <a:ea typeface="Calibri" pitchFamily="34" charset="-122"/>
+                <a:cs typeface="Calibri" pitchFamily="34" charset="-120"/>
+              </a:rPr>
+              <a:t>D11</a:t>
+            </a:r>
+            <a:endParaRPr lang="en-US" sz="1000" dirty="0"/>
+          </a:p>
+        </p:txBody>
+      </p:sp>
+      <p:sp>
+        <p:nvSpPr>
+          <p:cNvPr id="46" name="Text 44"/>
+          <p:cNvSpPr txBox="1"/>
+          <p:nvPr/>
+        </p:nvSpPr>
+        <p:spPr>
+          <a:xfrm>
+            <a:off x="6739128" y="4453128"/>
+            <a:ext cx="4846320" cy="274320"/>
+          </a:xfrm>
+          <a:prstGeom prst="rect">
+            <a:avLst/>
+          </a:prstGeom>
+          <a:noFill/>
+          <a:ln/>
+        </p:spPr>
+        <p:txBody>
+          <a:bodyPr wrap="square" lIns="0" tIns="0" rIns="0" bIns="0" rtlCol="0" anchor="ctr"/>
+          <a:lstStyle/>
+          <a:p>
+            <a:pPr indent="0" marL="0">
+              <a:buNone/>
+            </a:pPr>
+            <a:r>
+              <a:rPr lang="en-US" sz="1250" b="1" dirty="0">
+                <a:solidFill>
+                  <a:srgbClr val="16202B"/>
+                </a:solidFill>
+                <a:latin typeface="Calibri" pitchFamily="34" charset="0"/>
+                <a:ea typeface="Calibri" pitchFamily="34" charset="-122"/>
+                <a:cs typeface="Calibri" pitchFamily="34" charset="-120"/>
+              </a:rPr>
+              <a:t>Request the written package and code, and in which languages</a:t>
+            </a:r>
+            <a:endParaRPr lang="en-US" sz="1250" dirty="0"/>
+          </a:p>
+        </p:txBody>
+      </p:sp>
+      <p:sp>
+        <p:nvSpPr>
+          <p:cNvPr id="47" name="Text 45"/>
+          <p:cNvSpPr txBox="1"/>
+          <p:nvPr/>
+        </p:nvSpPr>
+        <p:spPr>
+          <a:xfrm>
+            <a:off x="6739128" y="4727448"/>
+            <a:ext cx="4846320" cy="384048"/>
+          </a:xfrm>
+          <a:prstGeom prst="rect">
+            <a:avLst/>
+          </a:prstGeom>
+          <a:noFill/>
+          <a:ln/>
+        </p:spPr>
+        <p:txBody>
+          <a:bodyPr wrap="square" lIns="0" tIns="0" rIns="0" bIns="0" rtlCol="0" anchor="t"/>
+          <a:lstStyle/>
+          <a:p>
+            <a:pPr indent="0" marL="0">
+              <a:buNone/>
+            </a:pPr>
+            <a:r>
+              <a:rPr lang="en-US" sz="1050" dirty="0">
+                <a:solidFill>
+                  <a:srgbClr val="5A6B7A"/>
+                </a:solidFill>
+                <a:latin typeface="Calibri" pitchFamily="34" charset="0"/>
+                <a:ea typeface="Calibri" pitchFamily="34" charset="-122"/>
+                <a:cs typeface="Calibri" pitchFamily="34" charset="-120"/>
+              </a:rPr>
+              <a:t>Models draft them on request; code is never executed</a:t>
+            </a:r>
+            <a:endParaRPr lang="en-US" sz="1050" dirty="0"/>
+          </a:p>
+        </p:txBody>
+      </p:sp>
+      <p:sp>
+        <p:nvSpPr>
+          <p:cNvPr id="48" name="Shape 46"/>
+          <p:cNvSpPr/>
+          <p:nvPr/>
+        </p:nvSpPr>
+        <p:spPr>
+          <a:xfrm>
+            <a:off x="6144768" y="5166360"/>
+            <a:ext cx="5349240" cy="685800"/>
+          </a:xfrm>
+          <a:prstGeom prst="rect">
+            <a:avLst/>
+          </a:prstGeom>
+          <a:solidFill>
+            <a:srgbClr val="EEF3F2"/>
+          </a:solidFill>
+          <a:ln w="12700">
+            <a:solidFill>
+              <a:srgbClr val="EEF3F2"/>
+            </a:solidFill>
+            <a:prstDash val="solid"/>
+          </a:ln>
+        </p:spPr>
+      </p:sp>
+      <p:sp>
+        <p:nvSpPr>
+          <p:cNvPr id="49" name="Text 47"/>
+          <p:cNvSpPr txBox="1"/>
+          <p:nvPr/>
+        </p:nvSpPr>
+        <p:spPr>
+          <a:xfrm>
+            <a:off x="6309360" y="5193792"/>
+            <a:ext cx="5029200" cy="640080"/>
+          </a:xfrm>
+          <a:prstGeom prst="rect">
+            <a:avLst/>
+          </a:prstGeom>
+          <a:noFill/>
+          <a:ln/>
+        </p:spPr>
+        <p:txBody>
+          <a:bodyPr wrap="square" lIns="0" tIns="0" rIns="0" bIns="0" rtlCol="0" anchor="ctr"/>
+          <a:lstStyle/>
+          <a:p>
+            <a:pPr indent="0" marL="0">
+              <a:buNone/>
+            </a:pPr>
+            <a:r>
+              <a:rPr lang="en-US" sz="1000" dirty="0">
+                <a:solidFill>
+                  <a:srgbClr val="16202B"/>
+                </a:solidFill>
+                <a:latin typeface="Calibri" pitchFamily="34" charset="0"/>
+                <a:ea typeface="Calibri" pitchFamily="34" charset="-122"/>
+                <a:cs typeface="Calibri" pitchFamily="34" charset="-120"/>
+              </a:rPr>
+              <a:t>Eleven more items are typed inputs rather than choices, and four are presses: build the study, draft the analyses, draft execution, and request the written package and code.</a:t>
+            </a:r>
+            <a:endParaRPr lang="en-US" sz="1000" dirty="0"/>
+          </a:p>
+        </p:txBody>
+      </p:sp>
+    </p:spTree>
+  </p:cSld>
+  <p:clrMapOvr>
+    <a:masterClrMapping/>
+  </p:clrMapOvr>
+</p:sld>
+</file>
+
+<file path=ppt/slides/slide15.xml><?xml version="1.0" encoding="utf-8"?>
+<p:sld xmlns:a="http://schemas.openxmlformats.org/drawingml/2006/main" xmlns:r="http://schemas.openxmlformats.org/officeDocument/2006/relationships" xmlns:p="http://schemas.openxmlformats.org/presentationml/2006/main">
+  <p:cSld name="Slide 15">
+    <p:bg>
+      <p:bgPr>
+        <a:solidFill>
+          <a:srgbClr val="FFFFFF"/>
+        </a:solidFill>
+      </p:bgPr>
+    </p:bg>
+    <p:spTree>
+      <p:nvGrpSpPr>
+        <p:cNvPr id="1" name=""/>
+        <p:cNvGrpSpPr/>
+        <p:nvPr/>
+      </p:nvGrpSpPr>
+      <p:grpSpPr>
+        <a:xfrm>
+          <a:off x="0" y="0"/>
+          <a:ext cx="0" cy="0"/>
+          <a:chOff x="0" y="0"/>
+          <a:chExt cx="0" cy="0"/>
+        </a:xfrm>
+      </p:grpSpPr>
+      <p:sp>
+        <p:nvSpPr>
+          <p:cNvPr id="2" name="Text 0"/>
+          <p:cNvSpPr txBox="1"/>
+          <p:nvPr/>
+        </p:nvSpPr>
+        <p:spPr>
+          <a:xfrm>
+            <a:off x="566928" y="384048"/>
+            <a:ext cx="10881360" cy="658368"/>
+          </a:xfrm>
+          <a:prstGeom prst="rect">
+            <a:avLst/>
+          </a:prstGeom>
+          <a:noFill/>
+          <a:ln/>
+        </p:spPr>
+        <p:txBody>
+          <a:bodyPr wrap="square" lIns="0" tIns="0" rIns="0" bIns="0" rtlCol="0" anchor="ctr"/>
+          <a:lstStyle/>
+          <a:p>
+            <a:pPr indent="0" marL="0">
+              <a:buNone/>
+            </a:pPr>
+            <a:r>
+              <a:rPr lang="en-US" sz="3400" b="1" dirty="0">
+                <a:solidFill>
+                  <a:srgbClr val="16202B"/>
+                </a:solidFill>
+                <a:latin typeface="Cambria" pitchFamily="34" charset="0"/>
+                <a:ea typeface="Cambria" pitchFamily="34" charset="-122"/>
+                <a:cs typeface="Cambria" pitchFamily="34" charset="-120"/>
+              </a:rPr>
+              <a:t>Where it does not yet help</a:t>
+            </a:r>
+            <a:endParaRPr lang="en-US" sz="3400" dirty="0"/>
+          </a:p>
+        </p:txBody>
+      </p:sp>
+      <p:sp>
+        <p:nvSpPr>
+          <p:cNvPr id="3" name="Text 1"/>
+          <p:cNvSpPr txBox="1"/>
+          <p:nvPr/>
+        </p:nvSpPr>
+        <p:spPr>
+          <a:xfrm>
+            <a:off x="566928" y="1060704"/>
+            <a:ext cx="10881360" cy="365760"/>
+          </a:xfrm>
+          <a:prstGeom prst="rect">
+            <a:avLst/>
+          </a:prstGeom>
+          <a:noFill/>
+          <a:ln/>
+        </p:spPr>
+        <p:txBody>
+          <a:bodyPr wrap="square" lIns="0" tIns="0" rIns="0" bIns="0" rtlCol="0" anchor="ctr"/>
+          <a:lstStyle/>
+          <a:p>
+            <a:pPr indent="0" marL="0">
+              <a:buNone/>
+            </a:pPr>
+            <a:r>
+              <a:rPr lang="en-US" sz="1500" dirty="0">
+                <a:solidFill>
+                  <a:srgbClr val="5A6B7A"/>
+                </a:solidFill>
+                <a:latin typeface="Calibri" pitchFamily="34" charset="0"/>
+                <a:ea typeface="Calibri" pitchFamily="34" charset="-122"/>
+                <a:cs typeface="Calibri" pitchFamily="34" charset="-120"/>
+              </a:rPr>
+              <a:t>Taken from the code, the Learn library and the roadmap notes, not inferred</a:t>
+            </a:r>
+            <a:endParaRPr lang="en-US" sz="1500" dirty="0"/>
+          </a:p>
+        </p:txBody>
+      </p:sp>
+      <p:sp>
+        <p:nvSpPr>
+          <p:cNvPr id="4" name="Shape 2"/>
+          <p:cNvSpPr/>
+          <p:nvPr/>
+        </p:nvSpPr>
+        <p:spPr>
+          <a:xfrm>
+            <a:off x="566928" y="1691640"/>
+            <a:ext cx="5349240" cy="1920240"/>
+          </a:xfrm>
+          <a:prstGeom prst="rect">
+            <a:avLst/>
+          </a:prstGeom>
+          <a:solidFill>
+            <a:srgbClr val="EEF3F2"/>
+          </a:solidFill>
+          <a:ln w="12700">
+            <a:solidFill>
+              <a:srgbClr val="EEF3F2"/>
+            </a:solidFill>
+            <a:prstDash val="solid"/>
+          </a:ln>
+        </p:spPr>
+      </p:sp>
+      <p:sp>
+        <p:nvSpPr>
+          <p:cNvPr id="5" name="Text 3"/>
+          <p:cNvSpPr txBox="1"/>
+          <p:nvPr/>
+        </p:nvSpPr>
+        <p:spPr>
+          <a:xfrm>
+            <a:off x="841248" y="1892808"/>
+            <a:ext cx="4800600" cy="365760"/>
+          </a:xfrm>
+          <a:prstGeom prst="rect">
+            <a:avLst/>
+          </a:prstGeom>
+          <a:noFill/>
+          <a:ln/>
+        </p:spPr>
+        <p:txBody>
+          <a:bodyPr wrap="square" lIns="0" tIns="0" rIns="0" bIns="0" rtlCol="0" anchor="ctr"/>
+          <a:lstStyle/>
+          <a:p>
+            <a:pPr indent="0" marL="0">
+              <a:buNone/>
+            </a:pPr>
+            <a:r>
+              <a:rPr lang="en-US" sz="1600" b="1" dirty="0">
+                <a:solidFill>
+                  <a:srgbClr val="0F4C43"/>
+                </a:solidFill>
+                <a:latin typeface="Calibri" pitchFamily="34" charset="0"/>
+                <a:ea typeface="Calibri" pitchFamily="34" charset="-122"/>
+                <a:cs typeface="Calibri" pitchFamily="34" charset="-120"/>
+              </a:rPr>
+              <a:t>Designs it will not size</a:t>
+            </a:r>
+            <a:endParaRPr lang="en-US" sz="1600" dirty="0"/>
+          </a:p>
+        </p:txBody>
+      </p:sp>
+      <p:sp>
+        <p:nvSpPr>
+          <p:cNvPr id="6" name="Text 4"/>
+          <p:cNvSpPr txBox="1"/>
+          <p:nvPr/>
+        </p:nvSpPr>
+        <p:spPr>
+          <a:xfrm>
+            <a:off x="841248" y="2331720"/>
+            <a:ext cx="4800600" cy="1143000"/>
+          </a:xfrm>
+          <a:prstGeom prst="rect">
+            <a:avLst/>
+          </a:prstGeom>
+          <a:noFill/>
+          <a:ln/>
+        </p:spPr>
+        <p:txBody>
+          <a:bodyPr wrap="square" lIns="0" tIns="0" rIns="0" bIns="0" rtlCol="0" anchor="t"/>
+          <a:lstStyle/>
+          <a:p>
+            <a:pPr indent="0" marL="0">
+              <a:buNone/>
+            </a:pPr>
+            <a:r>
+              <a:rPr lang="en-US" sz="1200" dirty="0">
+                <a:solidFill>
+                  <a:srgbClr val="16202B"/>
+                </a:solidFill>
+                <a:latin typeface="Calibri" pitchFamily="34" charset="0"/>
+                <a:ea typeface="Calibri" pitchFamily="34" charset="-122"/>
+                <a:cs typeface="Calibri" pitchFamily="34" charset="-120"/>
+              </a:rPr>
+              <a:t>Cluster and stepped-wedge rollouts, mediation, repeated measures, matched case-control, prediction models, equivalence: the method is named and no number is printed. Adaptive, Bayesian, platform and SMART designs have no path at all.</a:t>
+            </a:r>
+            <a:endParaRPr lang="en-US" sz="1200" dirty="0"/>
+          </a:p>
+        </p:txBody>
+      </p:sp>
+      <p:sp>
+        <p:nvSpPr>
+          <p:cNvPr id="7" name="Shape 5"/>
+          <p:cNvSpPr/>
+          <p:nvPr/>
+        </p:nvSpPr>
+        <p:spPr>
+          <a:xfrm>
+            <a:off x="6236208" y="1691640"/>
+            <a:ext cx="5349240" cy="1920240"/>
+          </a:xfrm>
+          <a:prstGeom prst="rect">
+            <a:avLst/>
+          </a:prstGeom>
+          <a:solidFill>
+            <a:srgbClr val="EEF3F2"/>
+          </a:solidFill>
+          <a:ln w="12700">
+            <a:solidFill>
+              <a:srgbClr val="EEF3F2"/>
+            </a:solidFill>
+            <a:prstDash val="solid"/>
+          </a:ln>
+        </p:spPr>
+      </p:sp>
+      <p:sp>
+        <p:nvSpPr>
+          <p:cNvPr id="8" name="Text 6"/>
+          <p:cNvSpPr txBox="1"/>
+          <p:nvPr/>
+        </p:nvSpPr>
+        <p:spPr>
+          <a:xfrm>
+            <a:off x="6510528" y="1892808"/>
+            <a:ext cx="4800600" cy="365760"/>
+          </a:xfrm>
+          <a:prstGeom prst="rect">
+            <a:avLst/>
+          </a:prstGeom>
+          <a:noFill/>
+          <a:ln/>
+        </p:spPr>
+        <p:txBody>
+          <a:bodyPr wrap="square" lIns="0" tIns="0" rIns="0" bIns="0" rtlCol="0" anchor="ctr"/>
+          <a:lstStyle/>
+          <a:p>
+            <a:pPr indent="0" marL="0">
+              <a:buNone/>
+            </a:pPr>
+            <a:r>
+              <a:rPr lang="en-US" sz="1600" b="1" dirty="0">
+                <a:solidFill>
+                  <a:srgbClr val="0F4C43"/>
+                </a:solidFill>
+                <a:latin typeface="Calibri" pitchFamily="34" charset="0"/>
+                <a:ea typeface="Calibri" pitchFamily="34" charset="-122"/>
+                <a:cs typeface="Calibri" pitchFamily="34" charset="-120"/>
+              </a:rPr>
+              <a:t>The checks confirm naming, not application</a:t>
+            </a:r>
+            <a:endParaRPr lang="en-US" sz="1600" dirty="0"/>
+          </a:p>
+        </p:txBody>
+      </p:sp>
+      <p:sp>
+        <p:nvSpPr>
+          <p:cNvPr id="9" name="Text 7"/>
+          <p:cNvSpPr txBox="1"/>
+          <p:nvPr/>
+        </p:nvSpPr>
+        <p:spPr>
+          <a:xfrm>
+            <a:off x="6510528" y="2331720"/>
+            <a:ext cx="4800600" cy="1143000"/>
+          </a:xfrm>
+          <a:prstGeom prst="rect">
+            <a:avLst/>
+          </a:prstGeom>
+          <a:noFill/>
+          <a:ln/>
+        </p:spPr>
+        <p:txBody>
+          <a:bodyPr wrap="square" lIns="0" tIns="0" rIns="0" bIns="0" rtlCol="0" anchor="t"/>
+          <a:lstStyle/>
+          <a:p>
+            <a:pPr indent="0" marL="0">
+              <a:buNone/>
+            </a:pPr>
+            <a:r>
+              <a:rPr lang="en-US" sz="1200" dirty="0">
+                <a:solidFill>
+                  <a:srgbClr val="16202B"/>
+                </a:solidFill>
+                <a:latin typeface="Calibri" pitchFamily="34" charset="0"/>
+                <a:ea typeface="Calibri" pitchFamily="34" charset="-122"/>
+                <a:cs typeface="Calibri" pitchFamily="34" charset="-120"/>
+              </a:rPr>
+              <a:t>They confirm a plan named the right method. They cannot confirm it was applied correctly, that its assumptions hold, or that the plan is good. No rule covers interim analyses or alpha spending.</a:t>
+            </a:r>
+            <a:endParaRPr lang="en-US" sz="1200" dirty="0"/>
+          </a:p>
+        </p:txBody>
+      </p:sp>
+      <p:sp>
+        <p:nvSpPr>
+          <p:cNvPr id="10" name="Shape 8"/>
+          <p:cNvSpPr/>
+          <p:nvPr/>
+        </p:nvSpPr>
+        <p:spPr>
+          <a:xfrm>
+            <a:off x="566928" y="3794760"/>
+            <a:ext cx="5349240" cy="1920240"/>
+          </a:xfrm>
+          <a:prstGeom prst="rect">
+            <a:avLst/>
+          </a:prstGeom>
+          <a:solidFill>
+            <a:srgbClr val="EEF3F2"/>
+          </a:solidFill>
+          <a:ln w="12700">
+            <a:solidFill>
+              <a:srgbClr val="EEF3F2"/>
+            </a:solidFill>
+            <a:prstDash val="solid"/>
+          </a:ln>
+        </p:spPr>
+      </p:sp>
+      <p:sp>
+        <p:nvSpPr>
+          <p:cNvPr id="11" name="Text 9"/>
+          <p:cNvSpPr txBox="1"/>
+          <p:nvPr/>
+        </p:nvSpPr>
+        <p:spPr>
+          <a:xfrm>
+            <a:off x="841248" y="3995928"/>
+            <a:ext cx="4800600" cy="365760"/>
+          </a:xfrm>
+          <a:prstGeom prst="rect">
+            <a:avLst/>
+          </a:prstGeom>
+          <a:noFill/>
+          <a:ln/>
+        </p:spPr>
+        <p:txBody>
+          <a:bodyPr wrap="square" lIns="0" tIns="0" rIns="0" bIns="0" rtlCol="0" anchor="ctr"/>
+          <a:lstStyle/>
+          <a:p>
+            <a:pPr indent="0" marL="0">
+              <a:buNone/>
+            </a:pPr>
+            <a:r>
+              <a:rPr lang="en-US" sz="1600" b="1" dirty="0">
+                <a:solidFill>
+                  <a:srgbClr val="0F4C43"/>
+                </a:solidFill>
+                <a:latin typeface="Calibri" pitchFamily="34" charset="0"/>
+                <a:ea typeface="Calibri" pitchFamily="34" charset="-122"/>
+                <a:cs typeface="Calibri" pitchFamily="34" charset="-120"/>
+              </a:rPr>
+              <a:t>No independent evaluation</a:t>
+            </a:r>
+            <a:endParaRPr lang="en-US" sz="1600" dirty="0"/>
+          </a:p>
+        </p:txBody>
+      </p:sp>
+      <p:sp>
+        <p:nvSpPr>
+          <p:cNvPr id="12" name="Text 10"/>
+          <p:cNvSpPr txBox="1"/>
+          <p:nvPr/>
+        </p:nvSpPr>
+        <p:spPr>
+          <a:xfrm>
+            <a:off x="841248" y="4434840"/>
+            <a:ext cx="4800600" cy="1143000"/>
+          </a:xfrm>
+          <a:prstGeom prst="rect">
+            <a:avLst/>
+          </a:prstGeom>
+          <a:noFill/>
+          <a:ln/>
+        </p:spPr>
+        <p:txBody>
+          <a:bodyPr wrap="square" lIns="0" tIns="0" rIns="0" bIns="0" rtlCol="0" anchor="t"/>
+          <a:lstStyle/>
+          <a:p>
+            <a:pPr indent="0" marL="0">
+              <a:buNone/>
+            </a:pPr>
+            <a:r>
+              <a:rPr lang="en-US" sz="1200" dirty="0">
+                <a:solidFill>
+                  <a:srgbClr val="16202B"/>
+                </a:solidFill>
+                <a:latin typeface="Calibri" pitchFamily="34" charset="0"/>
+                <a:ea typeface="Calibri" pitchFamily="34" charset="-122"/>
+                <a:cs typeface="Calibri" pitchFamily="34" charset="-120"/>
+              </a:rPr>
+              <a:t>The evaluation was run by the person who built the tool, on scenarios he chose. There is no outcome evidence that studies planned with it are better studies. A September evaluation record measured the write-up step failing on about half of eight attempts.</a:t>
+            </a:r>
+            <a:endParaRPr lang="en-US" sz="1200" dirty="0"/>
+          </a:p>
+        </p:txBody>
+      </p:sp>
+      <p:sp>
+        <p:nvSpPr>
+          <p:cNvPr id="13" name="Shape 11"/>
+          <p:cNvSpPr/>
+          <p:nvPr/>
+        </p:nvSpPr>
+        <p:spPr>
+          <a:xfrm>
+            <a:off x="6236208" y="3794760"/>
+            <a:ext cx="5349240" cy="1920240"/>
+          </a:xfrm>
+          <a:prstGeom prst="rect">
+            <a:avLst/>
+          </a:prstGeom>
+          <a:solidFill>
+            <a:srgbClr val="EEF3F2"/>
+          </a:solidFill>
+          <a:ln w="12700">
+            <a:solidFill>
+              <a:srgbClr val="EEF3F2"/>
+            </a:solidFill>
+            <a:prstDash val="solid"/>
+          </a:ln>
+        </p:spPr>
+      </p:sp>
+      <p:sp>
+        <p:nvSpPr>
+          <p:cNvPr id="14" name="Text 12"/>
+          <p:cNvSpPr txBox="1"/>
+          <p:nvPr/>
+        </p:nvSpPr>
+        <p:spPr>
+          <a:xfrm>
+            <a:off x="6510528" y="3995928"/>
+            <a:ext cx="4800600" cy="365760"/>
+          </a:xfrm>
+          <a:prstGeom prst="rect">
+            <a:avLst/>
+          </a:prstGeom>
+          <a:noFill/>
+          <a:ln/>
+        </p:spPr>
+        <p:txBody>
+          <a:bodyPr wrap="square" lIns="0" tIns="0" rIns="0" bIns="0" rtlCol="0" anchor="ctr"/>
+          <a:lstStyle/>
+          <a:p>
+            <a:pPr indent="0" marL="0">
+              <a:buNone/>
+            </a:pPr>
+            <a:r>
+              <a:rPr lang="en-US" sz="1600" b="1" dirty="0">
+                <a:solidFill>
+                  <a:srgbClr val="0F4C43"/>
+                </a:solidFill>
+                <a:latin typeface="Calibri" pitchFamily="34" charset="0"/>
+                <a:ea typeface="Calibri" pitchFamily="34" charset="-122"/>
+                <a:cs typeface="Calibri" pitchFamily="34" charset="-120"/>
+              </a:rPr>
+              <a:t>Code and citations are drafts</a:t>
+            </a:r>
+            <a:endParaRPr lang="en-US" sz="1600" dirty="0"/>
+          </a:p>
+        </p:txBody>
+      </p:sp>
+      <p:sp>
+        <p:nvSpPr>
+          <p:cNvPr id="15" name="Text 13"/>
+          <p:cNvSpPr txBox="1"/>
+          <p:nvPr/>
+        </p:nvSpPr>
+        <p:spPr>
+          <a:xfrm>
+            <a:off x="6510528" y="4434840"/>
+            <a:ext cx="4800600" cy="1143000"/>
+          </a:xfrm>
+          <a:prstGeom prst="rect">
+            <a:avLst/>
+          </a:prstGeom>
+          <a:noFill/>
+          <a:ln/>
+        </p:spPr>
+        <p:txBody>
+          <a:bodyPr wrap="square" lIns="0" tIns="0" rIns="0" bIns="0" rtlCol="0" anchor="t"/>
+          <a:lstStyle/>
+          <a:p>
+            <a:pPr indent="0" marL="0">
+              <a:buNone/>
+            </a:pPr>
+            <a:r>
+              <a:rPr lang="en-US" sz="1200" dirty="0">
+                <a:solidFill>
+                  <a:srgbClr val="16202B"/>
+                </a:solidFill>
+                <a:latin typeface="Calibri" pitchFamily="34" charset="0"/>
+                <a:ea typeface="Calibri" pitchFamily="34" charset="-122"/>
+                <a:cs typeface="Calibri" pitchFamily="34" charset="-120"/>
+              </a:rPr>
+              <a:t>Generated code is never executed, and every export says so. A reference is verified as a PubMed record, not as a claim: the investigator must confirm it supports the use.</a:t>
+            </a:r>
+            <a:endParaRPr lang="en-US" sz="1200" dirty="0"/>
+          </a:p>
+        </p:txBody>
+      </p:sp>
+      <p:sp>
+        <p:nvSpPr>
+          <p:cNvPr id="16" name="Text 14"/>
+          <p:cNvSpPr txBox="1"/>
+          <p:nvPr/>
+        </p:nvSpPr>
+        <p:spPr>
+          <a:xfrm>
+            <a:off x="566928" y="5943600"/>
+            <a:ext cx="10972800" cy="457200"/>
+          </a:xfrm>
+          <a:prstGeom prst="rect">
+            <a:avLst/>
+          </a:prstGeom>
+          <a:noFill/>
+          <a:ln/>
+        </p:spPr>
+        <p:txBody>
+          <a:bodyPr wrap="square" lIns="0" tIns="0" rIns="0" bIns="0" rtlCol="0" anchor="ctr"/>
+          <a:lstStyle/>
+          <a:p>
+            <a:pPr indent="0" marL="0">
+              <a:buNone/>
+            </a:pPr>
+            <a:r>
+              <a:rPr lang="en-US" sz="1200" dirty="0">
+                <a:solidFill>
+                  <a:srgbClr val="5A6B7A"/>
+                </a:solidFill>
+                <a:latin typeface="Calibri" pitchFamily="34" charset="0"/>
+                <a:ea typeface="Calibri" pitchFamily="34" charset="-122"/>
+                <a:cs typeface="Calibri" pitchFamily="34" charset="-120"/>
+              </a:rPr>
+              <a:t>The product's own methods page lists what it refuses: IRB determinations, final interpretation of results, a sample size it cannot justify, replacing collaborators, writing citations from memory.</a:t>
+            </a:r>
+            <a:endParaRPr lang="en-US" sz="1200" dirty="0"/>
+          </a:p>
+        </p:txBody>
+      </p:sp>
+    </p:spTree>
+  </p:cSld>
+  <p:clrMapOvr>
+    <a:masterClrMapping/>
+  </p:clrMapOvr>
+</p:sld>
+</file>
+
+<file path=ppt/slides/slide16.xml><?xml version="1.0" encoding="utf-8"?>
+<p:sld xmlns:a="http://schemas.openxmlformats.org/drawingml/2006/main" xmlns:r="http://schemas.openxmlformats.org/officeDocument/2006/relationships" xmlns:p="http://schemas.openxmlformats.org/presentationml/2006/main">
+  <p:cSld name="Slide 16">
     <p:bg>
       <p:bgPr>
         <a:solidFill>
@@ -9433,7 +12514,7 @@
                 <a:ea typeface="Cambria" pitchFamily="34" charset="-122"/>
                 <a:cs typeface="Cambria" pitchFamily="34" charset="-120"/>
               </a:rPr>
-              <a:t>One panel of the process map: revision inside Phase 4</a:t>
+              <a:t>Process map 1 of 6: study context and Phase 1 aims</a:t>
             </a:r>
             <a:endParaRPr lang="en-US" sz="3400" dirty="0"/>
           </a:p>
@@ -9472,7 +12553,7 @@
                 <a:ea typeface="Calibri" pitchFamily="34" charset="-122"/>
                 <a:cs typeface="Calibri" pitchFamily="34" charset="-120"/>
               </a:rPr>
-              <a:t>Parallelogram = investigator input · diamond = decision · rectangle = process · numbered circle = continues on another panel</a:t>
+              <a:t>Parallelogram = investigator input · diamond = decision · rectangle = process · numbered circle = continues on the next panel</a:t>
             </a:r>
             <a:endParaRPr lang="en-US" sz="1500" dirty="0"/>
           </a:p>
@@ -9480,7 +12561,7 @@
       </p:sp>
       <p:pic>
         <p:nvPicPr>
-          <p:cNvPr id="4" name="Image 0" descr="panelE.png">    </p:cNvPr>
+          <p:cNvPr id="4" name="Image 0" descr="panelA.png">    </p:cNvPr>
           <p:cNvPicPr>
             <a:picLocks noChangeAspect="1"/>
           </p:cNvPicPr>
@@ -9495,7 +12576,7 @@
         <p:spPr>
           <a:xfrm>
             <a:off x="566928" y="1572768"/>
-            <a:ext cx="9418320" cy="4681728"/>
+            <a:ext cx="9418320" cy="4480560"/>
           </a:xfrm>
           <a:prstGeom prst="rect">
             <a:avLst/>
@@ -9538,7 +12619,7 @@
                 <a:ea typeface="Calibri" pitchFamily="34" charset="-122"/>
                 <a:cs typeface="Calibri" pitchFamily="34" charset="-120"/>
               </a:rPr>
-              <a:t>Read it left to right.</a:t>
+              <a:t>Context is pinned before anything is drafted.</a:t>
             </a:r>
             <a:endParaRPr lang="en-US" sz="1050" dirty="0"/>
           </a:p>
@@ -9558,7 +12639,7 @@
                 <a:ea typeface="Calibri" pitchFamily="34" charset="-122"/>
                 <a:cs typeface="Calibri" pitchFamily="34" charset="-120"/>
               </a:rPr>
-              <a:t>Multiplicity and counts are investigator decisions. An edit is previewed, affected work is marked stale, an update regenerates only that work, and the result waits for acceptance.</a:t>
+              <a:t>Population, setting and constraints are typed facts, and identifying detail is stripped before any model sees the text. The question step asks its clarifying questions, and the investigator confirms the aims at the Phase 1 gate.</a:t>
             </a:r>
             <a:endParaRPr lang="en-US" sz="1050" dirty="0"/>
           </a:p>
@@ -9587,7 +12668,7 @@
                 <a:ea typeface="Calibri" pitchFamily="34" charset="-122"/>
                 <a:cs typeface="Calibri" pitchFamily="34" charset="-120"/>
               </a:rPr>
-              <a:t>Six panels cover the whole flow, tagged I1 to I11 and D1 to D11.</a:t>
+              <a:t>Tags I1 to I11 mark investigator inputs and D1 to D11 decisions, in the order they are asked.</a:t>
             </a:r>
             <a:endParaRPr lang="en-US" sz="1050" dirty="0"/>
           </a:p>
@@ -9658,7 +12739,7 @@
                 <a:ea typeface="Cambria" pitchFamily="34" charset="-122"/>
                 <a:cs typeface="Cambria" pitchFamily="34" charset="-120"/>
               </a:rPr>
-              <a:t>The eleven decisions an investigator makes</a:t>
+              <a:t>Process map 2 of 6: feasibility, estimand, variables, brief</a:t>
             </a:r>
             <a:endParaRPr lang="en-US" sz="3400" dirty="0"/>
           </a:p>
@@ -9697,102 +12778,65 @@
                 <a:ea typeface="Calibri" pitchFamily="34" charset="-122"/>
                 <a:cs typeface="Calibri" pitchFamily="34" charset="-120"/>
               </a:rPr>
-              <a:t>In the order they are asked, and who acts on each one next</a:t>
+              <a:t>Parallelogram = investigator input · diamond = decision · rectangle = process · numbered circle = continues on the next panel</a:t>
             </a:r>
             <a:endParaRPr lang="en-US" sz="1500" dirty="0"/>
           </a:p>
         </p:txBody>
       </p:sp>
-      <p:sp>
-        <p:nvSpPr>
-          <p:cNvPr id="4" name="Shape 2"/>
-          <p:cNvSpPr/>
-          <p:nvPr/>
-        </p:nvSpPr>
-        <p:spPr>
-          <a:xfrm>
-            <a:off x="566928" y="1618488"/>
-            <a:ext cx="457200" cy="457200"/>
-          </a:xfrm>
-          <a:prstGeom prst="ellipse">
-            <a:avLst/>
-          </a:prstGeom>
-          <a:solidFill>
-            <a:srgbClr val="0F4C43"/>
-          </a:solidFill>
-          <a:ln w="12700">
-            <a:solidFill>
-              <a:srgbClr val="0F4C43"/>
-            </a:solidFill>
-            <a:prstDash val="solid"/>
-          </a:ln>
-        </p:spPr>
-      </p:sp>
-      <p:sp>
-        <p:nvSpPr>
-          <p:cNvPr id="5" name="Text 3"/>
-          <p:cNvSpPr txBox="1"/>
-          <p:nvPr/>
-        </p:nvSpPr>
-        <p:spPr>
-          <a:xfrm>
-            <a:off x="566928" y="1618488"/>
-            <a:ext cx="457200" cy="457200"/>
-          </a:xfrm>
-          <a:prstGeom prst="rect">
-            <a:avLst/>
-          </a:prstGeom>
-          <a:noFill/>
-          <a:ln/>
-        </p:spPr>
-        <p:txBody>
-          <a:bodyPr wrap="square" lIns="0" tIns="0" rIns="0" bIns="0" rtlCol="0" anchor="ctr"/>
-          <a:lstStyle/>
-          <a:p>
-            <a:pPr algn="ctr" indent="0" marL="0">
-              <a:buNone/>
-            </a:pPr>
-            <a:r>
-              <a:rPr lang="en-US" sz="1000" b="1" dirty="0">
-                <a:solidFill>
-                  <a:srgbClr val="FFFFFF"/>
-                </a:solidFill>
-                <a:latin typeface="Calibri" pitchFamily="34" charset="0"/>
-                <a:ea typeface="Calibri" pitchFamily="34" charset="-122"/>
-                <a:cs typeface="Calibri" pitchFamily="34" charset="-120"/>
-              </a:rPr>
-              <a:t>D1</a:t>
-            </a:r>
-            <a:endParaRPr lang="en-US" sz="1000" dirty="0"/>
-          </a:p>
-        </p:txBody>
-      </p:sp>
-      <p:sp>
-        <p:nvSpPr>
-          <p:cNvPr id="6" name="Text 4"/>
-          <p:cNvSpPr txBox="1"/>
-          <p:nvPr/>
-        </p:nvSpPr>
-        <p:spPr>
-          <a:xfrm>
-            <a:off x="1161288" y="1600200"/>
-            <a:ext cx="4846320" cy="274320"/>
-          </a:xfrm>
-          <a:prstGeom prst="rect">
-            <a:avLst/>
-          </a:prstGeom>
-          <a:noFill/>
-          <a:ln/>
-        </p:spPr>
-        <p:txBody>
-          <a:bodyPr wrap="square" lIns="0" tIns="0" rIns="0" bIns="0" rtlCol="0" anchor="ctr"/>
-          <a:lstStyle/>
-          <a:p>
-            <a:pPr indent="0" marL="0">
-              <a:buNone/>
-            </a:pPr>
-            <a:r>
-              <a:rPr lang="en-US" sz="1250" b="1" dirty="0">
+      <p:pic>
+        <p:nvPicPr>
+          <p:cNvPr id="4" name="Image 0" descr="panelB.png">    </p:cNvPr>
+          <p:cNvPicPr>
+            <a:picLocks noChangeAspect="1"/>
+          </p:cNvPicPr>
+          <p:nvPr/>
+        </p:nvPicPr>
+        <p:blipFill>
+          <a:blip r:embed="rId1"/>
+          <a:stretch>
+            <a:fillRect/>
+          </a:stretch>
+        </p:blipFill>
+        <p:spPr>
+          <a:xfrm>
+            <a:off x="566928" y="1572768"/>
+            <a:ext cx="8430768" cy="4709160"/>
+          </a:xfrm>
+          <a:prstGeom prst="rect">
+            <a:avLst/>
+          </a:prstGeom>
+        </p:spPr>
+      </p:pic>
+      <p:sp>
+        <p:nvSpPr>
+          <p:cNvPr id="5" name="Text 2"/>
+          <p:cNvSpPr txBox="1"/>
+          <p:nvPr/>
+        </p:nvSpPr>
+        <p:spPr>
+          <a:xfrm>
+            <a:off x="10149840" y="1600200"/>
+            <a:ext cx="1737360" cy="4846320"/>
+          </a:xfrm>
+          <a:prstGeom prst="rect">
+            <a:avLst/>
+          </a:prstGeom>
+          <a:noFill/>
+          <a:ln/>
+        </p:spPr>
+        <p:txBody>
+          <a:bodyPr wrap="square" lIns="0" tIns="0" rIns="0" bIns="0" rtlCol="0" anchor="t"/>
+          <a:lstStyle/>
+          <a:p>
+            <a:pPr indent="0" marL="0">
+              <a:spcAft>
+                <a:spcPts val="600"/>
+              </a:spcAft>
+              <a:buNone/>
+            </a:pPr>
+            <a:r>
+              <a:rPr lang="en-US" sz="1050" b="1" dirty="0">
                 <a:solidFill>
                   <a:srgbClr val="16202B"/>
                 </a:solidFill>
@@ -9800,1532 +12844,58 @@
                 <a:ea typeface="Calibri" pitchFamily="34" charset="-122"/>
                 <a:cs typeface="Calibri" pitchFamily="34" charset="-120"/>
               </a:rPr>
-              <a:t>Any aim confirmatory?</a:t>
-            </a:r>
-            <a:endParaRPr lang="en-US" sz="1250" dirty="0"/>
-          </a:p>
-        </p:txBody>
-      </p:sp>
-      <p:sp>
-        <p:nvSpPr>
-          <p:cNvPr id="7" name="Text 5"/>
-          <p:cNvSpPr txBox="1"/>
-          <p:nvPr/>
-        </p:nvSpPr>
-        <p:spPr>
-          <a:xfrm>
-            <a:off x="1161288" y="1874520"/>
-            <a:ext cx="4846320" cy="384048"/>
-          </a:xfrm>
-          <a:prstGeom prst="rect">
-            <a:avLst/>
-          </a:prstGeom>
-          <a:noFill/>
-          <a:ln/>
-        </p:spPr>
-        <p:txBody>
-          <a:bodyPr wrap="square" lIns="0" tIns="0" rIns="0" bIns="0" rtlCol="0" anchor="t"/>
-          <a:lstStyle/>
-          <a:p>
-            <a:pPr indent="0" marL="0">
+              <a:t>Feasibility is entered as rows, not prose.</a:t>
+            </a:r>
+            <a:endParaRPr lang="en-US" sz="1050" dirty="0"/>
+          </a:p>
+          <a:p>
+            <a:pPr indent="0" marL="0">
+              <a:spcAft>
+                <a:spcPts val="600"/>
+              </a:spcAft>
               <a:buNone/>
             </a:pPr>
             <a:r>
               <a:rPr lang="en-US" sz="1050" dirty="0">
                 <a:solidFill>
+                  <a:srgbClr val="16202B"/>
+                </a:solidFill>
+                <a:latin typeface="Calibri" pitchFamily="34" charset="0"/>
+                <a:ea typeface="Calibri" pitchFamily="34" charset="-122"/>
+                <a:cs typeface="Calibri" pitchFamily="34" charset="-120"/>
+              </a:rPr>
+              <a:t>Recruitment, follow-up and resource limits become facts the code can check against. Phase 3 then settles the aim, hypothesis, estimand and variables before the design brief is generated.</a:t>
+            </a:r>
+            <a:endParaRPr lang="en-US" sz="1050" dirty="0"/>
+          </a:p>
+          <a:p>
+            <a:pPr indent="0" marL="0">
+              <a:spcAft>
+                <a:spcPts val="600"/>
+              </a:spcAft>
+              <a:buNone/>
+            </a:pPr>
+            <a:endParaRPr lang="en-US" sz="1050" dirty="0"/>
+          </a:p>
+          <a:p>
+            <a:pPr indent="0" marL="0">
+              <a:spcAft>
+                <a:spcPts val="600"/>
+              </a:spcAft>
+              <a:buNone/>
+            </a:pPr>
+            <a:r>
+              <a:rPr lang="en-US" sz="1050" dirty="0">
+                <a:solidFill>
                   <a:srgbClr val="5A6B7A"/>
                 </a:solidFill>
                 <a:latin typeface="Calibri" pitchFamily="34" charset="0"/>
                 <a:ea typeface="Calibri" pitchFamily="34" charset="-122"/>
                 <a:cs typeface="Calibri" pitchFamily="34" charset="-120"/>
               </a:rPr>
-              <a:t>Investigator writes the hypothesis; multiplicity becomes required</a:t>
+              <a:t>Tags I1 to I11 mark investigator inputs and D1 to D11 decisions, in the order they are asked.</a:t>
             </a:r>
             <a:endParaRPr lang="en-US" sz="1050" dirty="0"/>
-          </a:p>
-        </p:txBody>
-      </p:sp>
-      <p:sp>
-        <p:nvSpPr>
-          <p:cNvPr id="8" name="Shape 6"/>
-          <p:cNvSpPr/>
-          <p:nvPr/>
-        </p:nvSpPr>
-        <p:spPr>
-          <a:xfrm>
-            <a:off x="566928" y="2331720"/>
-            <a:ext cx="457200" cy="457200"/>
-          </a:xfrm>
-          <a:prstGeom prst="ellipse">
-            <a:avLst/>
-          </a:prstGeom>
-          <a:solidFill>
-            <a:srgbClr val="0F4C43"/>
-          </a:solidFill>
-          <a:ln w="12700">
-            <a:solidFill>
-              <a:srgbClr val="0F4C43"/>
-            </a:solidFill>
-            <a:prstDash val="solid"/>
-          </a:ln>
-        </p:spPr>
-      </p:sp>
-      <p:sp>
-        <p:nvSpPr>
-          <p:cNvPr id="9" name="Text 7"/>
-          <p:cNvSpPr txBox="1"/>
-          <p:nvPr/>
-        </p:nvSpPr>
-        <p:spPr>
-          <a:xfrm>
-            <a:off x="566928" y="2331720"/>
-            <a:ext cx="457200" cy="457200"/>
-          </a:xfrm>
-          <a:prstGeom prst="rect">
-            <a:avLst/>
-          </a:prstGeom>
-          <a:noFill/>
-          <a:ln/>
-        </p:spPr>
-        <p:txBody>
-          <a:bodyPr wrap="square" lIns="0" tIns="0" rIns="0" bIns="0" rtlCol="0" anchor="ctr"/>
-          <a:lstStyle/>
-          <a:p>
-            <a:pPr algn="ctr" indent="0" marL="0">
-              <a:buNone/>
-            </a:pPr>
-            <a:r>
-              <a:rPr lang="en-US" sz="1000" b="1" dirty="0">
-                <a:solidFill>
-                  <a:srgbClr val="FFFFFF"/>
-                </a:solidFill>
-                <a:latin typeface="Calibri" pitchFamily="34" charset="0"/>
-                <a:ea typeface="Calibri" pitchFamily="34" charset="-122"/>
-                <a:cs typeface="Calibri" pitchFamily="34" charset="-120"/>
-              </a:rPr>
-              <a:t>D2</a:t>
-            </a:r>
-            <a:endParaRPr lang="en-US" sz="1000" dirty="0"/>
-          </a:p>
-        </p:txBody>
-      </p:sp>
-      <p:sp>
-        <p:nvSpPr>
-          <p:cNvPr id="10" name="Text 8"/>
-          <p:cNvSpPr txBox="1"/>
-          <p:nvPr/>
-        </p:nvSpPr>
-        <p:spPr>
-          <a:xfrm>
-            <a:off x="1161288" y="2313432"/>
-            <a:ext cx="4846320" cy="274320"/>
-          </a:xfrm>
-          <a:prstGeom prst="rect">
-            <a:avLst/>
-          </a:prstGeom>
-          <a:noFill/>
-          <a:ln/>
-        </p:spPr>
-        <p:txBody>
-          <a:bodyPr wrap="square" lIns="0" tIns="0" rIns="0" bIns="0" rtlCol="0" anchor="ctr"/>
-          <a:lstStyle/>
-          <a:p>
-            <a:pPr indent="0" marL="0">
-              <a:buNone/>
-            </a:pPr>
-            <a:r>
-              <a:rPr lang="en-US" sz="1250" b="1" dirty="0">
-                <a:solidFill>
-                  <a:srgbClr val="16202B"/>
-                </a:solidFill>
-                <a:latin typeface="Calibri" pitchFamily="34" charset="0"/>
-                <a:ea typeface="Calibri" pitchFamily="34" charset="-122"/>
-                <a:cs typeface="Calibri" pitchFamily="34" charset="-120"/>
-              </a:rPr>
-              <a:t>Aims-check finding: apply, keep with a reason, or skip</a:t>
-            </a:r>
-            <a:endParaRPr lang="en-US" sz="1250" dirty="0"/>
-          </a:p>
-        </p:txBody>
-      </p:sp>
-      <p:sp>
-        <p:nvSpPr>
-          <p:cNvPr id="11" name="Text 9"/>
-          <p:cNvSpPr txBox="1"/>
-          <p:nvPr/>
-        </p:nvSpPr>
-        <p:spPr>
-          <a:xfrm>
-            <a:off x="1161288" y="2587752"/>
-            <a:ext cx="4846320" cy="384048"/>
-          </a:xfrm>
-          <a:prstGeom prst="rect">
-            <a:avLst/>
-          </a:prstGeom>
-          <a:noFill/>
-          <a:ln/>
-        </p:spPr>
-        <p:txBody>
-          <a:bodyPr wrap="square" lIns="0" tIns="0" rIns="0" bIns="0" rtlCol="0" anchor="t"/>
-          <a:lstStyle/>
-          <a:p>
-            <a:pPr indent="0" marL="0">
-              <a:buNone/>
-            </a:pPr>
-            <a:r>
-              <a:rPr lang="en-US" sz="1050" dirty="0">
-                <a:solidFill>
-                  <a:srgbClr val="5A6B7A"/>
-                </a:solidFill>
-                <a:latin typeface="Calibri" pitchFamily="34" charset="0"/>
-                <a:ea typeface="Calibri" pitchFamily="34" charset="-122"/>
-                <a:cs typeface="Calibri" pitchFamily="34" charset="-120"/>
-              </a:rPr>
-              <a:t>Model runs the literature scan</a:t>
-            </a:r>
-            <a:endParaRPr lang="en-US" sz="1050" dirty="0"/>
-          </a:p>
-        </p:txBody>
-      </p:sp>
-      <p:sp>
-        <p:nvSpPr>
-          <p:cNvPr id="12" name="Shape 10"/>
-          <p:cNvSpPr/>
-          <p:nvPr/>
-        </p:nvSpPr>
-        <p:spPr>
-          <a:xfrm>
-            <a:off x="566928" y="3044952"/>
-            <a:ext cx="457200" cy="457200"/>
-          </a:xfrm>
-          <a:prstGeom prst="ellipse">
-            <a:avLst/>
-          </a:prstGeom>
-          <a:solidFill>
-            <a:srgbClr val="0F4C43"/>
-          </a:solidFill>
-          <a:ln w="12700">
-            <a:solidFill>
-              <a:srgbClr val="0F4C43"/>
-            </a:solidFill>
-            <a:prstDash val="solid"/>
-          </a:ln>
-        </p:spPr>
-      </p:sp>
-      <p:sp>
-        <p:nvSpPr>
-          <p:cNvPr id="13" name="Text 11"/>
-          <p:cNvSpPr txBox="1"/>
-          <p:nvPr/>
-        </p:nvSpPr>
-        <p:spPr>
-          <a:xfrm>
-            <a:off x="566928" y="3044952"/>
-            <a:ext cx="457200" cy="457200"/>
-          </a:xfrm>
-          <a:prstGeom prst="rect">
-            <a:avLst/>
-          </a:prstGeom>
-          <a:noFill/>
-          <a:ln/>
-        </p:spPr>
-        <p:txBody>
-          <a:bodyPr wrap="square" lIns="0" tIns="0" rIns="0" bIns="0" rtlCol="0" anchor="ctr"/>
-          <a:lstStyle/>
-          <a:p>
-            <a:pPr algn="ctr" indent="0" marL="0">
-              <a:buNone/>
-            </a:pPr>
-            <a:r>
-              <a:rPr lang="en-US" sz="1000" b="1" dirty="0">
-                <a:solidFill>
-                  <a:srgbClr val="FFFFFF"/>
-                </a:solidFill>
-                <a:latin typeface="Calibri" pitchFamily="34" charset="0"/>
-                <a:ea typeface="Calibri" pitchFamily="34" charset="-122"/>
-                <a:cs typeface="Calibri" pitchFamily="34" charset="-120"/>
-              </a:rPr>
-              <a:t>D3</a:t>
-            </a:r>
-            <a:endParaRPr lang="en-US" sz="1000" dirty="0"/>
-          </a:p>
-        </p:txBody>
-      </p:sp>
-      <p:sp>
-        <p:nvSpPr>
-          <p:cNvPr id="14" name="Text 12"/>
-          <p:cNvSpPr txBox="1"/>
-          <p:nvPr/>
-        </p:nvSpPr>
-        <p:spPr>
-          <a:xfrm>
-            <a:off x="1161288" y="3026664"/>
-            <a:ext cx="4846320" cy="274320"/>
-          </a:xfrm>
-          <a:prstGeom prst="rect">
-            <a:avLst/>
-          </a:prstGeom>
-          <a:noFill/>
-          <a:ln/>
-        </p:spPr>
-        <p:txBody>
-          <a:bodyPr wrap="square" lIns="0" tIns="0" rIns="0" bIns="0" rtlCol="0" anchor="ctr"/>
-          <a:lstStyle/>
-          <a:p>
-            <a:pPr indent="0" marL="0">
-              <a:buNone/>
-            </a:pPr>
-            <a:r>
-              <a:rPr lang="en-US" sz="1250" b="1" dirty="0">
-                <a:solidFill>
-                  <a:srgbClr val="16202B"/>
-                </a:solidFill>
-                <a:latin typeface="Calibri" pitchFamily="34" charset="0"/>
-                <a:ea typeface="Calibri" pitchFamily="34" charset="-122"/>
-                <a:cs typeface="Calibri" pitchFamily="34" charset="-120"/>
-              </a:rPr>
-              <a:t>Basis per feasibility answer: checked, assumption, or task</a:t>
-            </a:r>
-            <a:endParaRPr lang="en-US" sz="1250" dirty="0"/>
-          </a:p>
-        </p:txBody>
-      </p:sp>
-      <p:sp>
-        <p:nvSpPr>
-          <p:cNvPr id="15" name="Text 13"/>
-          <p:cNvSpPr txBox="1"/>
-          <p:nvPr/>
-        </p:nvSpPr>
-        <p:spPr>
-          <a:xfrm>
-            <a:off x="1161288" y="3300984"/>
-            <a:ext cx="4846320" cy="384048"/>
-          </a:xfrm>
-          <a:prstGeom prst="rect">
-            <a:avLst/>
-          </a:prstGeom>
-          <a:noFill/>
-          <a:ln/>
-        </p:spPr>
-        <p:txBody>
-          <a:bodyPr wrap="square" lIns="0" tIns="0" rIns="0" bIns="0" rtlCol="0" anchor="t"/>
-          <a:lstStyle/>
-          <a:p>
-            <a:pPr indent="0" marL="0">
-              <a:buNone/>
-            </a:pPr>
-            <a:r>
-              <a:rPr lang="en-US" sz="1050" dirty="0">
-                <a:solidFill>
-                  <a:srgbClr val="5A6B7A"/>
-                </a:solidFill>
-                <a:latin typeface="Calibri" pitchFamily="34" charset="0"/>
-                <a:ea typeface="Calibri" pitchFamily="34" charset="-122"/>
-                <a:cs typeface="Calibri" pitchFamily="34" charset="-120"/>
-              </a:rPr>
-              <a:t>Code Phase 2 gate; a task blocks design until closed</a:t>
-            </a:r>
-            <a:endParaRPr lang="en-US" sz="1050" dirty="0"/>
-          </a:p>
-        </p:txBody>
-      </p:sp>
-      <p:sp>
-        <p:nvSpPr>
-          <p:cNvPr id="16" name="Shape 14"/>
-          <p:cNvSpPr/>
-          <p:nvPr/>
-        </p:nvSpPr>
-        <p:spPr>
-          <a:xfrm>
-            <a:off x="566928" y="3758184"/>
-            <a:ext cx="457200" cy="457200"/>
-          </a:xfrm>
-          <a:prstGeom prst="ellipse">
-            <a:avLst/>
-          </a:prstGeom>
-          <a:solidFill>
-            <a:srgbClr val="0F4C43"/>
-          </a:solidFill>
-          <a:ln w="12700">
-            <a:solidFill>
-              <a:srgbClr val="0F4C43"/>
-            </a:solidFill>
-            <a:prstDash val="solid"/>
-          </a:ln>
-        </p:spPr>
-      </p:sp>
-      <p:sp>
-        <p:nvSpPr>
-          <p:cNvPr id="17" name="Text 15"/>
-          <p:cNvSpPr txBox="1"/>
-          <p:nvPr/>
-        </p:nvSpPr>
-        <p:spPr>
-          <a:xfrm>
-            <a:off x="566928" y="3758184"/>
-            <a:ext cx="457200" cy="457200"/>
-          </a:xfrm>
-          <a:prstGeom prst="rect">
-            <a:avLst/>
-          </a:prstGeom>
-          <a:noFill/>
-          <a:ln/>
-        </p:spPr>
-        <p:txBody>
-          <a:bodyPr wrap="square" lIns="0" tIns="0" rIns="0" bIns="0" rtlCol="0" anchor="ctr"/>
-          <a:lstStyle/>
-          <a:p>
-            <a:pPr algn="ctr" indent="0" marL="0">
-              <a:buNone/>
-            </a:pPr>
-            <a:r>
-              <a:rPr lang="en-US" sz="1000" b="1" dirty="0">
-                <a:solidFill>
-                  <a:srgbClr val="FFFFFF"/>
-                </a:solidFill>
-                <a:latin typeface="Calibri" pitchFamily="34" charset="0"/>
-                <a:ea typeface="Calibri" pitchFamily="34" charset="-122"/>
-                <a:cs typeface="Calibri" pitchFamily="34" charset="-120"/>
-              </a:rPr>
-              <a:t>D4</a:t>
-            </a:r>
-            <a:endParaRPr lang="en-US" sz="1000" dirty="0"/>
-          </a:p>
-        </p:txBody>
-      </p:sp>
-      <p:sp>
-        <p:nvSpPr>
-          <p:cNvPr id="18" name="Text 16"/>
-          <p:cNvSpPr txBox="1"/>
-          <p:nvPr/>
-        </p:nvSpPr>
-        <p:spPr>
-          <a:xfrm>
-            <a:off x="1161288" y="3739896"/>
-            <a:ext cx="4846320" cy="274320"/>
-          </a:xfrm>
-          <a:prstGeom prst="rect">
-            <a:avLst/>
-          </a:prstGeom>
-          <a:noFill/>
-          <a:ln/>
-        </p:spPr>
-        <p:txBody>
-          <a:bodyPr wrap="square" lIns="0" tIns="0" rIns="0" bIns="0" rtlCol="0" anchor="ctr"/>
-          <a:lstStyle/>
-          <a:p>
-            <a:pPr indent="0" marL="0">
-              <a:buNone/>
-            </a:pPr>
-            <a:r>
-              <a:rPr lang="en-US" sz="1250" b="1" dirty="0">
-                <a:solidFill>
-                  <a:srgbClr val="16202B"/>
-                </a:solidFill>
-                <a:latin typeface="Calibri" pitchFamily="34" charset="0"/>
-                <a:ea typeface="Calibri" pitchFamily="34" charset="-122"/>
-                <a:cs typeface="Calibri" pitchFamily="34" charset="-120"/>
-              </a:rPr>
-              <a:t>Approve the design, or pick an alternative</a:t>
-            </a:r>
-            <a:endParaRPr lang="en-US" sz="1250" dirty="0"/>
-          </a:p>
-        </p:txBody>
-      </p:sp>
-      <p:sp>
-        <p:nvSpPr>
-          <p:cNvPr id="19" name="Text 17"/>
-          <p:cNvSpPr txBox="1"/>
-          <p:nvPr/>
-        </p:nvSpPr>
-        <p:spPr>
-          <a:xfrm>
-            <a:off x="1161288" y="4014216"/>
-            <a:ext cx="4846320" cy="384048"/>
-          </a:xfrm>
-          <a:prstGeom prst="rect">
-            <a:avLst/>
-          </a:prstGeom>
-          <a:noFill/>
-          <a:ln/>
-        </p:spPr>
-        <p:txBody>
-          <a:bodyPr wrap="square" lIns="0" tIns="0" rIns="0" bIns="0" rtlCol="0" anchor="t"/>
-          <a:lstStyle/>
-          <a:p>
-            <a:pPr indent="0" marL="0">
-              <a:buNone/>
-            </a:pPr>
-            <a:r>
-              <a:rPr lang="en-US" sz="1050" dirty="0">
-                <a:solidFill>
-                  <a:srgbClr val="5A6B7A"/>
-                </a:solidFill>
-                <a:latin typeface="Calibri" pitchFamily="34" charset="0"/>
-                <a:ea typeface="Calibri" pitchFamily="34" charset="-122"/>
-                <a:cs typeface="Calibri" pitchFamily="34" charset="-120"/>
-              </a:rPr>
-              <a:t>Model re-runs the brief, free; or code runs the conflict gate</a:t>
-            </a:r>
-            <a:endParaRPr lang="en-US" sz="1050" dirty="0"/>
-          </a:p>
-        </p:txBody>
-      </p:sp>
-      <p:sp>
-        <p:nvSpPr>
-          <p:cNvPr id="20" name="Shape 18"/>
-          <p:cNvSpPr/>
-          <p:nvPr/>
-        </p:nvSpPr>
-        <p:spPr>
-          <a:xfrm>
-            <a:off x="566928" y="4471416"/>
-            <a:ext cx="457200" cy="457200"/>
-          </a:xfrm>
-          <a:prstGeom prst="ellipse">
-            <a:avLst/>
-          </a:prstGeom>
-          <a:solidFill>
-            <a:srgbClr val="0F4C43"/>
-          </a:solidFill>
-          <a:ln w="12700">
-            <a:solidFill>
-              <a:srgbClr val="0F4C43"/>
-            </a:solidFill>
-            <a:prstDash val="solid"/>
-          </a:ln>
-        </p:spPr>
-      </p:sp>
-      <p:sp>
-        <p:nvSpPr>
-          <p:cNvPr id="21" name="Text 19"/>
-          <p:cNvSpPr txBox="1"/>
-          <p:nvPr/>
-        </p:nvSpPr>
-        <p:spPr>
-          <a:xfrm>
-            <a:off x="566928" y="4471416"/>
-            <a:ext cx="457200" cy="457200"/>
-          </a:xfrm>
-          <a:prstGeom prst="rect">
-            <a:avLst/>
-          </a:prstGeom>
-          <a:noFill/>
-          <a:ln/>
-        </p:spPr>
-        <p:txBody>
-          <a:bodyPr wrap="square" lIns="0" tIns="0" rIns="0" bIns="0" rtlCol="0" anchor="ctr"/>
-          <a:lstStyle/>
-          <a:p>
-            <a:pPr algn="ctr" indent="0" marL="0">
-              <a:buNone/>
-            </a:pPr>
-            <a:r>
-              <a:rPr lang="en-US" sz="1000" b="1" dirty="0">
-                <a:solidFill>
-                  <a:srgbClr val="FFFFFF"/>
-                </a:solidFill>
-                <a:latin typeface="Calibri" pitchFamily="34" charset="0"/>
-                <a:ea typeface="Calibri" pitchFamily="34" charset="-122"/>
-                <a:cs typeface="Calibri" pitchFamily="34" charset="-120"/>
-              </a:rPr>
-              <a:t>D5</a:t>
-            </a:r>
-            <a:endParaRPr lang="en-US" sz="1000" dirty="0"/>
-          </a:p>
-        </p:txBody>
-      </p:sp>
-      <p:sp>
-        <p:nvSpPr>
-          <p:cNvPr id="22" name="Text 20"/>
-          <p:cNvSpPr txBox="1"/>
-          <p:nvPr/>
-        </p:nvSpPr>
-        <p:spPr>
-          <a:xfrm>
-            <a:off x="1161288" y="4453128"/>
-            <a:ext cx="4846320" cy="274320"/>
-          </a:xfrm>
-          <a:prstGeom prst="rect">
-            <a:avLst/>
-          </a:prstGeom>
-          <a:noFill/>
-          <a:ln/>
-        </p:spPr>
-        <p:txBody>
-          <a:bodyPr wrap="square" lIns="0" tIns="0" rIns="0" bIns="0" rtlCol="0" anchor="ctr"/>
-          <a:lstStyle/>
-          <a:p>
-            <a:pPr indent="0" marL="0">
-              <a:buNone/>
-            </a:pPr>
-            <a:r>
-              <a:rPr lang="en-US" sz="1250" b="1" dirty="0">
-                <a:solidFill>
-                  <a:srgbClr val="16202B"/>
-                </a:solidFill>
-                <a:latin typeface="Calibri" pitchFamily="34" charset="0"/>
-                <a:ea typeface="Calibri" pitchFamily="34" charset="-122"/>
-                <a:cs typeface="Calibri" pitchFamily="34" charset="-120"/>
-              </a:rPr>
-              <a:t>Each design condition: confirmed, to check, or not available</a:t>
-            </a:r>
-            <a:endParaRPr lang="en-US" sz="1250" dirty="0"/>
-          </a:p>
-        </p:txBody>
-      </p:sp>
-      <p:sp>
-        <p:nvSpPr>
-          <p:cNvPr id="23" name="Text 21"/>
-          <p:cNvSpPr txBox="1"/>
-          <p:nvPr/>
-        </p:nvSpPr>
-        <p:spPr>
-          <a:xfrm>
-            <a:off x="1161288" y="4727448"/>
-            <a:ext cx="4846320" cy="384048"/>
-          </a:xfrm>
-          <a:prstGeom prst="rect">
-            <a:avLst/>
-          </a:prstGeom>
-          <a:noFill/>
-          <a:ln/>
-        </p:spPr>
-        <p:txBody>
-          <a:bodyPr wrap="square" lIns="0" tIns="0" rIns="0" bIns="0" rtlCol="0" anchor="t"/>
-          <a:lstStyle/>
-          <a:p>
-            <a:pPr indent="0" marL="0">
-              <a:buNone/>
-            </a:pPr>
-            <a:r>
-              <a:rPr lang="en-US" sz="1050" dirty="0">
-                <a:solidFill>
-                  <a:srgbClr val="5A6B7A"/>
-                </a:solidFill>
-                <a:latin typeface="Calibri" pitchFamily="34" charset="0"/>
-                <a:ea typeface="Calibri" pitchFamily="34" charset="-122"/>
-                <a:cs typeface="Calibri" pitchFamily="34" charset="-120"/>
-              </a:rPr>
-              <a:t>Code Phase 3 gate, then the design confirmation</a:t>
-            </a:r>
-            <a:endParaRPr lang="en-US" sz="1050" dirty="0"/>
-          </a:p>
-        </p:txBody>
-      </p:sp>
-      <p:sp>
-        <p:nvSpPr>
-          <p:cNvPr id="24" name="Shape 22"/>
-          <p:cNvSpPr/>
-          <p:nvPr/>
-        </p:nvSpPr>
-        <p:spPr>
-          <a:xfrm>
-            <a:off x="566928" y="5184648"/>
-            <a:ext cx="457200" cy="457200"/>
-          </a:xfrm>
-          <a:prstGeom prst="ellipse">
-            <a:avLst/>
-          </a:prstGeom>
-          <a:solidFill>
-            <a:srgbClr val="0F4C43"/>
-          </a:solidFill>
-          <a:ln w="12700">
-            <a:solidFill>
-              <a:srgbClr val="0F4C43"/>
-            </a:solidFill>
-            <a:prstDash val="solid"/>
-          </a:ln>
-        </p:spPr>
-      </p:sp>
-      <p:sp>
-        <p:nvSpPr>
-          <p:cNvPr id="25" name="Text 23"/>
-          <p:cNvSpPr txBox="1"/>
-          <p:nvPr/>
-        </p:nvSpPr>
-        <p:spPr>
-          <a:xfrm>
-            <a:off x="566928" y="5184648"/>
-            <a:ext cx="457200" cy="457200"/>
-          </a:xfrm>
-          <a:prstGeom prst="rect">
-            <a:avLst/>
-          </a:prstGeom>
-          <a:noFill/>
-          <a:ln/>
-        </p:spPr>
-        <p:txBody>
-          <a:bodyPr wrap="square" lIns="0" tIns="0" rIns="0" bIns="0" rtlCol="0" anchor="ctr"/>
-          <a:lstStyle/>
-          <a:p>
-            <a:pPr algn="ctr" indent="0" marL="0">
-              <a:buNone/>
-            </a:pPr>
-            <a:r>
-              <a:rPr lang="en-US" sz="1000" b="1" dirty="0">
-                <a:solidFill>
-                  <a:srgbClr val="FFFFFF"/>
-                </a:solidFill>
-                <a:latin typeface="Calibri" pitchFamily="34" charset="0"/>
-                <a:ea typeface="Calibri" pitchFamily="34" charset="-122"/>
-                <a:cs typeface="Calibri" pitchFamily="34" charset="-120"/>
-              </a:rPr>
-              <a:t>D6</a:t>
-            </a:r>
-            <a:endParaRPr lang="en-US" sz="1000" dirty="0"/>
-          </a:p>
-        </p:txBody>
-      </p:sp>
-      <p:sp>
-        <p:nvSpPr>
-          <p:cNvPr id="26" name="Text 24"/>
-          <p:cNvSpPr txBox="1"/>
-          <p:nvPr/>
-        </p:nvSpPr>
-        <p:spPr>
-          <a:xfrm>
-            <a:off x="1161288" y="5166360"/>
-            <a:ext cx="4846320" cy="274320"/>
-          </a:xfrm>
-          <a:prstGeom prst="rect">
-            <a:avLst/>
-          </a:prstGeom>
-          <a:noFill/>
-          <a:ln/>
-        </p:spPr>
-        <p:txBody>
-          <a:bodyPr wrap="square" lIns="0" tIns="0" rIns="0" bIns="0" rtlCol="0" anchor="ctr"/>
-          <a:lstStyle/>
-          <a:p>
-            <a:pPr indent="0" marL="0">
-              <a:buNone/>
-            </a:pPr>
-            <a:r>
-              <a:rPr lang="en-US" sz="1250" b="1" dirty="0">
-                <a:solidFill>
-                  <a:srgbClr val="16202B"/>
-                </a:solidFill>
-                <a:latin typeface="Calibri" pitchFamily="34" charset="0"/>
-                <a:ea typeface="Calibri" pitchFamily="34" charset="-122"/>
-                <a:cs typeface="Calibri" pitchFamily="34" charset="-120"/>
-              </a:rPr>
-              <a:t>Data beyond the map: add it, or remove from the analysis</a:t>
-            </a:r>
-            <a:endParaRPr lang="en-US" sz="1250" dirty="0"/>
-          </a:p>
-        </p:txBody>
-      </p:sp>
-      <p:sp>
-        <p:nvSpPr>
-          <p:cNvPr id="27" name="Text 25"/>
-          <p:cNvSpPr txBox="1"/>
-          <p:nvPr/>
-        </p:nvSpPr>
-        <p:spPr>
-          <a:xfrm>
-            <a:off x="1161288" y="5440680"/>
-            <a:ext cx="4846320" cy="384048"/>
-          </a:xfrm>
-          <a:prstGeom prst="rect">
-            <a:avLst/>
-          </a:prstGeom>
-          <a:noFill/>
-          <a:ln/>
-        </p:spPr>
-        <p:txBody>
-          <a:bodyPr wrap="square" lIns="0" tIns="0" rIns="0" bIns="0" rtlCol="0" anchor="t"/>
-          <a:lstStyle/>
-          <a:p>
-            <a:pPr indent="0" marL="0">
-              <a:buNone/>
-            </a:pPr>
-            <a:r>
-              <a:rPr lang="en-US" sz="1050" dirty="0">
-                <a:solidFill>
-                  <a:srgbClr val="5A6B7A"/>
-                </a:solidFill>
-                <a:latin typeface="Calibri" pitchFamily="34" charset="0"/>
-                <a:ea typeface="Calibri" pitchFamily="34" charset="-122"/>
-                <a:cs typeface="Calibri" pitchFamily="34" charset="-120"/>
-              </a:rPr>
-              <a:t>Investigator fills the analysis contract</a:t>
-            </a:r>
-            <a:endParaRPr lang="en-US" sz="1050" dirty="0"/>
-          </a:p>
-        </p:txBody>
-      </p:sp>
-      <p:sp>
-        <p:nvSpPr>
-          <p:cNvPr id="28" name="Shape 26"/>
-          <p:cNvSpPr/>
-          <p:nvPr/>
-        </p:nvSpPr>
-        <p:spPr>
-          <a:xfrm>
-            <a:off x="6144768" y="1618488"/>
-            <a:ext cx="457200" cy="457200"/>
-          </a:xfrm>
-          <a:prstGeom prst="ellipse">
-            <a:avLst/>
-          </a:prstGeom>
-          <a:solidFill>
-            <a:srgbClr val="0F4C43"/>
-          </a:solidFill>
-          <a:ln w="12700">
-            <a:solidFill>
-              <a:srgbClr val="0F4C43"/>
-            </a:solidFill>
-            <a:prstDash val="solid"/>
-          </a:ln>
-        </p:spPr>
-      </p:sp>
-      <p:sp>
-        <p:nvSpPr>
-          <p:cNvPr id="29" name="Text 27"/>
-          <p:cNvSpPr txBox="1"/>
-          <p:nvPr/>
-        </p:nvSpPr>
-        <p:spPr>
-          <a:xfrm>
-            <a:off x="6144768" y="1618488"/>
-            <a:ext cx="457200" cy="457200"/>
-          </a:xfrm>
-          <a:prstGeom prst="rect">
-            <a:avLst/>
-          </a:prstGeom>
-          <a:noFill/>
-          <a:ln/>
-        </p:spPr>
-        <p:txBody>
-          <a:bodyPr wrap="square" lIns="0" tIns="0" rIns="0" bIns="0" rtlCol="0" anchor="ctr"/>
-          <a:lstStyle/>
-          <a:p>
-            <a:pPr algn="ctr" indent="0" marL="0">
-              <a:buNone/>
-            </a:pPr>
-            <a:r>
-              <a:rPr lang="en-US" sz="1000" b="1" dirty="0">
-                <a:solidFill>
-                  <a:srgbClr val="FFFFFF"/>
-                </a:solidFill>
-                <a:latin typeface="Calibri" pitchFamily="34" charset="0"/>
-                <a:ea typeface="Calibri" pitchFamily="34" charset="-122"/>
-                <a:cs typeface="Calibri" pitchFamily="34" charset="-120"/>
-              </a:rPr>
-              <a:t>D7</a:t>
-            </a:r>
-            <a:endParaRPr lang="en-US" sz="1000" dirty="0"/>
-          </a:p>
-        </p:txBody>
-      </p:sp>
-      <p:sp>
-        <p:nvSpPr>
-          <p:cNvPr id="30" name="Text 28"/>
-          <p:cNvSpPr txBox="1"/>
-          <p:nvPr/>
-        </p:nvSpPr>
-        <p:spPr>
-          <a:xfrm>
-            <a:off x="6739128" y="1600200"/>
-            <a:ext cx="4846320" cy="274320"/>
-          </a:xfrm>
-          <a:prstGeom prst="rect">
-            <a:avLst/>
-          </a:prstGeom>
-          <a:noFill/>
-          <a:ln/>
-        </p:spPr>
-        <p:txBody>
-          <a:bodyPr wrap="square" lIns="0" tIns="0" rIns="0" bIns="0" rtlCol="0" anchor="ctr"/>
-          <a:lstStyle/>
-          <a:p>
-            <a:pPr indent="0" marL="0">
-              <a:buNone/>
-            </a:pPr>
-            <a:r>
-              <a:rPr lang="en-US" sz="1250" b="1" dirty="0">
-                <a:solidFill>
-                  <a:srgbClr val="16202B"/>
-                </a:solidFill>
-                <a:latin typeface="Calibri" pitchFamily="34" charset="0"/>
-                <a:ea typeface="Calibri" pitchFamily="34" charset="-122"/>
-                <a:cs typeface="Calibri" pitchFamily="34" charset="-120"/>
-              </a:rPr>
-              <a:t>Multiplicity family, method and sizing implication</a:t>
-            </a:r>
-            <a:endParaRPr lang="en-US" sz="1250" dirty="0"/>
-          </a:p>
-        </p:txBody>
-      </p:sp>
-      <p:sp>
-        <p:nvSpPr>
-          <p:cNvPr id="31" name="Text 29"/>
-          <p:cNvSpPr txBox="1"/>
-          <p:nvPr/>
-        </p:nvSpPr>
-        <p:spPr>
-          <a:xfrm>
-            <a:off x="6739128" y="1874520"/>
-            <a:ext cx="4846320" cy="384048"/>
-          </a:xfrm>
-          <a:prstGeom prst="rect">
-            <a:avLst/>
-          </a:prstGeom>
-          <a:noFill/>
-          <a:ln/>
-        </p:spPr>
-        <p:txBody>
-          <a:bodyPr wrap="square" lIns="0" tIns="0" rIns="0" bIns="0" rtlCol="0" anchor="t"/>
-          <a:lstStyle/>
-          <a:p>
-            <a:pPr indent="0" marL="0">
-              <a:buNone/>
-            </a:pPr>
-            <a:r>
-              <a:rPr lang="en-US" sz="1050" dirty="0">
-                <a:solidFill>
-                  <a:srgbClr val="5A6B7A"/>
-                </a:solidFill>
-                <a:latin typeface="Calibri" pitchFamily="34" charset="0"/>
-                <a:ea typeface="Calibri" pitchFamily="34" charset="-122"/>
-                <a:cs typeface="Calibri" pitchFamily="34" charset="-120"/>
-              </a:rPr>
-              <a:t>Investigator reconciles counts; code Phase 4 gate</a:t>
-            </a:r>
-            <a:endParaRPr lang="en-US" sz="1050" dirty="0"/>
-          </a:p>
-        </p:txBody>
-      </p:sp>
-      <p:sp>
-        <p:nvSpPr>
-          <p:cNvPr id="32" name="Shape 30"/>
-          <p:cNvSpPr/>
-          <p:nvPr/>
-        </p:nvSpPr>
-        <p:spPr>
-          <a:xfrm>
-            <a:off x="6144768" y="2331720"/>
-            <a:ext cx="457200" cy="457200"/>
-          </a:xfrm>
-          <a:prstGeom prst="ellipse">
-            <a:avLst/>
-          </a:prstGeom>
-          <a:solidFill>
-            <a:srgbClr val="0F4C43"/>
-          </a:solidFill>
-          <a:ln w="12700">
-            <a:solidFill>
-              <a:srgbClr val="0F4C43"/>
-            </a:solidFill>
-            <a:prstDash val="solid"/>
-          </a:ln>
-        </p:spPr>
-      </p:sp>
-      <p:sp>
-        <p:nvSpPr>
-          <p:cNvPr id="33" name="Text 31"/>
-          <p:cNvSpPr txBox="1"/>
-          <p:nvPr/>
-        </p:nvSpPr>
-        <p:spPr>
-          <a:xfrm>
-            <a:off x="6144768" y="2331720"/>
-            <a:ext cx="457200" cy="457200"/>
-          </a:xfrm>
-          <a:prstGeom prst="rect">
-            <a:avLst/>
-          </a:prstGeom>
-          <a:noFill/>
-          <a:ln/>
-        </p:spPr>
-        <p:txBody>
-          <a:bodyPr wrap="square" lIns="0" tIns="0" rIns="0" bIns="0" rtlCol="0" anchor="ctr"/>
-          <a:lstStyle/>
-          <a:p>
-            <a:pPr algn="ctr" indent="0" marL="0">
-              <a:buNone/>
-            </a:pPr>
-            <a:r>
-              <a:rPr lang="en-US" sz="1000" b="1" dirty="0">
-                <a:solidFill>
-                  <a:srgbClr val="FFFFFF"/>
-                </a:solidFill>
-                <a:latin typeface="Calibri" pitchFamily="34" charset="0"/>
-                <a:ea typeface="Calibri" pitchFamily="34" charset="-122"/>
-                <a:cs typeface="Calibri" pitchFamily="34" charset="-120"/>
-              </a:rPr>
-              <a:t>D8</a:t>
-            </a:r>
-            <a:endParaRPr lang="en-US" sz="1000" dirty="0"/>
-          </a:p>
-        </p:txBody>
-      </p:sp>
-      <p:sp>
-        <p:nvSpPr>
-          <p:cNvPr id="34" name="Text 32"/>
-          <p:cNvSpPr txBox="1"/>
-          <p:nvPr/>
-        </p:nvSpPr>
-        <p:spPr>
-          <a:xfrm>
-            <a:off x="6739128" y="2313432"/>
-            <a:ext cx="4846320" cy="274320"/>
-          </a:xfrm>
-          <a:prstGeom prst="rect">
-            <a:avLst/>
-          </a:prstGeom>
-          <a:noFill/>
-          <a:ln/>
-        </p:spPr>
-        <p:txBody>
-          <a:bodyPr wrap="square" lIns="0" tIns="0" rIns="0" bIns="0" rtlCol="0" anchor="ctr"/>
-          <a:lstStyle/>
-          <a:p>
-            <a:pPr indent="0" marL="0">
-              <a:buNone/>
-            </a:pPr>
-            <a:r>
-              <a:rPr lang="en-US" sz="1250" b="1" dirty="0">
-                <a:solidFill>
-                  <a:srgbClr val="16202B"/>
-                </a:solidFill>
-                <a:latin typeface="Calibri" pitchFamily="34" charset="0"/>
-                <a:ea typeface="Calibri" pitchFamily="34" charset="-122"/>
-                <a:cs typeface="Calibri" pitchFamily="34" charset="-120"/>
-              </a:rPr>
-              <a:t>After an edit: save only, or update the affected sections</a:t>
-            </a:r>
-            <a:endParaRPr lang="en-US" sz="1250" dirty="0"/>
-          </a:p>
-        </p:txBody>
-      </p:sp>
-      <p:sp>
-        <p:nvSpPr>
-          <p:cNvPr id="35" name="Text 33"/>
-          <p:cNvSpPr txBox="1"/>
-          <p:nvPr/>
-        </p:nvSpPr>
-        <p:spPr>
-          <a:xfrm>
-            <a:off x="6739128" y="2587752"/>
-            <a:ext cx="4846320" cy="384048"/>
-          </a:xfrm>
-          <a:prstGeom prst="rect">
-            <a:avLst/>
-          </a:prstGeom>
-          <a:noFill/>
-          <a:ln/>
-        </p:spPr>
-        <p:txBody>
-          <a:bodyPr wrap="square" lIns="0" tIns="0" rIns="0" bIns="0" rtlCol="0" anchor="t"/>
-          <a:lstStyle/>
-          <a:p>
-            <a:pPr indent="0" marL="0">
-              <a:buNone/>
-            </a:pPr>
-            <a:r>
-              <a:rPr lang="en-US" sz="1050" dirty="0">
-                <a:solidFill>
-                  <a:srgbClr val="5A6B7A"/>
-                </a:solidFill>
-                <a:latin typeface="Calibri" pitchFamily="34" charset="0"/>
-                <a:ea typeface="Calibri" pitchFamily="34" charset="-122"/>
-                <a:cs typeface="Calibri" pitchFamily="34" charset="-120"/>
-              </a:rPr>
-              <a:t>Code marks stale work; models regenerate only that</a:t>
-            </a:r>
-            <a:endParaRPr lang="en-US" sz="1050" dirty="0"/>
-          </a:p>
-        </p:txBody>
-      </p:sp>
-      <p:sp>
-        <p:nvSpPr>
-          <p:cNvPr id="36" name="Shape 34"/>
-          <p:cNvSpPr/>
-          <p:nvPr/>
-        </p:nvSpPr>
-        <p:spPr>
-          <a:xfrm>
-            <a:off x="6144768" y="3044952"/>
-            <a:ext cx="457200" cy="457200"/>
-          </a:xfrm>
-          <a:prstGeom prst="ellipse">
-            <a:avLst/>
-          </a:prstGeom>
-          <a:solidFill>
-            <a:srgbClr val="0F4C43"/>
-          </a:solidFill>
-          <a:ln w="12700">
-            <a:solidFill>
-              <a:srgbClr val="0F4C43"/>
-            </a:solidFill>
-            <a:prstDash val="solid"/>
-          </a:ln>
-        </p:spPr>
-      </p:sp>
-      <p:sp>
-        <p:nvSpPr>
-          <p:cNvPr id="37" name="Text 35"/>
-          <p:cNvSpPr txBox="1"/>
-          <p:nvPr/>
-        </p:nvSpPr>
-        <p:spPr>
-          <a:xfrm>
-            <a:off x="6144768" y="3044952"/>
-            <a:ext cx="457200" cy="457200"/>
-          </a:xfrm>
-          <a:prstGeom prst="rect">
-            <a:avLst/>
-          </a:prstGeom>
-          <a:noFill/>
-          <a:ln/>
-        </p:spPr>
-        <p:txBody>
-          <a:bodyPr wrap="square" lIns="0" tIns="0" rIns="0" bIns="0" rtlCol="0" anchor="ctr"/>
-          <a:lstStyle/>
-          <a:p>
-            <a:pPr algn="ctr" indent="0" marL="0">
-              <a:buNone/>
-            </a:pPr>
-            <a:r>
-              <a:rPr lang="en-US" sz="1000" b="1" dirty="0">
-                <a:solidFill>
-                  <a:srgbClr val="FFFFFF"/>
-                </a:solidFill>
-                <a:latin typeface="Calibri" pitchFamily="34" charset="0"/>
-                <a:ea typeface="Calibri" pitchFamily="34" charset="-122"/>
-                <a:cs typeface="Calibri" pitchFamily="34" charset="-120"/>
-              </a:rPr>
-              <a:t>D9</a:t>
-            </a:r>
-            <a:endParaRPr lang="en-US" sz="1000" dirty="0"/>
-          </a:p>
-        </p:txBody>
-      </p:sp>
-      <p:sp>
-        <p:nvSpPr>
-          <p:cNvPr id="38" name="Text 36"/>
-          <p:cNvSpPr txBox="1"/>
-          <p:nvPr/>
-        </p:nvSpPr>
-        <p:spPr>
-          <a:xfrm>
-            <a:off x="6739128" y="3026664"/>
-            <a:ext cx="4846320" cy="274320"/>
-          </a:xfrm>
-          <a:prstGeom prst="rect">
-            <a:avLst/>
-          </a:prstGeom>
-          <a:noFill/>
-          <a:ln/>
-        </p:spPr>
-        <p:txBody>
-          <a:bodyPr wrap="square" lIns="0" tIns="0" rIns="0" bIns="0" rtlCol="0" anchor="ctr"/>
-          <a:lstStyle/>
-          <a:p>
-            <a:pPr indent="0" marL="0">
-              <a:buNone/>
-            </a:pPr>
-            <a:r>
-              <a:rPr lang="en-US" sz="1250" b="1" dirty="0">
-                <a:solidFill>
-                  <a:srgbClr val="16202B"/>
-                </a:solidFill>
-                <a:latin typeface="Calibri" pitchFamily="34" charset="0"/>
-                <a:ea typeface="Calibri" pitchFamily="34" charset="-122"/>
-                <a:cs typeface="Calibri" pitchFamily="34" charset="-120"/>
-              </a:rPr>
-              <a:t>Accept or discard the generated changes</a:t>
-            </a:r>
-            <a:endParaRPr lang="en-US" sz="1250" dirty="0"/>
-          </a:p>
-        </p:txBody>
-      </p:sp>
-      <p:sp>
-        <p:nvSpPr>
-          <p:cNvPr id="39" name="Text 37"/>
-          <p:cNvSpPr txBox="1"/>
-          <p:nvPr/>
-        </p:nvSpPr>
-        <p:spPr>
-          <a:xfrm>
-            <a:off x="6739128" y="3300984"/>
-            <a:ext cx="4846320" cy="384048"/>
-          </a:xfrm>
-          <a:prstGeom prst="rect">
-            <a:avLst/>
-          </a:prstGeom>
-          <a:noFill/>
-          <a:ln/>
-        </p:spPr>
-        <p:txBody>
-          <a:bodyPr wrap="square" lIns="0" tIns="0" rIns="0" bIns="0" rtlCol="0" anchor="t"/>
-          <a:lstStyle/>
-          <a:p>
-            <a:pPr indent="0" marL="0">
-              <a:buNone/>
-            </a:pPr>
-            <a:r>
-              <a:rPr lang="en-US" sz="1050" dirty="0">
-                <a:solidFill>
-                  <a:srgbClr val="5A6B7A"/>
-                </a:solidFill>
-                <a:latin typeface="Calibri" pitchFamily="34" charset="0"/>
-                <a:ea typeface="Calibri" pitchFamily="34" charset="-122"/>
-                <a:cs typeface="Calibri" pitchFamily="34" charset="-120"/>
-              </a:rPr>
-              <a:t>Code Phase 4 gate; the result is refused if decisions moved</a:t>
-            </a:r>
-            <a:endParaRPr lang="en-US" sz="1050" dirty="0"/>
-          </a:p>
-        </p:txBody>
-      </p:sp>
-      <p:sp>
-        <p:nvSpPr>
-          <p:cNvPr id="40" name="Shape 38"/>
-          <p:cNvSpPr/>
-          <p:nvPr/>
-        </p:nvSpPr>
-        <p:spPr>
-          <a:xfrm>
-            <a:off x="6144768" y="3758184"/>
-            <a:ext cx="457200" cy="457200"/>
-          </a:xfrm>
-          <a:prstGeom prst="ellipse">
-            <a:avLst/>
-          </a:prstGeom>
-          <a:solidFill>
-            <a:srgbClr val="0F4C43"/>
-          </a:solidFill>
-          <a:ln w="12700">
-            <a:solidFill>
-              <a:srgbClr val="0F4C43"/>
-            </a:solidFill>
-            <a:prstDash val="solid"/>
-          </a:ln>
-        </p:spPr>
-      </p:sp>
-      <p:sp>
-        <p:nvSpPr>
-          <p:cNvPr id="41" name="Text 39"/>
-          <p:cNvSpPr txBox="1"/>
-          <p:nvPr/>
-        </p:nvSpPr>
-        <p:spPr>
-          <a:xfrm>
-            <a:off x="6144768" y="3758184"/>
-            <a:ext cx="457200" cy="457200"/>
-          </a:xfrm>
-          <a:prstGeom prst="rect">
-            <a:avLst/>
-          </a:prstGeom>
-          <a:noFill/>
-          <a:ln/>
-        </p:spPr>
-        <p:txBody>
-          <a:bodyPr wrap="square" lIns="0" tIns="0" rIns="0" bIns="0" rtlCol="0" anchor="ctr"/>
-          <a:lstStyle/>
-          <a:p>
-            <a:pPr algn="ctr" indent="0" marL="0">
-              <a:buNone/>
-            </a:pPr>
-            <a:r>
-              <a:rPr lang="en-US" sz="1000" b="1" dirty="0">
-                <a:solidFill>
-                  <a:srgbClr val="FFFFFF"/>
-                </a:solidFill>
-                <a:latin typeface="Calibri" pitchFamily="34" charset="0"/>
-                <a:ea typeface="Calibri" pitchFamily="34" charset="-122"/>
-                <a:cs typeface="Calibri" pitchFamily="34" charset="-120"/>
-              </a:rPr>
-              <a:t>D10</a:t>
-            </a:r>
-            <a:endParaRPr lang="en-US" sz="1000" dirty="0"/>
-          </a:p>
-        </p:txBody>
-      </p:sp>
-      <p:sp>
-        <p:nvSpPr>
-          <p:cNvPr id="42" name="Text 40"/>
-          <p:cNvSpPr txBox="1"/>
-          <p:nvPr/>
-        </p:nvSpPr>
-        <p:spPr>
-          <a:xfrm>
-            <a:off x="6739128" y="3739896"/>
-            <a:ext cx="4846320" cy="274320"/>
-          </a:xfrm>
-          <a:prstGeom prst="rect">
-            <a:avLst/>
-          </a:prstGeom>
-          <a:noFill/>
-          <a:ln/>
-        </p:spPr>
-        <p:txBody>
-          <a:bodyPr wrap="square" lIns="0" tIns="0" rIns="0" bIns="0" rtlCol="0" anchor="ctr"/>
-          <a:lstStyle/>
-          <a:p>
-            <a:pPr indent="0" marL="0">
-              <a:buNone/>
-            </a:pPr>
-            <a:r>
-              <a:rPr lang="en-US" sz="1250" b="1" dirty="0">
-                <a:solidFill>
-                  <a:srgbClr val="16202B"/>
-                </a:solidFill>
-                <a:latin typeface="Calibri" pitchFamily="34" charset="0"/>
-                <a:ea typeface="Calibri" pitchFamily="34" charset="-122"/>
-                <a:cs typeface="Calibri" pitchFamily="34" charset="-120"/>
-              </a:rPr>
-              <a:t>Readiness: ready, conditional or infeasible</a:t>
-            </a:r>
-            <a:endParaRPr lang="en-US" sz="1250" dirty="0"/>
-          </a:p>
-        </p:txBody>
-      </p:sp>
-      <p:sp>
-        <p:nvSpPr>
-          <p:cNvPr id="43" name="Text 41"/>
-          <p:cNvSpPr txBox="1"/>
-          <p:nvPr/>
-        </p:nvSpPr>
-        <p:spPr>
-          <a:xfrm>
-            <a:off x="6739128" y="4014216"/>
-            <a:ext cx="4846320" cy="384048"/>
-          </a:xfrm>
-          <a:prstGeom prst="rect">
-            <a:avLst/>
-          </a:prstGeom>
-          <a:noFill/>
-          <a:ln/>
-        </p:spPr>
-        <p:txBody>
-          <a:bodyPr wrap="square" lIns="0" tIns="0" rIns="0" bIns="0" rtlCol="0" anchor="t"/>
-          <a:lstStyle/>
-          <a:p>
-            <a:pPr indent="0" marL="0">
-              <a:buNone/>
-            </a:pPr>
-            <a:r>
-              <a:rPr lang="en-US" sz="1050" dirty="0">
-                <a:solidFill>
-                  <a:srgbClr val="5A6B7A"/>
-                </a:solidFill>
-                <a:latin typeface="Calibri" pitchFamily="34" charset="0"/>
-                <a:ea typeface="Calibri" pitchFamily="34" charset="-122"/>
-                <a:cs typeface="Calibri" pitchFamily="34" charset="-120"/>
-              </a:rPr>
-              <a:t>Code Phase 5 gate; infeasible blocks the phase</a:t>
-            </a:r>
-            <a:endParaRPr lang="en-US" sz="1050" dirty="0"/>
-          </a:p>
-        </p:txBody>
-      </p:sp>
-      <p:sp>
-        <p:nvSpPr>
-          <p:cNvPr id="44" name="Shape 42"/>
-          <p:cNvSpPr/>
-          <p:nvPr/>
-        </p:nvSpPr>
-        <p:spPr>
-          <a:xfrm>
-            <a:off x="6144768" y="4471416"/>
-            <a:ext cx="457200" cy="457200"/>
-          </a:xfrm>
-          <a:prstGeom prst="ellipse">
-            <a:avLst/>
-          </a:prstGeom>
-          <a:solidFill>
-            <a:srgbClr val="0F4C43"/>
-          </a:solidFill>
-          <a:ln w="12700">
-            <a:solidFill>
-              <a:srgbClr val="0F4C43"/>
-            </a:solidFill>
-            <a:prstDash val="solid"/>
-          </a:ln>
-        </p:spPr>
-      </p:sp>
-      <p:sp>
-        <p:nvSpPr>
-          <p:cNvPr id="45" name="Text 43"/>
-          <p:cNvSpPr txBox="1"/>
-          <p:nvPr/>
-        </p:nvSpPr>
-        <p:spPr>
-          <a:xfrm>
-            <a:off x="6144768" y="4471416"/>
-            <a:ext cx="457200" cy="457200"/>
-          </a:xfrm>
-          <a:prstGeom prst="rect">
-            <a:avLst/>
-          </a:prstGeom>
-          <a:noFill/>
-          <a:ln/>
-        </p:spPr>
-        <p:txBody>
-          <a:bodyPr wrap="square" lIns="0" tIns="0" rIns="0" bIns="0" rtlCol="0" anchor="ctr"/>
-          <a:lstStyle/>
-          <a:p>
-            <a:pPr algn="ctr" indent="0" marL="0">
-              <a:buNone/>
-            </a:pPr>
-            <a:r>
-              <a:rPr lang="en-US" sz="1000" b="1" dirty="0">
-                <a:solidFill>
-                  <a:srgbClr val="FFFFFF"/>
-                </a:solidFill>
-                <a:latin typeface="Calibri" pitchFamily="34" charset="0"/>
-                <a:ea typeface="Calibri" pitchFamily="34" charset="-122"/>
-                <a:cs typeface="Calibri" pitchFamily="34" charset="-120"/>
-              </a:rPr>
-              <a:t>D11</a:t>
-            </a:r>
-            <a:endParaRPr lang="en-US" sz="1000" dirty="0"/>
-          </a:p>
-        </p:txBody>
-      </p:sp>
-      <p:sp>
-        <p:nvSpPr>
-          <p:cNvPr id="46" name="Text 44"/>
-          <p:cNvSpPr txBox="1"/>
-          <p:nvPr/>
-        </p:nvSpPr>
-        <p:spPr>
-          <a:xfrm>
-            <a:off x="6739128" y="4453128"/>
-            <a:ext cx="4846320" cy="274320"/>
-          </a:xfrm>
-          <a:prstGeom prst="rect">
-            <a:avLst/>
-          </a:prstGeom>
-          <a:noFill/>
-          <a:ln/>
-        </p:spPr>
-        <p:txBody>
-          <a:bodyPr wrap="square" lIns="0" tIns="0" rIns="0" bIns="0" rtlCol="0" anchor="ctr"/>
-          <a:lstStyle/>
-          <a:p>
-            <a:pPr indent="0" marL="0">
-              <a:buNone/>
-            </a:pPr>
-            <a:r>
-              <a:rPr lang="en-US" sz="1250" b="1" dirty="0">
-                <a:solidFill>
-                  <a:srgbClr val="16202B"/>
-                </a:solidFill>
-                <a:latin typeface="Calibri" pitchFamily="34" charset="0"/>
-                <a:ea typeface="Calibri" pitchFamily="34" charset="-122"/>
-                <a:cs typeface="Calibri" pitchFamily="34" charset="-120"/>
-              </a:rPr>
-              <a:t>Request the written package and code, and in which languages</a:t>
-            </a:r>
-            <a:endParaRPr lang="en-US" sz="1250" dirty="0"/>
-          </a:p>
-        </p:txBody>
-      </p:sp>
-      <p:sp>
-        <p:nvSpPr>
-          <p:cNvPr id="47" name="Text 45"/>
-          <p:cNvSpPr txBox="1"/>
-          <p:nvPr/>
-        </p:nvSpPr>
-        <p:spPr>
-          <a:xfrm>
-            <a:off x="6739128" y="4727448"/>
-            <a:ext cx="4846320" cy="384048"/>
-          </a:xfrm>
-          <a:prstGeom prst="rect">
-            <a:avLst/>
-          </a:prstGeom>
-          <a:noFill/>
-          <a:ln/>
-        </p:spPr>
-        <p:txBody>
-          <a:bodyPr wrap="square" lIns="0" tIns="0" rIns="0" bIns="0" rtlCol="0" anchor="t"/>
-          <a:lstStyle/>
-          <a:p>
-            <a:pPr indent="0" marL="0">
-              <a:buNone/>
-            </a:pPr>
-            <a:r>
-              <a:rPr lang="en-US" sz="1050" dirty="0">
-                <a:solidFill>
-                  <a:srgbClr val="5A6B7A"/>
-                </a:solidFill>
-                <a:latin typeface="Calibri" pitchFamily="34" charset="0"/>
-                <a:ea typeface="Calibri" pitchFamily="34" charset="-122"/>
-                <a:cs typeface="Calibri" pitchFamily="34" charset="-120"/>
-              </a:rPr>
-              <a:t>Models draft them on request; code is never executed</a:t>
-            </a:r>
-            <a:endParaRPr lang="en-US" sz="1050" dirty="0"/>
-          </a:p>
-        </p:txBody>
-      </p:sp>
-      <p:sp>
-        <p:nvSpPr>
-          <p:cNvPr id="48" name="Shape 46"/>
-          <p:cNvSpPr/>
-          <p:nvPr/>
-        </p:nvSpPr>
-        <p:spPr>
-          <a:xfrm>
-            <a:off x="6144768" y="5166360"/>
-            <a:ext cx="5349240" cy="685800"/>
-          </a:xfrm>
-          <a:prstGeom prst="rect">
-            <a:avLst/>
-          </a:prstGeom>
-          <a:solidFill>
-            <a:srgbClr val="EEF3F2"/>
-          </a:solidFill>
-          <a:ln w="12700">
-            <a:solidFill>
-              <a:srgbClr val="EEF3F2"/>
-            </a:solidFill>
-            <a:prstDash val="solid"/>
-          </a:ln>
-        </p:spPr>
-      </p:sp>
-      <p:sp>
-        <p:nvSpPr>
-          <p:cNvPr id="49" name="Text 47"/>
-          <p:cNvSpPr txBox="1"/>
-          <p:nvPr/>
-        </p:nvSpPr>
-        <p:spPr>
-          <a:xfrm>
-            <a:off x="6309360" y="5193792"/>
-            <a:ext cx="5029200" cy="640080"/>
-          </a:xfrm>
-          <a:prstGeom prst="rect">
-            <a:avLst/>
-          </a:prstGeom>
-          <a:noFill/>
-          <a:ln/>
-        </p:spPr>
-        <p:txBody>
-          <a:bodyPr wrap="square" lIns="0" tIns="0" rIns="0" bIns="0" rtlCol="0" anchor="ctr"/>
-          <a:lstStyle/>
-          <a:p>
-            <a:pPr indent="0" marL="0">
-              <a:buNone/>
-            </a:pPr>
-            <a:r>
-              <a:rPr lang="en-US" sz="1000" dirty="0">
-                <a:solidFill>
-                  <a:srgbClr val="16202B"/>
-                </a:solidFill>
-                <a:latin typeface="Calibri" pitchFamily="34" charset="0"/>
-                <a:ea typeface="Calibri" pitchFamily="34" charset="-122"/>
-                <a:cs typeface="Calibri" pitchFamily="34" charset="-120"/>
-              </a:rPr>
-              <a:t>Eleven more items are typed inputs rather than choices, and four are presses: build the study, draft the analyses, draft execution, and request the written package and code.</a:t>
-            </a:r>
-            <a:endParaRPr lang="en-US" sz="1000" dirty="0"/>
           </a:p>
         </p:txBody>
       </p:sp>
